--- a/~sasano/lecture/proglang/26/proglang5.pptx
+++ b/~sasano/lecture/proglang/26/proglang5.pptx
@@ -130,6 +130,22 @@
       </a:defRPr>
     </a:lvl9pPr>
   </p:defaultTextStyle>
+  <p:extLst>
+    <p:ext uri="{EFAFB233-063F-42B5-8137-9DF3F51BA10A}">
+      <p15:sldGuideLst xmlns:p15="http://schemas.microsoft.com/office/powerpoint/2012/main">
+        <p15:guide id="1" orient="horz" pos="2160">
+          <p15:clr>
+            <a:srgbClr val="A4A3A4"/>
+          </p15:clr>
+        </p15:guide>
+        <p15:guide id="2" pos="2880">
+          <p15:clr>
+            <a:srgbClr val="A4A3A4"/>
+          </p15:clr>
+        </p15:guide>
+      </p15:sldGuideLst>
+    </p:ext>
+  </p:extLst>
 </p:presentation>
 </file>
 
@@ -216,7 +232,7 @@
             <a:fld id="{2A1D0DAA-63F4-43D0-882A-891F9A495018}" type="datetimeFigureOut">
               <a:rPr kumimoji="1" lang="ja-JP" altLang="en-US" smtClean="0"/>
               <a:pPr/>
-              <a:t>2014/10/24</a:t>
+              <a:t>2026/9/28</a:t>
             </a:fld>
             <a:endParaRPr kumimoji="1" lang="ja-JP" altLang="en-US"/>
           </a:p>
@@ -282,70 +298,69 @@
           <a:p>
             <a:pPr lvl="0"/>
             <a:r>
-              <a:rPr kumimoji="1" lang="ja-JP" altLang="en-US" smtClean="0"/>
+              <a:rPr kumimoji="1" lang="ja-JP" altLang="en-US"/>
               <a:t>マスタ テキストの書式設定</a:t>
             </a:r>
           </a:p>
           <a:p>
             <a:pPr lvl="1"/>
             <a:r>
-              <a:rPr kumimoji="1" lang="ja-JP" altLang="en-US" smtClean="0"/>
+              <a:rPr kumimoji="1" lang="ja-JP" altLang="en-US"/>
               <a:t>第 </a:t>
             </a:r>
             <a:r>
-              <a:rPr kumimoji="1" lang="en-US" altLang="ja-JP" smtClean="0"/>
+              <a:rPr kumimoji="1" lang="en-US" altLang="ja-JP"/>
               <a:t>2 </a:t>
             </a:r>
             <a:r>
-              <a:rPr kumimoji="1" lang="ja-JP" altLang="en-US" smtClean="0"/>
+              <a:rPr kumimoji="1" lang="ja-JP" altLang="en-US"/>
               <a:t>レベル</a:t>
             </a:r>
           </a:p>
           <a:p>
             <a:pPr lvl="2"/>
             <a:r>
-              <a:rPr kumimoji="1" lang="ja-JP" altLang="en-US" smtClean="0"/>
+              <a:rPr kumimoji="1" lang="ja-JP" altLang="en-US"/>
               <a:t>第 </a:t>
             </a:r>
             <a:r>
-              <a:rPr kumimoji="1" lang="en-US" altLang="ja-JP" smtClean="0"/>
+              <a:rPr kumimoji="1" lang="en-US" altLang="ja-JP"/>
               <a:t>3 </a:t>
             </a:r>
             <a:r>
-              <a:rPr kumimoji="1" lang="ja-JP" altLang="en-US" smtClean="0"/>
+              <a:rPr kumimoji="1" lang="ja-JP" altLang="en-US"/>
               <a:t>レベル</a:t>
             </a:r>
           </a:p>
           <a:p>
             <a:pPr lvl="3"/>
             <a:r>
-              <a:rPr kumimoji="1" lang="ja-JP" altLang="en-US" smtClean="0"/>
+              <a:rPr kumimoji="1" lang="ja-JP" altLang="en-US"/>
               <a:t>第 </a:t>
             </a:r>
             <a:r>
-              <a:rPr kumimoji="1" lang="en-US" altLang="ja-JP" smtClean="0"/>
+              <a:rPr kumimoji="1" lang="en-US" altLang="ja-JP"/>
               <a:t>4 </a:t>
             </a:r>
             <a:r>
-              <a:rPr kumimoji="1" lang="ja-JP" altLang="en-US" smtClean="0"/>
+              <a:rPr kumimoji="1" lang="ja-JP" altLang="en-US"/>
               <a:t>レベル</a:t>
             </a:r>
           </a:p>
           <a:p>
             <a:pPr lvl="4"/>
             <a:r>
-              <a:rPr kumimoji="1" lang="ja-JP" altLang="en-US" smtClean="0"/>
+              <a:rPr kumimoji="1" lang="ja-JP" altLang="en-US"/>
               <a:t>第 </a:t>
             </a:r>
             <a:r>
-              <a:rPr kumimoji="1" lang="en-US" altLang="ja-JP" smtClean="0"/>
+              <a:rPr kumimoji="1" lang="en-US" altLang="ja-JP"/>
               <a:t>5 </a:t>
             </a:r>
             <a:r>
-              <a:rPr kumimoji="1" lang="ja-JP" altLang="en-US" smtClean="0"/>
+              <a:rPr kumimoji="1" lang="ja-JP" altLang="en-US"/>
               <a:t>レベル</a:t>
             </a:r>
-            <a:endParaRPr kumimoji="1" lang="ja-JP" altLang="en-US"/>
           </a:p>
         </p:txBody>
       </p:sp>
@@ -560,7 +575,7 @@
               <a:pPr/>
               <a:t>2</a:t>
             </a:fld>
-            <a:endParaRPr lang="en-US" altLang="ja-JP" smtClean="0">
+            <a:endParaRPr lang="en-US" altLang="ja-JP">
               <a:ea typeface="ＭＳ Ｐゴシック" charset="-128"/>
             </a:endParaRPr>
           </a:p>
@@ -599,7 +614,7 @@
           <a:lstStyle/>
           <a:p>
             <a:pPr eaLnBrk="1" hangingPunct="1"/>
-            <a:endParaRPr lang="ja-JP" altLang="ja-JP" smtClean="0">
+            <a:endParaRPr lang="ja-JP" altLang="ja-JP">
               <a:ea typeface="ＭＳ Ｐゴシック" charset="-128"/>
             </a:endParaRPr>
           </a:p>
@@ -654,7 +669,7 @@
               <a:pPr/>
               <a:t>11</a:t>
             </a:fld>
-            <a:endParaRPr lang="en-US" altLang="ja-JP" smtClean="0">
+            <a:endParaRPr lang="en-US" altLang="ja-JP">
               <a:ea typeface="ＭＳ Ｐゴシック" charset="-128"/>
             </a:endParaRPr>
           </a:p>
@@ -693,7 +708,7 @@
           <a:lstStyle/>
           <a:p>
             <a:pPr eaLnBrk="1" hangingPunct="1"/>
-            <a:endParaRPr lang="ja-JP" altLang="ja-JP" smtClean="0">
+            <a:endParaRPr lang="ja-JP" altLang="ja-JP">
               <a:ea typeface="ＭＳ Ｐゴシック" charset="-128"/>
             </a:endParaRPr>
           </a:p>
@@ -748,7 +763,7 @@
               <a:pPr/>
               <a:t>12</a:t>
             </a:fld>
-            <a:endParaRPr lang="en-US" altLang="ja-JP" smtClean="0">
+            <a:endParaRPr lang="en-US" altLang="ja-JP">
               <a:ea typeface="ＭＳ Ｐゴシック" charset="-128"/>
             </a:endParaRPr>
           </a:p>
@@ -787,7 +802,7 @@
           <a:lstStyle/>
           <a:p>
             <a:pPr eaLnBrk="1" hangingPunct="1"/>
-            <a:endParaRPr lang="ja-JP" altLang="ja-JP" smtClean="0">
+            <a:endParaRPr lang="ja-JP" altLang="ja-JP">
               <a:ea typeface="ＭＳ Ｐゴシック" charset="-128"/>
             </a:endParaRPr>
           </a:p>
@@ -842,7 +857,7 @@
               <a:pPr/>
               <a:t>13</a:t>
             </a:fld>
-            <a:endParaRPr lang="en-US" altLang="ja-JP" smtClean="0">
+            <a:endParaRPr lang="en-US" altLang="ja-JP">
               <a:ea typeface="ＭＳ Ｐゴシック" charset="-128"/>
             </a:endParaRPr>
           </a:p>
@@ -881,7 +896,7 @@
           <a:lstStyle/>
           <a:p>
             <a:pPr eaLnBrk="1" hangingPunct="1"/>
-            <a:endParaRPr lang="ja-JP" altLang="ja-JP" smtClean="0">
+            <a:endParaRPr lang="ja-JP" altLang="ja-JP">
               <a:ea typeface="ＭＳ Ｐゴシック" charset="-128"/>
             </a:endParaRPr>
           </a:p>
@@ -936,7 +951,7 @@
               <a:pPr/>
               <a:t>14</a:t>
             </a:fld>
-            <a:endParaRPr lang="en-US" altLang="ja-JP" smtClean="0">
+            <a:endParaRPr lang="en-US" altLang="ja-JP">
               <a:ea typeface="ＭＳ Ｐゴシック" charset="-128"/>
             </a:endParaRPr>
           </a:p>
@@ -975,7 +990,7 @@
           <a:lstStyle/>
           <a:p>
             <a:pPr eaLnBrk="1" hangingPunct="1"/>
-            <a:endParaRPr lang="ja-JP" altLang="ja-JP" smtClean="0">
+            <a:endParaRPr lang="ja-JP" altLang="ja-JP">
               <a:ea typeface="ＭＳ Ｐゴシック" charset="-128"/>
             </a:endParaRPr>
           </a:p>
@@ -1030,7 +1045,7 @@
               <a:pPr/>
               <a:t>15</a:t>
             </a:fld>
-            <a:endParaRPr lang="en-US" altLang="ja-JP" smtClean="0">
+            <a:endParaRPr lang="en-US" altLang="ja-JP">
               <a:ea typeface="ＭＳ Ｐゴシック" charset="-128"/>
             </a:endParaRPr>
           </a:p>
@@ -1069,7 +1084,7 @@
           <a:lstStyle/>
           <a:p>
             <a:pPr eaLnBrk="1" hangingPunct="1"/>
-            <a:endParaRPr lang="ja-JP" altLang="ja-JP" smtClean="0">
+            <a:endParaRPr lang="ja-JP" altLang="ja-JP">
               <a:ea typeface="ＭＳ Ｐゴシック" charset="-128"/>
             </a:endParaRPr>
           </a:p>
@@ -1124,7 +1139,7 @@
               <a:pPr/>
               <a:t>16</a:t>
             </a:fld>
-            <a:endParaRPr lang="en-US" altLang="ja-JP" smtClean="0">
+            <a:endParaRPr lang="en-US" altLang="ja-JP">
               <a:ea typeface="ＭＳ Ｐゴシック" charset="-128"/>
             </a:endParaRPr>
           </a:p>
@@ -1163,7 +1178,7 @@
           <a:lstStyle/>
           <a:p>
             <a:pPr eaLnBrk="1" hangingPunct="1"/>
-            <a:endParaRPr lang="ja-JP" altLang="ja-JP" smtClean="0">
+            <a:endParaRPr lang="ja-JP" altLang="ja-JP">
               <a:ea typeface="ＭＳ Ｐゴシック" charset="-128"/>
             </a:endParaRPr>
           </a:p>
@@ -1218,7 +1233,7 @@
               <a:pPr/>
               <a:t>17</a:t>
             </a:fld>
-            <a:endParaRPr lang="en-US" altLang="ja-JP" smtClean="0">
+            <a:endParaRPr lang="en-US" altLang="ja-JP">
               <a:ea typeface="ＭＳ Ｐゴシック" charset="-128"/>
             </a:endParaRPr>
           </a:p>
@@ -1257,7 +1272,7 @@
           <a:lstStyle/>
           <a:p>
             <a:pPr eaLnBrk="1" hangingPunct="1"/>
-            <a:endParaRPr lang="ja-JP" altLang="ja-JP" smtClean="0">
+            <a:endParaRPr lang="ja-JP" altLang="ja-JP">
               <a:ea typeface="ＭＳ Ｐゴシック" charset="-128"/>
             </a:endParaRPr>
           </a:p>
@@ -1312,7 +1327,7 @@
               <a:pPr/>
               <a:t>18</a:t>
             </a:fld>
-            <a:endParaRPr lang="en-US" altLang="ja-JP" smtClean="0">
+            <a:endParaRPr lang="en-US" altLang="ja-JP">
               <a:ea typeface="ＭＳ Ｐゴシック" charset="-128"/>
             </a:endParaRPr>
           </a:p>
@@ -1351,7 +1366,7 @@
           <a:lstStyle/>
           <a:p>
             <a:pPr eaLnBrk="1" hangingPunct="1"/>
-            <a:endParaRPr lang="ja-JP" altLang="ja-JP" smtClean="0">
+            <a:endParaRPr lang="ja-JP" altLang="ja-JP">
               <a:ea typeface="ＭＳ Ｐゴシック" charset="-128"/>
             </a:endParaRPr>
           </a:p>
@@ -1406,7 +1421,7 @@
               <a:pPr/>
               <a:t>19</a:t>
             </a:fld>
-            <a:endParaRPr lang="en-US" altLang="ja-JP" smtClean="0">
+            <a:endParaRPr lang="en-US" altLang="ja-JP">
               <a:ea typeface="ＭＳ Ｐゴシック" charset="-128"/>
             </a:endParaRPr>
           </a:p>
@@ -1445,7 +1460,7 @@
           <a:lstStyle/>
           <a:p>
             <a:pPr eaLnBrk="1" hangingPunct="1"/>
-            <a:endParaRPr lang="ja-JP" altLang="ja-JP" smtClean="0">
+            <a:endParaRPr lang="ja-JP" altLang="ja-JP">
               <a:ea typeface="ＭＳ Ｐゴシック" charset="-128"/>
             </a:endParaRPr>
           </a:p>
@@ -1500,7 +1515,7 @@
               <a:pPr/>
               <a:t>20</a:t>
             </a:fld>
-            <a:endParaRPr lang="en-US" altLang="ja-JP" smtClean="0">
+            <a:endParaRPr lang="en-US" altLang="ja-JP">
               <a:ea typeface="ＭＳ Ｐゴシック" charset="-128"/>
             </a:endParaRPr>
           </a:p>
@@ -1539,7 +1554,7 @@
           <a:lstStyle/>
           <a:p>
             <a:pPr eaLnBrk="1" hangingPunct="1"/>
-            <a:endParaRPr lang="ja-JP" altLang="ja-JP" smtClean="0">
+            <a:endParaRPr lang="ja-JP" altLang="ja-JP">
               <a:ea typeface="ＭＳ Ｐゴシック" charset="-128"/>
             </a:endParaRPr>
           </a:p>
@@ -1594,7 +1609,7 @@
               <a:pPr/>
               <a:t>3</a:t>
             </a:fld>
-            <a:endParaRPr lang="en-US" altLang="ja-JP" smtClean="0">
+            <a:endParaRPr lang="en-US" altLang="ja-JP">
               <a:ea typeface="ＭＳ Ｐゴシック" charset="-128"/>
             </a:endParaRPr>
           </a:p>
@@ -1633,7 +1648,7 @@
           <a:lstStyle/>
           <a:p>
             <a:pPr eaLnBrk="1" hangingPunct="1"/>
-            <a:endParaRPr lang="ja-JP" altLang="ja-JP" smtClean="0">
+            <a:endParaRPr lang="ja-JP" altLang="ja-JP">
               <a:ea typeface="ＭＳ Ｐゴシック" charset="-128"/>
             </a:endParaRPr>
           </a:p>
@@ -1688,7 +1703,7 @@
               <a:pPr/>
               <a:t>21</a:t>
             </a:fld>
-            <a:endParaRPr lang="en-US" altLang="ja-JP" smtClean="0">
+            <a:endParaRPr lang="en-US" altLang="ja-JP">
               <a:ea typeface="ＭＳ Ｐゴシック" charset="-128"/>
             </a:endParaRPr>
           </a:p>
@@ -1727,7 +1742,7 @@
           <a:lstStyle/>
           <a:p>
             <a:pPr eaLnBrk="1" hangingPunct="1"/>
-            <a:endParaRPr lang="ja-JP" altLang="ja-JP" smtClean="0">
+            <a:endParaRPr lang="ja-JP" altLang="ja-JP">
               <a:ea typeface="ＭＳ Ｐゴシック" charset="-128"/>
             </a:endParaRPr>
           </a:p>
@@ -1829,7 +1844,7 @@
           <a:lstStyle/>
           <a:p>
             <a:pPr eaLnBrk="1" hangingPunct="1"/>
-            <a:endParaRPr lang="ja-JP" altLang="ja-JP" smtClean="0">
+            <a:endParaRPr lang="ja-JP" altLang="ja-JP">
               <a:ea typeface="ＭＳ Ｐゴシック" pitchFamily="50" charset="-128"/>
             </a:endParaRPr>
           </a:p>
@@ -1931,7 +1946,7 @@
           <a:lstStyle/>
           <a:p>
             <a:pPr eaLnBrk="1" hangingPunct="1"/>
-            <a:endParaRPr lang="ja-JP" altLang="ja-JP" smtClean="0">
+            <a:endParaRPr lang="ja-JP" altLang="ja-JP">
               <a:ea typeface="ＭＳ Ｐゴシック" pitchFamily="50" charset="-128"/>
             </a:endParaRPr>
           </a:p>
@@ -2033,7 +2048,7 @@
           <a:lstStyle/>
           <a:p>
             <a:pPr eaLnBrk="1" hangingPunct="1"/>
-            <a:endParaRPr lang="ja-JP" altLang="ja-JP" smtClean="0">
+            <a:endParaRPr lang="ja-JP" altLang="ja-JP">
               <a:ea typeface="ＭＳ Ｐゴシック" pitchFamily="50" charset="-128"/>
             </a:endParaRPr>
           </a:p>
@@ -2088,7 +2103,7 @@
               <a:pPr/>
               <a:t>4</a:t>
             </a:fld>
-            <a:endParaRPr lang="en-US" altLang="ja-JP" smtClean="0">
+            <a:endParaRPr lang="en-US" altLang="ja-JP">
               <a:ea typeface="ＭＳ Ｐゴシック" charset="-128"/>
             </a:endParaRPr>
           </a:p>
@@ -2127,7 +2142,7 @@
           <a:lstStyle/>
           <a:p>
             <a:pPr eaLnBrk="1" hangingPunct="1"/>
-            <a:endParaRPr lang="ja-JP" altLang="ja-JP" smtClean="0">
+            <a:endParaRPr lang="ja-JP" altLang="ja-JP">
               <a:ea typeface="ＭＳ Ｐゴシック" charset="-128"/>
             </a:endParaRPr>
           </a:p>
@@ -2182,7 +2197,7 @@
               <a:pPr/>
               <a:t>5</a:t>
             </a:fld>
-            <a:endParaRPr lang="en-US" altLang="ja-JP" smtClean="0">
+            <a:endParaRPr lang="en-US" altLang="ja-JP">
               <a:ea typeface="ＭＳ Ｐゴシック" charset="-128"/>
             </a:endParaRPr>
           </a:p>
@@ -2221,7 +2236,7 @@
           <a:lstStyle/>
           <a:p>
             <a:pPr eaLnBrk="1" hangingPunct="1"/>
-            <a:endParaRPr lang="ja-JP" altLang="ja-JP" smtClean="0">
+            <a:endParaRPr lang="ja-JP" altLang="ja-JP">
               <a:ea typeface="ＭＳ Ｐゴシック" charset="-128"/>
             </a:endParaRPr>
           </a:p>
@@ -2276,7 +2291,7 @@
               <a:pPr/>
               <a:t>6</a:t>
             </a:fld>
-            <a:endParaRPr lang="en-US" altLang="ja-JP" smtClean="0">
+            <a:endParaRPr lang="en-US" altLang="ja-JP">
               <a:ea typeface="ＭＳ Ｐゴシック" charset="-128"/>
             </a:endParaRPr>
           </a:p>
@@ -2315,7 +2330,7 @@
           <a:lstStyle/>
           <a:p>
             <a:pPr eaLnBrk="1" hangingPunct="1"/>
-            <a:endParaRPr lang="ja-JP" altLang="ja-JP" smtClean="0">
+            <a:endParaRPr lang="ja-JP" altLang="ja-JP">
               <a:ea typeface="ＭＳ Ｐゴシック" charset="-128"/>
             </a:endParaRPr>
           </a:p>
@@ -2370,7 +2385,7 @@
               <a:pPr/>
               <a:t>7</a:t>
             </a:fld>
-            <a:endParaRPr lang="en-US" altLang="ja-JP" smtClean="0">
+            <a:endParaRPr lang="en-US" altLang="ja-JP">
               <a:ea typeface="ＭＳ Ｐゴシック" charset="-128"/>
             </a:endParaRPr>
           </a:p>
@@ -2409,7 +2424,7 @@
           <a:lstStyle/>
           <a:p>
             <a:pPr eaLnBrk="1" hangingPunct="1"/>
-            <a:endParaRPr lang="ja-JP" altLang="ja-JP" smtClean="0">
+            <a:endParaRPr lang="ja-JP" altLang="ja-JP">
               <a:ea typeface="ＭＳ Ｐゴシック" charset="-128"/>
             </a:endParaRPr>
           </a:p>
@@ -2464,7 +2479,7 @@
               <a:pPr/>
               <a:t>8</a:t>
             </a:fld>
-            <a:endParaRPr lang="en-US" altLang="ja-JP" smtClean="0">
+            <a:endParaRPr lang="en-US" altLang="ja-JP">
               <a:ea typeface="ＭＳ Ｐゴシック" charset="-128"/>
             </a:endParaRPr>
           </a:p>
@@ -2503,7 +2518,7 @@
           <a:lstStyle/>
           <a:p>
             <a:pPr eaLnBrk="1" hangingPunct="1"/>
-            <a:endParaRPr lang="ja-JP" altLang="ja-JP" smtClean="0">
+            <a:endParaRPr lang="ja-JP" altLang="ja-JP">
               <a:ea typeface="ＭＳ Ｐゴシック" charset="-128"/>
             </a:endParaRPr>
           </a:p>
@@ -2558,7 +2573,7 @@
               <a:pPr/>
               <a:t>9</a:t>
             </a:fld>
-            <a:endParaRPr lang="en-US" altLang="ja-JP" smtClean="0">
+            <a:endParaRPr lang="en-US" altLang="ja-JP">
               <a:ea typeface="ＭＳ Ｐゴシック" charset="-128"/>
             </a:endParaRPr>
           </a:p>
@@ -2597,7 +2612,7 @@
           <a:lstStyle/>
           <a:p>
             <a:pPr eaLnBrk="1" hangingPunct="1"/>
-            <a:endParaRPr lang="ja-JP" altLang="ja-JP" smtClean="0">
+            <a:endParaRPr lang="ja-JP" altLang="ja-JP">
               <a:ea typeface="ＭＳ Ｐゴシック" charset="-128"/>
             </a:endParaRPr>
           </a:p>
@@ -2652,7 +2667,7 @@
               <a:pPr/>
               <a:t>10</a:t>
             </a:fld>
-            <a:endParaRPr lang="en-US" altLang="ja-JP" smtClean="0">
+            <a:endParaRPr lang="en-US" altLang="ja-JP">
               <a:ea typeface="ＭＳ Ｐゴシック" charset="-128"/>
             </a:endParaRPr>
           </a:p>
@@ -2691,7 +2706,7 @@
           <a:lstStyle/>
           <a:p>
             <a:pPr eaLnBrk="1" hangingPunct="1"/>
-            <a:endParaRPr lang="ja-JP" altLang="ja-JP" smtClean="0">
+            <a:endParaRPr lang="ja-JP" altLang="ja-JP">
               <a:ea typeface="ＭＳ Ｐゴシック" charset="-128"/>
             </a:endParaRPr>
           </a:p>
@@ -2743,10 +2758,9 @@
           <a:lstStyle/>
           <a:p>
             <a:r>
-              <a:rPr kumimoji="1" lang="ja-JP" altLang="en-US" smtClean="0"/>
+              <a:rPr kumimoji="1" lang="ja-JP" altLang="en-US"/>
               <a:t>マスタ タイトルの書式設定</a:t>
             </a:r>
-            <a:endParaRPr kumimoji="1" lang="ja-JP" altLang="en-US"/>
           </a:p>
         </p:txBody>
       </p:sp>
@@ -2862,10 +2876,9 @@
           </a:lstStyle>
           <a:p>
             <a:r>
-              <a:rPr kumimoji="1" lang="ja-JP" altLang="en-US" smtClean="0"/>
+              <a:rPr kumimoji="1" lang="ja-JP" altLang="en-US"/>
               <a:t>マスタ サブタイトルの書式設定</a:t>
             </a:r>
-            <a:endParaRPr kumimoji="1" lang="ja-JP" altLang="en-US"/>
           </a:p>
         </p:txBody>
       </p:sp>
@@ -2887,7 +2900,7 @@
             <a:fld id="{E90ED720-0104-4369-84BC-D37694168613}" type="datetimeFigureOut">
               <a:rPr kumimoji="1" lang="ja-JP" altLang="en-US" smtClean="0"/>
               <a:pPr/>
-              <a:t>2014/10/24</a:t>
+              <a:t>2026/9/28</a:t>
             </a:fld>
             <a:endParaRPr kumimoji="1" lang="ja-JP" altLang="en-US"/>
           </a:p>
@@ -2977,10 +2990,9 @@
           <a:lstStyle/>
           <a:p>
             <a:r>
-              <a:rPr kumimoji="1" lang="ja-JP" altLang="en-US" smtClean="0"/>
+              <a:rPr kumimoji="1" lang="ja-JP" altLang="en-US"/>
               <a:t>マスタ タイトルの書式設定</a:t>
             </a:r>
-            <a:endParaRPr kumimoji="1" lang="ja-JP" altLang="en-US"/>
           </a:p>
         </p:txBody>
       </p:sp>
@@ -3001,70 +3013,69 @@
           <a:p>
             <a:pPr lvl="0"/>
             <a:r>
-              <a:rPr kumimoji="1" lang="ja-JP" altLang="en-US" smtClean="0"/>
+              <a:rPr kumimoji="1" lang="ja-JP" altLang="en-US"/>
               <a:t>マスタ テキストの書式設定</a:t>
             </a:r>
           </a:p>
           <a:p>
             <a:pPr lvl="1"/>
             <a:r>
-              <a:rPr kumimoji="1" lang="ja-JP" altLang="en-US" smtClean="0"/>
+              <a:rPr kumimoji="1" lang="ja-JP" altLang="en-US"/>
               <a:t>第 </a:t>
             </a:r>
             <a:r>
-              <a:rPr kumimoji="1" lang="en-US" altLang="ja-JP" smtClean="0"/>
+              <a:rPr kumimoji="1" lang="en-US" altLang="ja-JP"/>
               <a:t>2 </a:t>
             </a:r>
             <a:r>
-              <a:rPr kumimoji="1" lang="ja-JP" altLang="en-US" smtClean="0"/>
+              <a:rPr kumimoji="1" lang="ja-JP" altLang="en-US"/>
               <a:t>レベル</a:t>
             </a:r>
           </a:p>
           <a:p>
             <a:pPr lvl="2"/>
             <a:r>
-              <a:rPr kumimoji="1" lang="ja-JP" altLang="en-US" smtClean="0"/>
+              <a:rPr kumimoji="1" lang="ja-JP" altLang="en-US"/>
               <a:t>第 </a:t>
             </a:r>
             <a:r>
-              <a:rPr kumimoji="1" lang="en-US" altLang="ja-JP" smtClean="0"/>
+              <a:rPr kumimoji="1" lang="en-US" altLang="ja-JP"/>
               <a:t>3 </a:t>
             </a:r>
             <a:r>
-              <a:rPr kumimoji="1" lang="ja-JP" altLang="en-US" smtClean="0"/>
+              <a:rPr kumimoji="1" lang="ja-JP" altLang="en-US"/>
               <a:t>レベル</a:t>
             </a:r>
           </a:p>
           <a:p>
             <a:pPr lvl="3"/>
             <a:r>
-              <a:rPr kumimoji="1" lang="ja-JP" altLang="en-US" smtClean="0"/>
+              <a:rPr kumimoji="1" lang="ja-JP" altLang="en-US"/>
               <a:t>第 </a:t>
             </a:r>
             <a:r>
-              <a:rPr kumimoji="1" lang="en-US" altLang="ja-JP" smtClean="0"/>
+              <a:rPr kumimoji="1" lang="en-US" altLang="ja-JP"/>
               <a:t>4 </a:t>
             </a:r>
             <a:r>
-              <a:rPr kumimoji="1" lang="ja-JP" altLang="en-US" smtClean="0"/>
+              <a:rPr kumimoji="1" lang="ja-JP" altLang="en-US"/>
               <a:t>レベル</a:t>
             </a:r>
           </a:p>
           <a:p>
             <a:pPr lvl="4"/>
             <a:r>
-              <a:rPr kumimoji="1" lang="ja-JP" altLang="en-US" smtClean="0"/>
+              <a:rPr kumimoji="1" lang="ja-JP" altLang="en-US"/>
               <a:t>第 </a:t>
             </a:r>
             <a:r>
-              <a:rPr kumimoji="1" lang="en-US" altLang="ja-JP" smtClean="0"/>
+              <a:rPr kumimoji="1" lang="en-US" altLang="ja-JP"/>
               <a:t>5 </a:t>
             </a:r>
             <a:r>
-              <a:rPr kumimoji="1" lang="ja-JP" altLang="en-US" smtClean="0"/>
+              <a:rPr kumimoji="1" lang="ja-JP" altLang="en-US"/>
               <a:t>レベル</a:t>
             </a:r>
-            <a:endParaRPr kumimoji="1" lang="ja-JP" altLang="en-US"/>
           </a:p>
         </p:txBody>
       </p:sp>
@@ -3086,7 +3097,7 @@
             <a:fld id="{E90ED720-0104-4369-84BC-D37694168613}" type="datetimeFigureOut">
               <a:rPr kumimoji="1" lang="ja-JP" altLang="en-US" smtClean="0"/>
               <a:pPr/>
-              <a:t>2014/10/24</a:t>
+              <a:t>2026/9/28</a:t>
             </a:fld>
             <a:endParaRPr kumimoji="1" lang="ja-JP" altLang="en-US"/>
           </a:p>
@@ -3181,10 +3192,9 @@
           <a:lstStyle/>
           <a:p>
             <a:r>
-              <a:rPr kumimoji="1" lang="ja-JP" altLang="en-US" smtClean="0"/>
+              <a:rPr kumimoji="1" lang="ja-JP" altLang="en-US"/>
               <a:t>マスタ タイトルの書式設定</a:t>
             </a:r>
-            <a:endParaRPr kumimoji="1" lang="ja-JP" altLang="en-US"/>
           </a:p>
         </p:txBody>
       </p:sp>
@@ -3210,70 +3220,69 @@
           <a:p>
             <a:pPr lvl="0"/>
             <a:r>
-              <a:rPr kumimoji="1" lang="ja-JP" altLang="en-US" smtClean="0"/>
+              <a:rPr kumimoji="1" lang="ja-JP" altLang="en-US"/>
               <a:t>マスタ テキストの書式設定</a:t>
             </a:r>
           </a:p>
           <a:p>
             <a:pPr lvl="1"/>
             <a:r>
-              <a:rPr kumimoji="1" lang="ja-JP" altLang="en-US" smtClean="0"/>
+              <a:rPr kumimoji="1" lang="ja-JP" altLang="en-US"/>
               <a:t>第 </a:t>
             </a:r>
             <a:r>
-              <a:rPr kumimoji="1" lang="en-US" altLang="ja-JP" smtClean="0"/>
+              <a:rPr kumimoji="1" lang="en-US" altLang="ja-JP"/>
               <a:t>2 </a:t>
             </a:r>
             <a:r>
-              <a:rPr kumimoji="1" lang="ja-JP" altLang="en-US" smtClean="0"/>
+              <a:rPr kumimoji="1" lang="ja-JP" altLang="en-US"/>
               <a:t>レベル</a:t>
             </a:r>
           </a:p>
           <a:p>
             <a:pPr lvl="2"/>
             <a:r>
-              <a:rPr kumimoji="1" lang="ja-JP" altLang="en-US" smtClean="0"/>
+              <a:rPr kumimoji="1" lang="ja-JP" altLang="en-US"/>
               <a:t>第 </a:t>
             </a:r>
             <a:r>
-              <a:rPr kumimoji="1" lang="en-US" altLang="ja-JP" smtClean="0"/>
+              <a:rPr kumimoji="1" lang="en-US" altLang="ja-JP"/>
               <a:t>3 </a:t>
             </a:r>
             <a:r>
-              <a:rPr kumimoji="1" lang="ja-JP" altLang="en-US" smtClean="0"/>
+              <a:rPr kumimoji="1" lang="ja-JP" altLang="en-US"/>
               <a:t>レベル</a:t>
             </a:r>
           </a:p>
           <a:p>
             <a:pPr lvl="3"/>
             <a:r>
-              <a:rPr kumimoji="1" lang="ja-JP" altLang="en-US" smtClean="0"/>
+              <a:rPr kumimoji="1" lang="ja-JP" altLang="en-US"/>
               <a:t>第 </a:t>
             </a:r>
             <a:r>
-              <a:rPr kumimoji="1" lang="en-US" altLang="ja-JP" smtClean="0"/>
+              <a:rPr kumimoji="1" lang="en-US" altLang="ja-JP"/>
               <a:t>4 </a:t>
             </a:r>
             <a:r>
-              <a:rPr kumimoji="1" lang="ja-JP" altLang="en-US" smtClean="0"/>
+              <a:rPr kumimoji="1" lang="ja-JP" altLang="en-US"/>
               <a:t>レベル</a:t>
             </a:r>
           </a:p>
           <a:p>
             <a:pPr lvl="4"/>
             <a:r>
-              <a:rPr kumimoji="1" lang="ja-JP" altLang="en-US" smtClean="0"/>
+              <a:rPr kumimoji="1" lang="ja-JP" altLang="en-US"/>
               <a:t>第 </a:t>
             </a:r>
             <a:r>
-              <a:rPr kumimoji="1" lang="en-US" altLang="ja-JP" smtClean="0"/>
+              <a:rPr kumimoji="1" lang="en-US" altLang="ja-JP"/>
               <a:t>5 </a:t>
             </a:r>
             <a:r>
-              <a:rPr kumimoji="1" lang="ja-JP" altLang="en-US" smtClean="0"/>
+              <a:rPr kumimoji="1" lang="ja-JP" altLang="en-US"/>
               <a:t>レベル</a:t>
             </a:r>
-            <a:endParaRPr kumimoji="1" lang="ja-JP" altLang="en-US"/>
           </a:p>
         </p:txBody>
       </p:sp>
@@ -3295,7 +3304,7 @@
             <a:fld id="{E90ED720-0104-4369-84BC-D37694168613}" type="datetimeFigureOut">
               <a:rPr kumimoji="1" lang="ja-JP" altLang="en-US" smtClean="0"/>
               <a:pPr/>
-              <a:t>2014/10/24</a:t>
+              <a:t>2026/9/28</a:t>
             </a:fld>
             <a:endParaRPr kumimoji="1" lang="ja-JP" altLang="en-US"/>
           </a:p>
@@ -3385,10 +3394,9 @@
           <a:lstStyle/>
           <a:p>
             <a:r>
-              <a:rPr kumimoji="1" lang="ja-JP" altLang="en-US" smtClean="0"/>
+              <a:rPr kumimoji="1" lang="ja-JP" altLang="en-US"/>
               <a:t>マスタ タイトルの書式設定</a:t>
             </a:r>
-            <a:endParaRPr kumimoji="1" lang="ja-JP" altLang="en-US"/>
           </a:p>
         </p:txBody>
       </p:sp>
@@ -3409,70 +3417,69 @@
           <a:p>
             <a:pPr lvl="0"/>
             <a:r>
-              <a:rPr kumimoji="1" lang="ja-JP" altLang="en-US" smtClean="0"/>
+              <a:rPr kumimoji="1" lang="ja-JP" altLang="en-US"/>
               <a:t>マスタ テキストの書式設定</a:t>
             </a:r>
           </a:p>
           <a:p>
             <a:pPr lvl="1"/>
             <a:r>
-              <a:rPr kumimoji="1" lang="ja-JP" altLang="en-US" smtClean="0"/>
+              <a:rPr kumimoji="1" lang="ja-JP" altLang="en-US"/>
               <a:t>第 </a:t>
             </a:r>
             <a:r>
-              <a:rPr kumimoji="1" lang="en-US" altLang="ja-JP" smtClean="0"/>
+              <a:rPr kumimoji="1" lang="en-US" altLang="ja-JP"/>
               <a:t>2 </a:t>
             </a:r>
             <a:r>
-              <a:rPr kumimoji="1" lang="ja-JP" altLang="en-US" smtClean="0"/>
+              <a:rPr kumimoji="1" lang="ja-JP" altLang="en-US"/>
               <a:t>レベル</a:t>
             </a:r>
           </a:p>
           <a:p>
             <a:pPr lvl="2"/>
             <a:r>
-              <a:rPr kumimoji="1" lang="ja-JP" altLang="en-US" smtClean="0"/>
+              <a:rPr kumimoji="1" lang="ja-JP" altLang="en-US"/>
               <a:t>第 </a:t>
             </a:r>
             <a:r>
-              <a:rPr kumimoji="1" lang="en-US" altLang="ja-JP" smtClean="0"/>
+              <a:rPr kumimoji="1" lang="en-US" altLang="ja-JP"/>
               <a:t>3 </a:t>
             </a:r>
             <a:r>
-              <a:rPr kumimoji="1" lang="ja-JP" altLang="en-US" smtClean="0"/>
+              <a:rPr kumimoji="1" lang="ja-JP" altLang="en-US"/>
               <a:t>レベル</a:t>
             </a:r>
           </a:p>
           <a:p>
             <a:pPr lvl="3"/>
             <a:r>
-              <a:rPr kumimoji="1" lang="ja-JP" altLang="en-US" smtClean="0"/>
+              <a:rPr kumimoji="1" lang="ja-JP" altLang="en-US"/>
               <a:t>第 </a:t>
             </a:r>
             <a:r>
-              <a:rPr kumimoji="1" lang="en-US" altLang="ja-JP" smtClean="0"/>
+              <a:rPr kumimoji="1" lang="en-US" altLang="ja-JP"/>
               <a:t>4 </a:t>
             </a:r>
             <a:r>
-              <a:rPr kumimoji="1" lang="ja-JP" altLang="en-US" smtClean="0"/>
+              <a:rPr kumimoji="1" lang="ja-JP" altLang="en-US"/>
               <a:t>レベル</a:t>
             </a:r>
           </a:p>
           <a:p>
             <a:pPr lvl="4"/>
             <a:r>
-              <a:rPr kumimoji="1" lang="ja-JP" altLang="en-US" smtClean="0"/>
+              <a:rPr kumimoji="1" lang="ja-JP" altLang="en-US"/>
               <a:t>第 </a:t>
             </a:r>
             <a:r>
-              <a:rPr kumimoji="1" lang="en-US" altLang="ja-JP" smtClean="0"/>
+              <a:rPr kumimoji="1" lang="en-US" altLang="ja-JP"/>
               <a:t>5 </a:t>
             </a:r>
             <a:r>
-              <a:rPr kumimoji="1" lang="ja-JP" altLang="en-US" smtClean="0"/>
+              <a:rPr kumimoji="1" lang="ja-JP" altLang="en-US"/>
               <a:t>レベル</a:t>
             </a:r>
-            <a:endParaRPr kumimoji="1" lang="ja-JP" altLang="en-US"/>
           </a:p>
         </p:txBody>
       </p:sp>
@@ -3494,7 +3501,7 @@
             <a:fld id="{E90ED720-0104-4369-84BC-D37694168613}" type="datetimeFigureOut">
               <a:rPr kumimoji="1" lang="ja-JP" altLang="en-US" smtClean="0"/>
               <a:pPr/>
-              <a:t>2014/10/24</a:t>
+              <a:t>2026/9/28</a:t>
             </a:fld>
             <a:endParaRPr kumimoji="1" lang="ja-JP" altLang="en-US"/>
           </a:p>
@@ -3593,10 +3600,9 @@
           </a:lstStyle>
           <a:p>
             <a:r>
-              <a:rPr kumimoji="1" lang="ja-JP" altLang="en-US" smtClean="0"/>
+              <a:rPr kumimoji="1" lang="ja-JP" altLang="en-US"/>
               <a:t>マスタ タイトルの書式設定</a:t>
             </a:r>
-            <a:endParaRPr kumimoji="1" lang="ja-JP" altLang="en-US"/>
           </a:p>
         </p:txBody>
       </p:sp>
@@ -3713,7 +3719,7 @@
           <a:p>
             <a:pPr lvl="0"/>
             <a:r>
-              <a:rPr kumimoji="1" lang="ja-JP" altLang="en-US" smtClean="0"/>
+              <a:rPr kumimoji="1" lang="ja-JP" altLang="en-US"/>
               <a:t>マスタ テキストの書式設定</a:t>
             </a:r>
           </a:p>
@@ -3737,7 +3743,7 @@
             <a:fld id="{E90ED720-0104-4369-84BC-D37694168613}" type="datetimeFigureOut">
               <a:rPr kumimoji="1" lang="ja-JP" altLang="en-US" smtClean="0"/>
               <a:pPr/>
-              <a:t>2014/10/24</a:t>
+              <a:t>2026/9/28</a:t>
             </a:fld>
             <a:endParaRPr kumimoji="1" lang="ja-JP" altLang="en-US"/>
           </a:p>
@@ -3827,10 +3833,9 @@
           <a:lstStyle/>
           <a:p>
             <a:r>
-              <a:rPr kumimoji="1" lang="ja-JP" altLang="en-US" smtClean="0"/>
+              <a:rPr kumimoji="1" lang="ja-JP" altLang="en-US"/>
               <a:t>マスタ タイトルの書式設定</a:t>
             </a:r>
-            <a:endParaRPr kumimoji="1" lang="ja-JP" altLang="en-US"/>
           </a:p>
         </p:txBody>
       </p:sp>
@@ -3884,70 +3889,69 @@
           <a:p>
             <a:pPr lvl="0"/>
             <a:r>
-              <a:rPr kumimoji="1" lang="ja-JP" altLang="en-US" smtClean="0"/>
+              <a:rPr kumimoji="1" lang="ja-JP" altLang="en-US"/>
               <a:t>マスタ テキストの書式設定</a:t>
             </a:r>
           </a:p>
           <a:p>
             <a:pPr lvl="1"/>
             <a:r>
-              <a:rPr kumimoji="1" lang="ja-JP" altLang="en-US" smtClean="0"/>
+              <a:rPr kumimoji="1" lang="ja-JP" altLang="en-US"/>
               <a:t>第 </a:t>
             </a:r>
             <a:r>
-              <a:rPr kumimoji="1" lang="en-US" altLang="ja-JP" smtClean="0"/>
+              <a:rPr kumimoji="1" lang="en-US" altLang="ja-JP"/>
               <a:t>2 </a:t>
             </a:r>
             <a:r>
-              <a:rPr kumimoji="1" lang="ja-JP" altLang="en-US" smtClean="0"/>
+              <a:rPr kumimoji="1" lang="ja-JP" altLang="en-US"/>
               <a:t>レベル</a:t>
             </a:r>
           </a:p>
           <a:p>
             <a:pPr lvl="2"/>
             <a:r>
-              <a:rPr kumimoji="1" lang="ja-JP" altLang="en-US" smtClean="0"/>
+              <a:rPr kumimoji="1" lang="ja-JP" altLang="en-US"/>
               <a:t>第 </a:t>
             </a:r>
             <a:r>
-              <a:rPr kumimoji="1" lang="en-US" altLang="ja-JP" smtClean="0"/>
+              <a:rPr kumimoji="1" lang="en-US" altLang="ja-JP"/>
               <a:t>3 </a:t>
             </a:r>
             <a:r>
-              <a:rPr kumimoji="1" lang="ja-JP" altLang="en-US" smtClean="0"/>
+              <a:rPr kumimoji="1" lang="ja-JP" altLang="en-US"/>
               <a:t>レベル</a:t>
             </a:r>
           </a:p>
           <a:p>
             <a:pPr lvl="3"/>
             <a:r>
-              <a:rPr kumimoji="1" lang="ja-JP" altLang="en-US" smtClean="0"/>
+              <a:rPr kumimoji="1" lang="ja-JP" altLang="en-US"/>
               <a:t>第 </a:t>
             </a:r>
             <a:r>
-              <a:rPr kumimoji="1" lang="en-US" altLang="ja-JP" smtClean="0"/>
+              <a:rPr kumimoji="1" lang="en-US" altLang="ja-JP"/>
               <a:t>4 </a:t>
             </a:r>
             <a:r>
-              <a:rPr kumimoji="1" lang="ja-JP" altLang="en-US" smtClean="0"/>
+              <a:rPr kumimoji="1" lang="ja-JP" altLang="en-US"/>
               <a:t>レベル</a:t>
             </a:r>
           </a:p>
           <a:p>
             <a:pPr lvl="4"/>
             <a:r>
-              <a:rPr kumimoji="1" lang="ja-JP" altLang="en-US" smtClean="0"/>
+              <a:rPr kumimoji="1" lang="ja-JP" altLang="en-US"/>
               <a:t>第 </a:t>
             </a:r>
             <a:r>
-              <a:rPr kumimoji="1" lang="en-US" altLang="ja-JP" smtClean="0"/>
+              <a:rPr kumimoji="1" lang="en-US" altLang="ja-JP"/>
               <a:t>5 </a:t>
             </a:r>
             <a:r>
-              <a:rPr kumimoji="1" lang="ja-JP" altLang="en-US" smtClean="0"/>
+              <a:rPr kumimoji="1" lang="ja-JP" altLang="en-US"/>
               <a:t>レベル</a:t>
             </a:r>
-            <a:endParaRPr kumimoji="1" lang="ja-JP" altLang="en-US"/>
           </a:p>
         </p:txBody>
       </p:sp>
@@ -4001,70 +4005,69 @@
           <a:p>
             <a:pPr lvl="0"/>
             <a:r>
-              <a:rPr kumimoji="1" lang="ja-JP" altLang="en-US" smtClean="0"/>
+              <a:rPr kumimoji="1" lang="ja-JP" altLang="en-US"/>
               <a:t>マスタ テキストの書式設定</a:t>
             </a:r>
           </a:p>
           <a:p>
             <a:pPr lvl="1"/>
             <a:r>
-              <a:rPr kumimoji="1" lang="ja-JP" altLang="en-US" smtClean="0"/>
+              <a:rPr kumimoji="1" lang="ja-JP" altLang="en-US"/>
               <a:t>第 </a:t>
             </a:r>
             <a:r>
-              <a:rPr kumimoji="1" lang="en-US" altLang="ja-JP" smtClean="0"/>
+              <a:rPr kumimoji="1" lang="en-US" altLang="ja-JP"/>
               <a:t>2 </a:t>
             </a:r>
             <a:r>
-              <a:rPr kumimoji="1" lang="ja-JP" altLang="en-US" smtClean="0"/>
+              <a:rPr kumimoji="1" lang="ja-JP" altLang="en-US"/>
               <a:t>レベル</a:t>
             </a:r>
           </a:p>
           <a:p>
             <a:pPr lvl="2"/>
             <a:r>
-              <a:rPr kumimoji="1" lang="ja-JP" altLang="en-US" smtClean="0"/>
+              <a:rPr kumimoji="1" lang="ja-JP" altLang="en-US"/>
               <a:t>第 </a:t>
             </a:r>
             <a:r>
-              <a:rPr kumimoji="1" lang="en-US" altLang="ja-JP" smtClean="0"/>
+              <a:rPr kumimoji="1" lang="en-US" altLang="ja-JP"/>
               <a:t>3 </a:t>
             </a:r>
             <a:r>
-              <a:rPr kumimoji="1" lang="ja-JP" altLang="en-US" smtClean="0"/>
+              <a:rPr kumimoji="1" lang="ja-JP" altLang="en-US"/>
               <a:t>レベル</a:t>
             </a:r>
           </a:p>
           <a:p>
             <a:pPr lvl="3"/>
             <a:r>
-              <a:rPr kumimoji="1" lang="ja-JP" altLang="en-US" smtClean="0"/>
+              <a:rPr kumimoji="1" lang="ja-JP" altLang="en-US"/>
               <a:t>第 </a:t>
             </a:r>
             <a:r>
-              <a:rPr kumimoji="1" lang="en-US" altLang="ja-JP" smtClean="0"/>
+              <a:rPr kumimoji="1" lang="en-US" altLang="ja-JP"/>
               <a:t>4 </a:t>
             </a:r>
             <a:r>
-              <a:rPr kumimoji="1" lang="ja-JP" altLang="en-US" smtClean="0"/>
+              <a:rPr kumimoji="1" lang="ja-JP" altLang="en-US"/>
               <a:t>レベル</a:t>
             </a:r>
           </a:p>
           <a:p>
             <a:pPr lvl="4"/>
             <a:r>
-              <a:rPr kumimoji="1" lang="ja-JP" altLang="en-US" smtClean="0"/>
+              <a:rPr kumimoji="1" lang="ja-JP" altLang="en-US"/>
               <a:t>第 </a:t>
             </a:r>
             <a:r>
-              <a:rPr kumimoji="1" lang="en-US" altLang="ja-JP" smtClean="0"/>
+              <a:rPr kumimoji="1" lang="en-US" altLang="ja-JP"/>
               <a:t>5 </a:t>
             </a:r>
             <a:r>
-              <a:rPr kumimoji="1" lang="ja-JP" altLang="en-US" smtClean="0"/>
+              <a:rPr kumimoji="1" lang="ja-JP" altLang="en-US"/>
               <a:t>レベル</a:t>
             </a:r>
-            <a:endParaRPr kumimoji="1" lang="ja-JP" altLang="en-US"/>
           </a:p>
         </p:txBody>
       </p:sp>
@@ -4086,7 +4089,7 @@
             <a:fld id="{E90ED720-0104-4369-84BC-D37694168613}" type="datetimeFigureOut">
               <a:rPr kumimoji="1" lang="ja-JP" altLang="en-US" smtClean="0"/>
               <a:pPr/>
-              <a:t>2014/10/24</a:t>
+              <a:t>2026/9/28</a:t>
             </a:fld>
             <a:endParaRPr kumimoji="1" lang="ja-JP" altLang="en-US"/>
           </a:p>
@@ -4180,10 +4183,9 @@
           </a:lstStyle>
           <a:p>
             <a:r>
-              <a:rPr kumimoji="1" lang="ja-JP" altLang="en-US" smtClean="0"/>
+              <a:rPr kumimoji="1" lang="ja-JP" altLang="en-US"/>
               <a:t>マスタ タイトルの書式設定</a:t>
             </a:r>
-            <a:endParaRPr kumimoji="1" lang="ja-JP" altLang="en-US"/>
           </a:p>
         </p:txBody>
       </p:sp>
@@ -4246,7 +4248,7 @@
           <a:p>
             <a:pPr lvl="0"/>
             <a:r>
-              <a:rPr kumimoji="1" lang="ja-JP" altLang="en-US" smtClean="0"/>
+              <a:rPr kumimoji="1" lang="ja-JP" altLang="en-US"/>
               <a:t>マスタ テキストの書式設定</a:t>
             </a:r>
           </a:p>
@@ -4302,70 +4304,69 @@
           <a:p>
             <a:pPr lvl="0"/>
             <a:r>
-              <a:rPr kumimoji="1" lang="ja-JP" altLang="en-US" smtClean="0"/>
+              <a:rPr kumimoji="1" lang="ja-JP" altLang="en-US"/>
               <a:t>マスタ テキストの書式設定</a:t>
             </a:r>
           </a:p>
           <a:p>
             <a:pPr lvl="1"/>
             <a:r>
-              <a:rPr kumimoji="1" lang="ja-JP" altLang="en-US" smtClean="0"/>
+              <a:rPr kumimoji="1" lang="ja-JP" altLang="en-US"/>
               <a:t>第 </a:t>
             </a:r>
             <a:r>
-              <a:rPr kumimoji="1" lang="en-US" altLang="ja-JP" smtClean="0"/>
+              <a:rPr kumimoji="1" lang="en-US" altLang="ja-JP"/>
               <a:t>2 </a:t>
             </a:r>
             <a:r>
-              <a:rPr kumimoji="1" lang="ja-JP" altLang="en-US" smtClean="0"/>
+              <a:rPr kumimoji="1" lang="ja-JP" altLang="en-US"/>
               <a:t>レベル</a:t>
             </a:r>
           </a:p>
           <a:p>
             <a:pPr lvl="2"/>
             <a:r>
-              <a:rPr kumimoji="1" lang="ja-JP" altLang="en-US" smtClean="0"/>
+              <a:rPr kumimoji="1" lang="ja-JP" altLang="en-US"/>
               <a:t>第 </a:t>
             </a:r>
             <a:r>
-              <a:rPr kumimoji="1" lang="en-US" altLang="ja-JP" smtClean="0"/>
+              <a:rPr kumimoji="1" lang="en-US" altLang="ja-JP"/>
               <a:t>3 </a:t>
             </a:r>
             <a:r>
-              <a:rPr kumimoji="1" lang="ja-JP" altLang="en-US" smtClean="0"/>
+              <a:rPr kumimoji="1" lang="ja-JP" altLang="en-US"/>
               <a:t>レベル</a:t>
             </a:r>
           </a:p>
           <a:p>
             <a:pPr lvl="3"/>
             <a:r>
-              <a:rPr kumimoji="1" lang="ja-JP" altLang="en-US" smtClean="0"/>
+              <a:rPr kumimoji="1" lang="ja-JP" altLang="en-US"/>
               <a:t>第 </a:t>
             </a:r>
             <a:r>
-              <a:rPr kumimoji="1" lang="en-US" altLang="ja-JP" smtClean="0"/>
+              <a:rPr kumimoji="1" lang="en-US" altLang="ja-JP"/>
               <a:t>4 </a:t>
             </a:r>
             <a:r>
-              <a:rPr kumimoji="1" lang="ja-JP" altLang="en-US" smtClean="0"/>
+              <a:rPr kumimoji="1" lang="ja-JP" altLang="en-US"/>
               <a:t>レベル</a:t>
             </a:r>
           </a:p>
           <a:p>
             <a:pPr lvl="4"/>
             <a:r>
-              <a:rPr kumimoji="1" lang="ja-JP" altLang="en-US" smtClean="0"/>
+              <a:rPr kumimoji="1" lang="ja-JP" altLang="en-US"/>
               <a:t>第 </a:t>
             </a:r>
             <a:r>
-              <a:rPr kumimoji="1" lang="en-US" altLang="ja-JP" smtClean="0"/>
+              <a:rPr kumimoji="1" lang="en-US" altLang="ja-JP"/>
               <a:t>5 </a:t>
             </a:r>
             <a:r>
-              <a:rPr kumimoji="1" lang="ja-JP" altLang="en-US" smtClean="0"/>
+              <a:rPr kumimoji="1" lang="ja-JP" altLang="en-US"/>
               <a:t>レベル</a:t>
             </a:r>
-            <a:endParaRPr kumimoji="1" lang="ja-JP" altLang="en-US"/>
           </a:p>
         </p:txBody>
       </p:sp>
@@ -4428,7 +4429,7 @@
           <a:p>
             <a:pPr lvl="0"/>
             <a:r>
-              <a:rPr kumimoji="1" lang="ja-JP" altLang="en-US" smtClean="0"/>
+              <a:rPr kumimoji="1" lang="ja-JP" altLang="en-US"/>
               <a:t>マスタ テキストの書式設定</a:t>
             </a:r>
           </a:p>
@@ -4484,70 +4485,69 @@
           <a:p>
             <a:pPr lvl="0"/>
             <a:r>
-              <a:rPr kumimoji="1" lang="ja-JP" altLang="en-US" smtClean="0"/>
+              <a:rPr kumimoji="1" lang="ja-JP" altLang="en-US"/>
               <a:t>マスタ テキストの書式設定</a:t>
             </a:r>
           </a:p>
           <a:p>
             <a:pPr lvl="1"/>
             <a:r>
-              <a:rPr kumimoji="1" lang="ja-JP" altLang="en-US" smtClean="0"/>
+              <a:rPr kumimoji="1" lang="ja-JP" altLang="en-US"/>
               <a:t>第 </a:t>
             </a:r>
             <a:r>
-              <a:rPr kumimoji="1" lang="en-US" altLang="ja-JP" smtClean="0"/>
+              <a:rPr kumimoji="1" lang="en-US" altLang="ja-JP"/>
               <a:t>2 </a:t>
             </a:r>
             <a:r>
-              <a:rPr kumimoji="1" lang="ja-JP" altLang="en-US" smtClean="0"/>
+              <a:rPr kumimoji="1" lang="ja-JP" altLang="en-US"/>
               <a:t>レベル</a:t>
             </a:r>
           </a:p>
           <a:p>
             <a:pPr lvl="2"/>
             <a:r>
-              <a:rPr kumimoji="1" lang="ja-JP" altLang="en-US" smtClean="0"/>
+              <a:rPr kumimoji="1" lang="ja-JP" altLang="en-US"/>
               <a:t>第 </a:t>
             </a:r>
             <a:r>
-              <a:rPr kumimoji="1" lang="en-US" altLang="ja-JP" smtClean="0"/>
+              <a:rPr kumimoji="1" lang="en-US" altLang="ja-JP"/>
               <a:t>3 </a:t>
             </a:r>
             <a:r>
-              <a:rPr kumimoji="1" lang="ja-JP" altLang="en-US" smtClean="0"/>
+              <a:rPr kumimoji="1" lang="ja-JP" altLang="en-US"/>
               <a:t>レベル</a:t>
             </a:r>
           </a:p>
           <a:p>
             <a:pPr lvl="3"/>
             <a:r>
-              <a:rPr kumimoji="1" lang="ja-JP" altLang="en-US" smtClean="0"/>
+              <a:rPr kumimoji="1" lang="ja-JP" altLang="en-US"/>
               <a:t>第 </a:t>
             </a:r>
             <a:r>
-              <a:rPr kumimoji="1" lang="en-US" altLang="ja-JP" smtClean="0"/>
+              <a:rPr kumimoji="1" lang="en-US" altLang="ja-JP"/>
               <a:t>4 </a:t>
             </a:r>
             <a:r>
-              <a:rPr kumimoji="1" lang="ja-JP" altLang="en-US" smtClean="0"/>
+              <a:rPr kumimoji="1" lang="ja-JP" altLang="en-US"/>
               <a:t>レベル</a:t>
             </a:r>
           </a:p>
           <a:p>
             <a:pPr lvl="4"/>
             <a:r>
-              <a:rPr kumimoji="1" lang="ja-JP" altLang="en-US" smtClean="0"/>
+              <a:rPr kumimoji="1" lang="ja-JP" altLang="en-US"/>
               <a:t>第 </a:t>
             </a:r>
             <a:r>
-              <a:rPr kumimoji="1" lang="en-US" altLang="ja-JP" smtClean="0"/>
+              <a:rPr kumimoji="1" lang="en-US" altLang="ja-JP"/>
               <a:t>5 </a:t>
             </a:r>
             <a:r>
-              <a:rPr kumimoji="1" lang="ja-JP" altLang="en-US" smtClean="0"/>
+              <a:rPr kumimoji="1" lang="ja-JP" altLang="en-US"/>
               <a:t>レベル</a:t>
             </a:r>
-            <a:endParaRPr kumimoji="1" lang="ja-JP" altLang="en-US"/>
           </a:p>
         </p:txBody>
       </p:sp>
@@ -4569,7 +4569,7 @@
             <a:fld id="{E90ED720-0104-4369-84BC-D37694168613}" type="datetimeFigureOut">
               <a:rPr kumimoji="1" lang="ja-JP" altLang="en-US" smtClean="0"/>
               <a:pPr/>
-              <a:t>2014/10/24</a:t>
+              <a:t>2026/9/28</a:t>
             </a:fld>
             <a:endParaRPr kumimoji="1" lang="ja-JP" altLang="en-US"/>
           </a:p>
@@ -4659,10 +4659,9 @@
           <a:lstStyle/>
           <a:p>
             <a:r>
-              <a:rPr kumimoji="1" lang="ja-JP" altLang="en-US" smtClean="0"/>
+              <a:rPr kumimoji="1" lang="ja-JP" altLang="en-US"/>
               <a:t>マスタ タイトルの書式設定</a:t>
             </a:r>
-            <a:endParaRPr kumimoji="1" lang="ja-JP" altLang="en-US"/>
           </a:p>
         </p:txBody>
       </p:sp>
@@ -4684,7 +4683,7 @@
             <a:fld id="{E90ED720-0104-4369-84BC-D37694168613}" type="datetimeFigureOut">
               <a:rPr kumimoji="1" lang="ja-JP" altLang="en-US" smtClean="0"/>
               <a:pPr/>
-              <a:t>2014/10/24</a:t>
+              <a:t>2026/9/28</a:t>
             </a:fld>
             <a:endParaRPr kumimoji="1" lang="ja-JP" altLang="en-US"/>
           </a:p>
@@ -4776,7 +4775,7 @@
             <a:fld id="{E90ED720-0104-4369-84BC-D37694168613}" type="datetimeFigureOut">
               <a:rPr kumimoji="1" lang="ja-JP" altLang="en-US" smtClean="0"/>
               <a:pPr/>
-              <a:t>2014/10/24</a:t>
+              <a:t>2026/9/28</a:t>
             </a:fld>
             <a:endParaRPr kumimoji="1" lang="ja-JP" altLang="en-US"/>
           </a:p>
@@ -4875,10 +4874,9 @@
           </a:lstStyle>
           <a:p>
             <a:r>
-              <a:rPr kumimoji="1" lang="ja-JP" altLang="en-US" smtClean="0"/>
+              <a:rPr kumimoji="1" lang="ja-JP" altLang="en-US"/>
               <a:t>マスタ タイトルの書式設定</a:t>
             </a:r>
-            <a:endParaRPr kumimoji="1" lang="ja-JP" altLang="en-US"/>
           </a:p>
         </p:txBody>
       </p:sp>
@@ -4932,70 +4930,69 @@
           <a:p>
             <a:pPr lvl="0"/>
             <a:r>
-              <a:rPr kumimoji="1" lang="ja-JP" altLang="en-US" smtClean="0"/>
+              <a:rPr kumimoji="1" lang="ja-JP" altLang="en-US"/>
               <a:t>マスタ テキストの書式設定</a:t>
             </a:r>
           </a:p>
           <a:p>
             <a:pPr lvl="1"/>
             <a:r>
-              <a:rPr kumimoji="1" lang="ja-JP" altLang="en-US" smtClean="0"/>
+              <a:rPr kumimoji="1" lang="ja-JP" altLang="en-US"/>
               <a:t>第 </a:t>
             </a:r>
             <a:r>
-              <a:rPr kumimoji="1" lang="en-US" altLang="ja-JP" smtClean="0"/>
+              <a:rPr kumimoji="1" lang="en-US" altLang="ja-JP"/>
               <a:t>2 </a:t>
             </a:r>
             <a:r>
-              <a:rPr kumimoji="1" lang="ja-JP" altLang="en-US" smtClean="0"/>
+              <a:rPr kumimoji="1" lang="ja-JP" altLang="en-US"/>
               <a:t>レベル</a:t>
             </a:r>
           </a:p>
           <a:p>
             <a:pPr lvl="2"/>
             <a:r>
-              <a:rPr kumimoji="1" lang="ja-JP" altLang="en-US" smtClean="0"/>
+              <a:rPr kumimoji="1" lang="ja-JP" altLang="en-US"/>
               <a:t>第 </a:t>
             </a:r>
             <a:r>
-              <a:rPr kumimoji="1" lang="en-US" altLang="ja-JP" smtClean="0"/>
+              <a:rPr kumimoji="1" lang="en-US" altLang="ja-JP"/>
               <a:t>3 </a:t>
             </a:r>
             <a:r>
-              <a:rPr kumimoji="1" lang="ja-JP" altLang="en-US" smtClean="0"/>
+              <a:rPr kumimoji="1" lang="ja-JP" altLang="en-US"/>
               <a:t>レベル</a:t>
             </a:r>
           </a:p>
           <a:p>
             <a:pPr lvl="3"/>
             <a:r>
-              <a:rPr kumimoji="1" lang="ja-JP" altLang="en-US" smtClean="0"/>
+              <a:rPr kumimoji="1" lang="ja-JP" altLang="en-US"/>
               <a:t>第 </a:t>
             </a:r>
             <a:r>
-              <a:rPr kumimoji="1" lang="en-US" altLang="ja-JP" smtClean="0"/>
+              <a:rPr kumimoji="1" lang="en-US" altLang="ja-JP"/>
               <a:t>4 </a:t>
             </a:r>
             <a:r>
-              <a:rPr kumimoji="1" lang="ja-JP" altLang="en-US" smtClean="0"/>
+              <a:rPr kumimoji="1" lang="ja-JP" altLang="en-US"/>
               <a:t>レベル</a:t>
             </a:r>
           </a:p>
           <a:p>
             <a:pPr lvl="4"/>
             <a:r>
-              <a:rPr kumimoji="1" lang="ja-JP" altLang="en-US" smtClean="0"/>
+              <a:rPr kumimoji="1" lang="ja-JP" altLang="en-US"/>
               <a:t>第 </a:t>
             </a:r>
             <a:r>
-              <a:rPr kumimoji="1" lang="en-US" altLang="ja-JP" smtClean="0"/>
+              <a:rPr kumimoji="1" lang="en-US" altLang="ja-JP"/>
               <a:t>5 </a:t>
             </a:r>
             <a:r>
-              <a:rPr kumimoji="1" lang="ja-JP" altLang="en-US" smtClean="0"/>
+              <a:rPr kumimoji="1" lang="ja-JP" altLang="en-US"/>
               <a:t>レベル</a:t>
             </a:r>
-            <a:endParaRPr kumimoji="1" lang="ja-JP" altLang="en-US"/>
           </a:p>
         </p:txBody>
       </p:sp>
@@ -5058,7 +5055,7 @@
           <a:p>
             <a:pPr lvl="0"/>
             <a:r>
-              <a:rPr kumimoji="1" lang="ja-JP" altLang="en-US" smtClean="0"/>
+              <a:rPr kumimoji="1" lang="ja-JP" altLang="en-US"/>
               <a:t>マスタ テキストの書式設定</a:t>
             </a:r>
           </a:p>
@@ -5082,7 +5079,7 @@
             <a:fld id="{E90ED720-0104-4369-84BC-D37694168613}" type="datetimeFigureOut">
               <a:rPr kumimoji="1" lang="ja-JP" altLang="en-US" smtClean="0"/>
               <a:pPr/>
-              <a:t>2014/10/24</a:t>
+              <a:t>2026/9/28</a:t>
             </a:fld>
             <a:endParaRPr kumimoji="1" lang="ja-JP" altLang="en-US"/>
           </a:p>
@@ -5181,10 +5178,9 @@
           </a:lstStyle>
           <a:p>
             <a:r>
-              <a:rPr kumimoji="1" lang="ja-JP" altLang="en-US" smtClean="0"/>
+              <a:rPr kumimoji="1" lang="ja-JP" altLang="en-US"/>
               <a:t>マスタ タイトルの書式設定</a:t>
             </a:r>
-            <a:endParaRPr kumimoji="1" lang="ja-JP" altLang="en-US"/>
           </a:p>
         </p:txBody>
       </p:sp>
@@ -5308,7 +5304,7 @@
           <a:p>
             <a:pPr lvl="0"/>
             <a:r>
-              <a:rPr kumimoji="1" lang="ja-JP" altLang="en-US" smtClean="0"/>
+              <a:rPr kumimoji="1" lang="ja-JP" altLang="en-US"/>
               <a:t>マスタ テキストの書式設定</a:t>
             </a:r>
           </a:p>
@@ -5332,7 +5328,7 @@
             <a:fld id="{E90ED720-0104-4369-84BC-D37694168613}" type="datetimeFigureOut">
               <a:rPr kumimoji="1" lang="ja-JP" altLang="en-US" smtClean="0"/>
               <a:pPr/>
-              <a:t>2014/10/24</a:t>
+              <a:t>2026/9/28</a:t>
             </a:fld>
             <a:endParaRPr kumimoji="1" lang="ja-JP" altLang="en-US"/>
           </a:p>
@@ -5437,10 +5433,9 @@
           <a:lstStyle/>
           <a:p>
             <a:r>
-              <a:rPr kumimoji="1" lang="ja-JP" altLang="en-US" smtClean="0"/>
+              <a:rPr kumimoji="1" lang="ja-JP" altLang="en-US"/>
               <a:t>マスタ タイトルの書式設定</a:t>
             </a:r>
-            <a:endParaRPr kumimoji="1" lang="ja-JP" altLang="en-US"/>
           </a:p>
         </p:txBody>
       </p:sp>
@@ -5471,70 +5466,69 @@
           <a:p>
             <a:pPr lvl="0"/>
             <a:r>
-              <a:rPr kumimoji="1" lang="ja-JP" altLang="en-US" smtClean="0"/>
+              <a:rPr kumimoji="1" lang="ja-JP" altLang="en-US"/>
               <a:t>マスタ テキストの書式設定</a:t>
             </a:r>
           </a:p>
           <a:p>
             <a:pPr lvl="1"/>
             <a:r>
-              <a:rPr kumimoji="1" lang="ja-JP" altLang="en-US" smtClean="0"/>
+              <a:rPr kumimoji="1" lang="ja-JP" altLang="en-US"/>
               <a:t>第 </a:t>
             </a:r>
             <a:r>
-              <a:rPr kumimoji="1" lang="en-US" altLang="ja-JP" smtClean="0"/>
+              <a:rPr kumimoji="1" lang="en-US" altLang="ja-JP"/>
               <a:t>2 </a:t>
             </a:r>
             <a:r>
-              <a:rPr kumimoji="1" lang="ja-JP" altLang="en-US" smtClean="0"/>
+              <a:rPr kumimoji="1" lang="ja-JP" altLang="en-US"/>
               <a:t>レベル</a:t>
             </a:r>
           </a:p>
           <a:p>
             <a:pPr lvl="2"/>
             <a:r>
-              <a:rPr kumimoji="1" lang="ja-JP" altLang="en-US" smtClean="0"/>
+              <a:rPr kumimoji="1" lang="ja-JP" altLang="en-US"/>
               <a:t>第 </a:t>
             </a:r>
             <a:r>
-              <a:rPr kumimoji="1" lang="en-US" altLang="ja-JP" smtClean="0"/>
+              <a:rPr kumimoji="1" lang="en-US" altLang="ja-JP"/>
               <a:t>3 </a:t>
             </a:r>
             <a:r>
-              <a:rPr kumimoji="1" lang="ja-JP" altLang="en-US" smtClean="0"/>
+              <a:rPr kumimoji="1" lang="ja-JP" altLang="en-US"/>
               <a:t>レベル</a:t>
             </a:r>
           </a:p>
           <a:p>
             <a:pPr lvl="3"/>
             <a:r>
-              <a:rPr kumimoji="1" lang="ja-JP" altLang="en-US" smtClean="0"/>
+              <a:rPr kumimoji="1" lang="ja-JP" altLang="en-US"/>
               <a:t>第 </a:t>
             </a:r>
             <a:r>
-              <a:rPr kumimoji="1" lang="en-US" altLang="ja-JP" smtClean="0"/>
+              <a:rPr kumimoji="1" lang="en-US" altLang="ja-JP"/>
               <a:t>4 </a:t>
             </a:r>
             <a:r>
-              <a:rPr kumimoji="1" lang="ja-JP" altLang="en-US" smtClean="0"/>
+              <a:rPr kumimoji="1" lang="ja-JP" altLang="en-US"/>
               <a:t>レベル</a:t>
             </a:r>
           </a:p>
           <a:p>
             <a:pPr lvl="4"/>
             <a:r>
-              <a:rPr kumimoji="1" lang="ja-JP" altLang="en-US" smtClean="0"/>
+              <a:rPr kumimoji="1" lang="ja-JP" altLang="en-US"/>
               <a:t>第 </a:t>
             </a:r>
             <a:r>
-              <a:rPr kumimoji="1" lang="en-US" altLang="ja-JP" smtClean="0"/>
+              <a:rPr kumimoji="1" lang="en-US" altLang="ja-JP"/>
               <a:t>5 </a:t>
             </a:r>
             <a:r>
-              <a:rPr kumimoji="1" lang="ja-JP" altLang="en-US" smtClean="0"/>
+              <a:rPr kumimoji="1" lang="ja-JP" altLang="en-US"/>
               <a:t>レベル</a:t>
             </a:r>
-            <a:endParaRPr kumimoji="1" lang="ja-JP" altLang="en-US"/>
           </a:p>
         </p:txBody>
       </p:sp>
@@ -5574,7 +5568,7 @@
             <a:fld id="{E90ED720-0104-4369-84BC-D37694168613}" type="datetimeFigureOut">
               <a:rPr kumimoji="1" lang="ja-JP" altLang="en-US" smtClean="0"/>
               <a:pPr/>
-              <a:t>2014/10/24</a:t>
+              <a:t>2026/9/28</a:t>
             </a:fld>
             <a:endParaRPr kumimoji="1" lang="ja-JP" altLang="en-US"/>
           </a:p>
@@ -5966,7 +5960,7 @@
           <a:lstStyle/>
           <a:p>
             <a:r>
-              <a:rPr lang="ja-JP" altLang="en-US" dirty="0" smtClean="0"/>
+              <a:rPr lang="ja-JP" altLang="en-US" dirty="0"/>
               <a:t>プログラミング言語論</a:t>
             </a:r>
             <a:endParaRPr kumimoji="1" lang="ja-JP" altLang="en-US" dirty="0"/>
@@ -5997,7 +5991,7 @@
           <a:p>
             <a:pPr algn="ctr"/>
             <a:r>
-              <a:rPr kumimoji="1" lang="ja-JP" altLang="en-US" sz="3200" dirty="0" smtClean="0"/>
+              <a:rPr kumimoji="1" lang="ja-JP" altLang="en-US" sz="3200" dirty="0"/>
               <a:t>第</a:t>
             </a:r>
             <a:r>
@@ -6005,30 +5999,30 @@
               <a:t>5</a:t>
             </a:r>
             <a:r>
-              <a:rPr kumimoji="1" lang="ja-JP" altLang="en-US" sz="3200" dirty="0" smtClean="0"/>
+              <a:rPr kumimoji="1" lang="ja-JP" altLang="en-US" sz="3200" dirty="0"/>
               <a:t>回</a:t>
             </a:r>
-            <a:endParaRPr kumimoji="1" lang="en-US" altLang="ja-JP" sz="3200" dirty="0" smtClean="0"/>
+            <a:endParaRPr kumimoji="1" lang="en-US" altLang="ja-JP" sz="3200" dirty="0"/>
           </a:p>
           <a:p>
             <a:pPr algn="ctr"/>
             <a:r>
-              <a:rPr lang="en-US" altLang="ja-JP" sz="3200" dirty="0" smtClean="0"/>
+              <a:rPr lang="en-US" altLang="ja-JP" sz="3200" dirty="0"/>
               <a:t>C</a:t>
             </a:r>
             <a:r>
-              <a:rPr lang="ja-JP" altLang="en-US" sz="3200" dirty="0" smtClean="0"/>
+              <a:rPr lang="ja-JP" altLang="en-US" sz="3200" dirty="0"/>
               <a:t>言語の</a:t>
             </a:r>
             <a:r>
-              <a:rPr lang="en-US" altLang="ja-JP" sz="3200" dirty="0" smtClean="0"/>
+              <a:rPr lang="en-US" altLang="ja-JP" sz="3200" dirty="0"/>
               <a:t>subset</a:t>
             </a:r>
             <a:r>
-              <a:rPr lang="ja-JP" altLang="en-US" sz="3200" dirty="0" smtClean="0"/>
+              <a:rPr lang="ja-JP" altLang="en-US" sz="3200" dirty="0"/>
               <a:t>の意味の定義</a:t>
             </a:r>
-            <a:endParaRPr lang="en-US" altLang="ja-JP" sz="3200" dirty="0" smtClean="0"/>
+            <a:endParaRPr lang="en-US" altLang="ja-JP" sz="3200" dirty="0"/>
           </a:p>
         </p:txBody>
       </p:sp>
@@ -6040,8 +6034,8 @@
         </p:nvSpPr>
         <p:spPr>
           <a:xfrm>
-            <a:off x="2680132" y="5120358"/>
-            <a:ext cx="3534942" cy="523220"/>
+            <a:off x="3714477" y="5088827"/>
+            <a:ext cx="1500732" cy="523220"/>
           </a:xfrm>
           <a:prstGeom prst="rect">
             <a:avLst/>
@@ -6054,11 +6048,15 @@
           </a:bodyPr>
           <a:lstStyle/>
           <a:p>
-            <a:r>
-              <a:rPr kumimoji="1" lang="ja-JP" altLang="en-US" sz="2800" dirty="0" smtClean="0"/>
-              <a:t>情報工学科　篠埜　功</a:t>
-            </a:r>
-            <a:endParaRPr kumimoji="1" lang="ja-JP" altLang="en-US" sz="2800" dirty="0"/>
+            <a:pPr algn="ctr"/>
+            <a:r>
+              <a:rPr kumimoji="1" lang="ja-JP" altLang="en-US" sz="2800"/>
+              <a:t>篠埜　</a:t>
+            </a:r>
+            <a:r>
+              <a:rPr kumimoji="1" lang="ja-JP" altLang="en-US" sz="2800" dirty="0"/>
+              <a:t>功</a:t>
+            </a:r>
           </a:p>
         </p:txBody>
       </p:sp>
@@ -6067,13 +6065,6 @@
   <p:clrMapOvr>
     <a:masterClrMapping/>
   </p:clrMapOvr>
-  <p:timing>
-    <p:tnLst>
-      <p:par>
-        <p:cTn xmlns:p14="http://schemas.microsoft.com/office/powerpoint/2010/main" id="1" dur="indefinite" restart="never" nodeType="tmRoot"/>
-      </p:par>
-    </p:tnLst>
-  </p:timing>
 </p:sld>
 </file>
 
@@ -6111,14 +6102,14 @@
           <a:p>
             <a:pPr eaLnBrk="1" hangingPunct="1"/>
             <a:r>
-              <a:rPr lang="ja-JP" altLang="en-US" dirty="0" smtClean="0"/>
+              <a:rPr lang="ja-JP" altLang="en-US" dirty="0"/>
               <a:t>算術式の評価の例</a:t>
             </a:r>
             <a:r>
-              <a:rPr lang="en-US" altLang="ja-JP" dirty="0" smtClean="0"/>
+              <a:rPr lang="en-US" altLang="ja-JP" dirty="0"/>
               <a:t>1</a:t>
             </a:r>
-            <a:endParaRPr lang="ja-JP" altLang="en-US" dirty="0" smtClean="0"/>
+            <a:endParaRPr lang="ja-JP" altLang="en-US" dirty="0"/>
           </a:p>
         </p:txBody>
       </p:sp>
@@ -6159,13 +6150,13 @@
               <a:t>状態 </a:t>
             </a:r>
             <a:r>
-              <a:rPr lang="en-US" altLang="ja-JP" sz="2800" b="0" i="1" dirty="0" smtClean="0">
+              <a:rPr lang="en-US" altLang="ja-JP" sz="2800" b="0" i="1" dirty="0">
                 <a:sym typeface="Symbol" pitchFamily="18" charset="2"/>
               </a:rPr>
               <a:t></a:t>
             </a:r>
             <a:r>
-              <a:rPr lang="ja-JP" altLang="en-US" sz="2800" b="0" baseline="-25000" dirty="0" smtClean="0">
+              <a:rPr lang="ja-JP" altLang="en-US" sz="2800" b="0" baseline="-25000" dirty="0">
                 <a:sym typeface="Symbol" pitchFamily="18" charset="2"/>
               </a:rPr>
               <a:t>  </a:t>
@@ -6234,22 +6225,16 @@
               <a:t>&lt; ((10 + 20) * 4), </a:t>
             </a:r>
             <a:r>
-              <a:rPr lang="en-US" altLang="ja-JP" sz="2800" b="0" i="1" dirty="0" smtClean="0">
+              <a:rPr lang="en-US" altLang="ja-JP" sz="2800" b="0" i="1" dirty="0">
                 <a:sym typeface="Symbol" pitchFamily="18" charset="2"/>
               </a:rPr>
               <a:t></a:t>
             </a:r>
             <a:r>
-              <a:rPr lang="en-US" altLang="ja-JP" sz="2800" b="0" dirty="0" smtClean="0">
-                <a:sym typeface="Symbol" pitchFamily="18" charset="2"/>
-              </a:rPr>
-              <a:t> </a:t>
-            </a:r>
-            <a:r>
               <a:rPr lang="en-US" altLang="ja-JP" sz="2800" b="0" dirty="0">
                 <a:sym typeface="Symbol" pitchFamily="18" charset="2"/>
               </a:rPr>
-              <a:t>&gt;    120 </a:t>
+              <a:t> &gt;    120 </a:t>
             </a:r>
             <a:endParaRPr lang="ja-JP" altLang="en-US" sz="2800" b="0" dirty="0"/>
           </a:p>
@@ -6317,22 +6302,16 @@
               <a:t>&lt; (10 + 20), </a:t>
             </a:r>
             <a:r>
-              <a:rPr lang="en-US" altLang="ja-JP" sz="2800" b="0" i="1" dirty="0" smtClean="0">
+              <a:rPr lang="en-US" altLang="ja-JP" sz="2800" b="0" i="1" dirty="0">
                 <a:sym typeface="Symbol" pitchFamily="18" charset="2"/>
               </a:rPr>
               <a:t></a:t>
             </a:r>
             <a:r>
-              <a:rPr lang="en-US" altLang="ja-JP" sz="2800" b="0" dirty="0" smtClean="0">
-                <a:sym typeface="Symbol" pitchFamily="18" charset="2"/>
-              </a:rPr>
-              <a:t> </a:t>
-            </a:r>
-            <a:r>
               <a:rPr lang="en-US" altLang="ja-JP" sz="2800" b="0" dirty="0">
                 <a:sym typeface="Symbol" pitchFamily="18" charset="2"/>
               </a:rPr>
-              <a:t>&gt;    30</a:t>
+              <a:t> &gt;    30</a:t>
             </a:r>
             <a:endParaRPr lang="ja-JP" altLang="en-US" sz="2800" b="0" dirty="0"/>
           </a:p>
@@ -6373,22 +6352,16 @@
               <a:t>&lt; 4, </a:t>
             </a:r>
             <a:r>
-              <a:rPr lang="en-US" altLang="ja-JP" sz="2800" b="0" i="1" dirty="0" smtClean="0">
+              <a:rPr lang="en-US" altLang="ja-JP" sz="2800" b="0" i="1" dirty="0">
                 <a:sym typeface="Symbol" pitchFamily="18" charset="2"/>
               </a:rPr>
               <a:t></a:t>
             </a:r>
             <a:r>
-              <a:rPr lang="en-US" altLang="ja-JP" sz="2800" b="0" dirty="0" smtClean="0">
-                <a:sym typeface="Symbol" pitchFamily="18" charset="2"/>
-              </a:rPr>
-              <a:t> </a:t>
-            </a:r>
-            <a:r>
               <a:rPr lang="en-US" altLang="ja-JP" sz="2800" b="0" dirty="0">
                 <a:sym typeface="Symbol" pitchFamily="18" charset="2"/>
               </a:rPr>
-              <a:t>&gt;    4  </a:t>
+              <a:t> &gt;    4  </a:t>
             </a:r>
             <a:endParaRPr lang="ja-JP" altLang="en-US" sz="2800" b="0" dirty="0"/>
           </a:p>
@@ -6456,22 +6429,16 @@
               <a:t>&lt; 10, </a:t>
             </a:r>
             <a:r>
-              <a:rPr lang="en-US" altLang="ja-JP" sz="2800" b="0" i="1" dirty="0" smtClean="0">
+              <a:rPr lang="en-US" altLang="ja-JP" sz="2800" b="0" i="1" dirty="0">
                 <a:sym typeface="Symbol" pitchFamily="18" charset="2"/>
               </a:rPr>
               <a:t></a:t>
             </a:r>
             <a:r>
-              <a:rPr lang="en-US" altLang="ja-JP" sz="2800" b="0" dirty="0" smtClean="0">
-                <a:sym typeface="Symbol" pitchFamily="18" charset="2"/>
-              </a:rPr>
-              <a:t> </a:t>
-            </a:r>
-            <a:r>
               <a:rPr lang="en-US" altLang="ja-JP" sz="2800" b="0" dirty="0">
                 <a:sym typeface="Symbol" pitchFamily="18" charset="2"/>
               </a:rPr>
-              <a:t>&gt;  10</a:t>
+              <a:t> &gt;  10</a:t>
             </a:r>
             <a:endParaRPr lang="ja-JP" altLang="en-US" sz="2800" b="0" dirty="0"/>
           </a:p>
@@ -6512,22 +6479,16 @@
               <a:t>&lt; 20, </a:t>
             </a:r>
             <a:r>
-              <a:rPr lang="en-US" altLang="ja-JP" sz="2800" b="0" i="1" dirty="0" smtClean="0">
+              <a:rPr lang="en-US" altLang="ja-JP" sz="2800" b="0" i="1" dirty="0">
                 <a:sym typeface="Symbol" pitchFamily="18" charset="2"/>
               </a:rPr>
               <a:t></a:t>
             </a:r>
             <a:r>
-              <a:rPr lang="en-US" altLang="ja-JP" sz="2800" b="0" dirty="0" smtClean="0">
-                <a:sym typeface="Symbol" pitchFamily="18" charset="2"/>
-              </a:rPr>
-              <a:t> </a:t>
-            </a:r>
-            <a:r>
               <a:rPr lang="en-US" altLang="ja-JP" sz="2800" b="0" dirty="0">
                 <a:sym typeface="Symbol" pitchFamily="18" charset="2"/>
               </a:rPr>
-              <a:t>&gt;  20</a:t>
+              <a:t> &gt;  20</a:t>
             </a:r>
             <a:endParaRPr lang="ja-JP" altLang="en-US" sz="2800" b="0" dirty="0"/>
           </a:p>
@@ -6538,13 +6499,6 @@
   <p:clrMapOvr>
     <a:masterClrMapping/>
   </p:clrMapOvr>
-  <p:timing>
-    <p:tnLst>
-      <p:par>
-        <p:cTn xmlns:p14="http://schemas.microsoft.com/office/powerpoint/2010/main" id="1" dur="indefinite" restart="never" nodeType="tmRoot"/>
-      </p:par>
-    </p:tnLst>
-  </p:timing>
 </p:sld>
 </file>
 
@@ -6582,14 +6536,14 @@
           <a:p>
             <a:pPr eaLnBrk="1" hangingPunct="1"/>
             <a:r>
-              <a:rPr lang="ja-JP" altLang="en-US" dirty="0" smtClean="0"/>
+              <a:rPr lang="ja-JP" altLang="en-US" dirty="0"/>
               <a:t>算術式の評価の例</a:t>
             </a:r>
             <a:r>
-              <a:rPr lang="en-US" altLang="ja-JP" dirty="0" smtClean="0"/>
+              <a:rPr lang="en-US" altLang="ja-JP" dirty="0"/>
               <a:t>2</a:t>
             </a:r>
-            <a:endParaRPr lang="ja-JP" altLang="en-US" dirty="0" smtClean="0"/>
+            <a:endParaRPr lang="ja-JP" altLang="en-US" dirty="0"/>
           </a:p>
         </p:txBody>
       </p:sp>
@@ -6630,13 +6584,13 @@
               <a:t>状態 </a:t>
             </a:r>
             <a:r>
-              <a:rPr lang="en-US" altLang="ja-JP" sz="2800" b="0" i="1" dirty="0" smtClean="0">
+              <a:rPr lang="en-US" altLang="ja-JP" sz="2800" b="0" i="1" dirty="0">
                 <a:sym typeface="Symbol" pitchFamily="18" charset="2"/>
               </a:rPr>
               <a:t></a:t>
             </a:r>
             <a:r>
-              <a:rPr lang="ja-JP" altLang="en-US" sz="2800" b="0" baseline="-25000" dirty="0" smtClean="0">
+              <a:rPr lang="ja-JP" altLang="en-US" sz="2800" b="0" baseline="-25000" dirty="0">
                 <a:sym typeface="Symbol" pitchFamily="18" charset="2"/>
               </a:rPr>
               <a:t>  </a:t>
@@ -6702,37 +6656,19 @@
           <a:p>
             <a:r>
               <a:rPr lang="en-US" altLang="ja-JP" sz="2800" b="0" dirty="0"/>
-              <a:t>&lt; </a:t>
-            </a:r>
-            <a:r>
-              <a:rPr lang="en-US" altLang="ja-JP" sz="2800" b="0" dirty="0" smtClean="0"/>
-              <a:t>(5 </a:t>
-            </a:r>
-            <a:r>
-              <a:rPr lang="en-US" altLang="ja-JP" sz="2800" b="0" dirty="0"/>
-              <a:t>* (X + 1</a:t>
-            </a:r>
-            <a:r>
-              <a:rPr lang="en-US" altLang="ja-JP" sz="2800" b="0" dirty="0" smtClean="0"/>
-              <a:t>)), </a:t>
-            </a:r>
-            <a:r>
-              <a:rPr lang="en-US" altLang="ja-JP" sz="2800" b="0" i="1" dirty="0" smtClean="0">
+              <a:t>&lt; (5 * (X + 1)), </a:t>
+            </a:r>
+            <a:r>
+              <a:rPr lang="en-US" altLang="ja-JP" sz="2800" b="0" i="1" dirty="0">
                 <a:sym typeface="Symbol" pitchFamily="18" charset="2"/>
               </a:rPr>
               <a:t></a:t>
             </a:r>
             <a:r>
-              <a:rPr lang="en-US" altLang="ja-JP" sz="2800" b="0" dirty="0" smtClean="0">
-                <a:sym typeface="Symbol" pitchFamily="18" charset="2"/>
-              </a:rPr>
-              <a:t> </a:t>
-            </a:r>
-            <a:r>
               <a:rPr lang="en-US" altLang="ja-JP" sz="2800" b="0" dirty="0">
                 <a:sym typeface="Symbol" pitchFamily="18" charset="2"/>
               </a:rPr>
-              <a:t>&gt;    20 </a:t>
+              <a:t> &gt;    20 </a:t>
             </a:r>
             <a:endParaRPr lang="ja-JP" altLang="en-US" sz="2800" b="0" dirty="0"/>
           </a:p>
@@ -6800,22 +6736,16 @@
               <a:t>&lt; 5, </a:t>
             </a:r>
             <a:r>
-              <a:rPr lang="en-US" altLang="ja-JP" sz="2800" b="0" i="1" dirty="0" smtClean="0">
+              <a:rPr lang="en-US" altLang="ja-JP" sz="2800" b="0" i="1" dirty="0">
                 <a:sym typeface="Symbol" pitchFamily="18" charset="2"/>
               </a:rPr>
               <a:t></a:t>
             </a:r>
             <a:r>
-              <a:rPr lang="en-US" altLang="ja-JP" sz="2800" b="0" dirty="0" smtClean="0">
-                <a:sym typeface="Symbol" pitchFamily="18" charset="2"/>
-              </a:rPr>
-              <a:t> </a:t>
-            </a:r>
-            <a:r>
               <a:rPr lang="en-US" altLang="ja-JP" sz="2800" b="0" dirty="0">
                 <a:sym typeface="Symbol" pitchFamily="18" charset="2"/>
               </a:rPr>
-              <a:t>&gt;    5</a:t>
+              <a:t> &gt;    5</a:t>
             </a:r>
             <a:endParaRPr lang="ja-JP" altLang="en-US" sz="2800" b="0" dirty="0"/>
           </a:p>
@@ -6883,22 +6813,16 @@
               <a:t>&lt; X, </a:t>
             </a:r>
             <a:r>
-              <a:rPr lang="en-US" altLang="ja-JP" sz="2800" b="0" i="1" dirty="0" smtClean="0">
+              <a:rPr lang="en-US" altLang="ja-JP" sz="2800" b="0" i="1" dirty="0">
                 <a:sym typeface="Symbol" pitchFamily="18" charset="2"/>
               </a:rPr>
               <a:t></a:t>
             </a:r>
             <a:r>
-              <a:rPr lang="en-US" altLang="ja-JP" sz="2800" b="0" dirty="0" smtClean="0">
-                <a:sym typeface="Symbol" pitchFamily="18" charset="2"/>
-              </a:rPr>
-              <a:t> </a:t>
-            </a:r>
-            <a:r>
               <a:rPr lang="en-US" altLang="ja-JP" sz="2800" b="0" dirty="0">
                 <a:sym typeface="Symbol" pitchFamily="18" charset="2"/>
               </a:rPr>
-              <a:t>&gt;  3</a:t>
+              <a:t> &gt;  3</a:t>
             </a:r>
             <a:endParaRPr lang="ja-JP" altLang="en-US" sz="2800" b="0" dirty="0"/>
           </a:p>
@@ -6939,22 +6863,16 @@
               <a:t>&lt; 1, </a:t>
             </a:r>
             <a:r>
-              <a:rPr lang="en-US" altLang="ja-JP" sz="2800" b="0" i="1" dirty="0" smtClean="0">
+              <a:rPr lang="en-US" altLang="ja-JP" sz="2800" b="0" i="1" dirty="0">
                 <a:sym typeface="Symbol" pitchFamily="18" charset="2"/>
               </a:rPr>
               <a:t></a:t>
             </a:r>
             <a:r>
-              <a:rPr lang="en-US" altLang="ja-JP" sz="2800" b="0" dirty="0" smtClean="0">
-                <a:sym typeface="Symbol" pitchFamily="18" charset="2"/>
-              </a:rPr>
-              <a:t> </a:t>
-            </a:r>
-            <a:r>
               <a:rPr lang="en-US" altLang="ja-JP" sz="2800" b="0" dirty="0">
                 <a:sym typeface="Symbol" pitchFamily="18" charset="2"/>
               </a:rPr>
-              <a:t>&gt;  1</a:t>
+              <a:t> &gt;  1</a:t>
             </a:r>
             <a:endParaRPr lang="ja-JP" altLang="en-US" sz="2800" b="0" dirty="0"/>
           </a:p>
@@ -6995,22 +6913,16 @@
               <a:t>&lt; (X + 1), </a:t>
             </a:r>
             <a:r>
-              <a:rPr lang="en-US" altLang="ja-JP" sz="2800" b="0" i="1" dirty="0" smtClean="0">
+              <a:rPr lang="en-US" altLang="ja-JP" sz="2800" b="0" i="1" dirty="0">
                 <a:sym typeface="Symbol" pitchFamily="18" charset="2"/>
               </a:rPr>
               <a:t></a:t>
             </a:r>
             <a:r>
-              <a:rPr lang="en-US" altLang="ja-JP" sz="2800" b="0" dirty="0" smtClean="0">
-                <a:sym typeface="Symbol" pitchFamily="18" charset="2"/>
-              </a:rPr>
-              <a:t> </a:t>
-            </a:r>
-            <a:r>
               <a:rPr lang="en-US" altLang="ja-JP" sz="2800" b="0" dirty="0">
                 <a:sym typeface="Symbol" pitchFamily="18" charset="2"/>
               </a:rPr>
-              <a:t>&gt;    4</a:t>
+              <a:t> &gt;    4</a:t>
             </a:r>
             <a:endParaRPr lang="ja-JP" altLang="en-US" sz="2800" b="0" dirty="0"/>
           </a:p>
@@ -7021,13 +6933,6 @@
   <p:clrMapOvr>
     <a:masterClrMapping/>
   </p:clrMapOvr>
-  <p:timing>
-    <p:tnLst>
-      <p:par>
-        <p:cTn xmlns:p14="http://schemas.microsoft.com/office/powerpoint/2010/main" id="1" dur="indefinite" restart="never" nodeType="tmRoot"/>
-      </p:par>
-    </p:tnLst>
-  </p:timing>
 </p:sld>
 </file>
 
@@ -7065,14 +6970,14 @@
           <a:p>
             <a:pPr eaLnBrk="1" hangingPunct="1"/>
             <a:r>
-              <a:rPr lang="ja-JP" altLang="en-US" dirty="0" smtClean="0"/>
+              <a:rPr lang="ja-JP" altLang="en-US" dirty="0"/>
               <a:t>練習問題</a:t>
             </a:r>
             <a:r>
-              <a:rPr lang="en-US" altLang="ja-JP" dirty="0" smtClean="0"/>
+              <a:rPr lang="en-US" altLang="ja-JP" dirty="0"/>
               <a:t>1</a:t>
             </a:r>
-            <a:endParaRPr lang="ja-JP" altLang="en-US" dirty="0" smtClean="0"/>
+            <a:endParaRPr lang="ja-JP" altLang="en-US" dirty="0"/>
           </a:p>
         </p:txBody>
       </p:sp>
@@ -7113,13 +7018,13 @@
               <a:t>状態 </a:t>
             </a:r>
             <a:r>
-              <a:rPr lang="en-US" altLang="ja-JP" sz="2800" b="0" i="1" dirty="0" smtClean="0">
+              <a:rPr lang="en-US" altLang="ja-JP" sz="2800" b="0" i="1" dirty="0">
                 <a:sym typeface="Symbol" pitchFamily="18" charset="2"/>
               </a:rPr>
               <a:t></a:t>
             </a:r>
             <a:r>
-              <a:rPr lang="ja-JP" altLang="en-US" sz="2800" b="0" baseline="-25000" dirty="0" smtClean="0">
+              <a:rPr lang="ja-JP" altLang="en-US" sz="2800" b="0" baseline="-25000" dirty="0">
                 <a:sym typeface="Symbol" pitchFamily="18" charset="2"/>
               </a:rPr>
               <a:t>  </a:t>
@@ -7158,13 +7063,6 @@
   <p:clrMapOvr>
     <a:masterClrMapping/>
   </p:clrMapOvr>
-  <p:timing>
-    <p:tnLst>
-      <p:par>
-        <p:cTn xmlns:p14="http://schemas.microsoft.com/office/powerpoint/2010/main" id="1" dur="indefinite" restart="never" nodeType="tmRoot"/>
-      </p:par>
-    </p:tnLst>
-  </p:timing>
 </p:sld>
 </file>
 
@@ -7201,7 +7099,7 @@
           <a:lstStyle/>
           <a:p>
             <a:r>
-              <a:rPr lang="ja-JP" altLang="en-US" smtClean="0"/>
+              <a:rPr lang="ja-JP" altLang="en-US"/>
               <a:t>文</a:t>
             </a:r>
           </a:p>
@@ -7230,32 +7128,32 @@
           <a:lstStyle/>
           <a:p>
             <a:r>
-              <a:rPr lang="ja-JP" altLang="en-US" sz="2800" dirty="0" smtClean="0"/>
+              <a:rPr lang="ja-JP" altLang="en-US" sz="2800" dirty="0"/>
               <a:t>これまで、式の意味を定義した。</a:t>
             </a:r>
-            <a:endParaRPr lang="en-US" altLang="ja-JP" sz="2800" dirty="0" smtClean="0"/>
-          </a:p>
-          <a:p>
-            <a:r>
-              <a:rPr lang="ja-JP" altLang="en-US" sz="2800" dirty="0" smtClean="0"/>
+            <a:endParaRPr lang="en-US" altLang="ja-JP" sz="2800" dirty="0"/>
+          </a:p>
+          <a:p>
+            <a:r>
+              <a:rPr lang="ja-JP" altLang="en-US" sz="2800" dirty="0"/>
               <a:t>式の実行（評価）では、値が得られる。（補足： フルセットの</a:t>
             </a:r>
             <a:r>
-              <a:rPr lang="en-US" altLang="ja-JP" sz="2800" dirty="0" smtClean="0"/>
+              <a:rPr lang="en-US" altLang="ja-JP" sz="2800" dirty="0"/>
               <a:t>C</a:t>
             </a:r>
             <a:r>
-              <a:rPr lang="ja-JP" altLang="en-US" sz="2800" dirty="0" smtClean="0"/>
+              <a:rPr lang="ja-JP" altLang="en-US" sz="2800" dirty="0"/>
               <a:t>では式の評価で状態が変化する場合がある。）</a:t>
             </a:r>
-            <a:endParaRPr lang="en-US" altLang="ja-JP" sz="2800" dirty="0" smtClean="0"/>
-          </a:p>
-          <a:p>
-            <a:r>
-              <a:rPr lang="ja-JP" altLang="en-US" sz="2800" dirty="0" smtClean="0"/>
+            <a:endParaRPr lang="en-US" altLang="ja-JP" sz="2800" dirty="0"/>
+          </a:p>
+          <a:p>
+            <a:r>
+              <a:rPr lang="ja-JP" altLang="en-US" sz="2800" dirty="0"/>
               <a:t>文の実行の効果は、状態の変化。</a:t>
             </a:r>
-            <a:endParaRPr lang="en-US" altLang="ja-JP" sz="2800" dirty="0" smtClean="0"/>
+            <a:endParaRPr lang="en-US" altLang="ja-JP" sz="2800" dirty="0"/>
           </a:p>
         </p:txBody>
       </p:sp>
@@ -7358,31 +7256,19 @@
               <a:rPr lang="ja-JP" altLang="en-US" sz="2800" b="0" dirty="0">
                 <a:sym typeface="Symbol" pitchFamily="18" charset="2"/>
               </a:rPr>
-              <a:t>の値</a:t>
-            </a:r>
-            <a:r>
-              <a:rPr lang="ja-JP" altLang="en-US" sz="2800" b="0" dirty="0" smtClean="0">
-                <a:sym typeface="Symbol" pitchFamily="18" charset="2"/>
-              </a:rPr>
-              <a:t>が</a:t>
-            </a:r>
-            <a:r>
-              <a:rPr lang="en-US" altLang="ja-JP" sz="2800" b="0" dirty="0" smtClean="0">
+              <a:t>の値が</a:t>
+            </a:r>
+            <a:r>
+              <a:rPr lang="en-US" altLang="ja-JP" sz="2800" b="0" dirty="0">
                 <a:sym typeface="Symbol" pitchFamily="18" charset="2"/>
               </a:rPr>
               <a:t>2</a:t>
             </a:r>
             <a:r>
-              <a:rPr lang="ja-JP" altLang="en-US" sz="2800" b="0" dirty="0" smtClean="0">
-                <a:sym typeface="Symbol" pitchFamily="18" charset="2"/>
-              </a:rPr>
-              <a:t>に</a:t>
-            </a:r>
-            <a:r>
               <a:rPr lang="ja-JP" altLang="en-US" sz="2800" b="0" dirty="0">
                 <a:sym typeface="Symbol" pitchFamily="18" charset="2"/>
               </a:rPr>
-              <a:t>変わる。（もちろん、もともと</a:t>
+              <a:t>に変わる。（もちろん、もともと</a:t>
             </a:r>
             <a:r>
               <a:rPr lang="en-US" altLang="ja-JP" sz="2800" b="0" dirty="0">
@@ -7394,31 +7280,19 @@
               <a:rPr lang="ja-JP" altLang="en-US" sz="2800" b="0" dirty="0">
                 <a:sym typeface="Symbol" pitchFamily="18" charset="2"/>
               </a:rPr>
-              <a:t>の値</a:t>
-            </a:r>
-            <a:r>
-              <a:rPr lang="ja-JP" altLang="en-US" sz="2800" b="0" dirty="0" smtClean="0">
-                <a:sym typeface="Symbol" pitchFamily="18" charset="2"/>
-              </a:rPr>
-              <a:t>が</a:t>
-            </a:r>
-            <a:r>
-              <a:rPr lang="en-US" altLang="ja-JP" sz="2800" b="0" dirty="0" smtClean="0">
+              <a:t>の値が</a:t>
+            </a:r>
+            <a:r>
+              <a:rPr lang="en-US" altLang="ja-JP" sz="2800" b="0" dirty="0">
                 <a:sym typeface="Symbol" pitchFamily="18" charset="2"/>
               </a:rPr>
               <a:t>2</a:t>
             </a:r>
             <a:r>
-              <a:rPr lang="ja-JP" altLang="en-US" sz="2800" b="0" dirty="0" smtClean="0">
-                <a:sym typeface="Symbol" pitchFamily="18" charset="2"/>
-              </a:rPr>
-              <a:t>の</a:t>
-            </a:r>
-            <a:r>
               <a:rPr lang="ja-JP" altLang="en-US" sz="2800" b="0" dirty="0">
                 <a:sym typeface="Symbol" pitchFamily="18" charset="2"/>
               </a:rPr>
-              <a:t>場合は変わらない。）</a:t>
+              <a:t>の場合は変わらない。）</a:t>
             </a:r>
             <a:endParaRPr lang="en-US" altLang="ja-JP" sz="2800" b="0" dirty="0">
               <a:sym typeface="Symbol" pitchFamily="18" charset="2"/>
@@ -7431,13 +7305,6 @@
   <p:clrMapOvr>
     <a:masterClrMapping/>
   </p:clrMapOvr>
-  <p:timing>
-    <p:tnLst>
-      <p:par>
-        <p:cTn xmlns:p14="http://schemas.microsoft.com/office/powerpoint/2010/main" id="1" dur="indefinite" restart="never" nodeType="tmRoot"/>
-      </p:par>
-    </p:tnLst>
-  </p:timing>
 </p:sld>
 </file>
 
@@ -7479,7 +7346,7 @@
           <a:lstStyle/>
           <a:p>
             <a:r>
-              <a:rPr lang="ja-JP" altLang="en-US" dirty="0" smtClean="0"/>
+              <a:rPr lang="ja-JP" altLang="en-US" dirty="0"/>
               <a:t>状態に関する記法</a:t>
             </a:r>
           </a:p>
@@ -7506,100 +7373,100 @@
           <a:lstStyle/>
           <a:p>
             <a:r>
-              <a:rPr lang="ja-JP" altLang="en-US" sz="2800" dirty="0" smtClean="0"/>
+              <a:rPr lang="ja-JP" altLang="en-US" sz="2800" dirty="0"/>
               <a:t>状態</a:t>
             </a:r>
             <a:r>
-              <a:rPr lang="ja-JP" altLang="en-US" sz="2800" i="1" dirty="0" smtClean="0">
+              <a:rPr lang="ja-JP" altLang="en-US" sz="2800" i="1" dirty="0">
                 <a:sym typeface="Symbol" pitchFamily="18" charset="2"/>
               </a:rPr>
               <a:t></a:t>
             </a:r>
             <a:r>
-              <a:rPr lang="ja-JP" altLang="en-US" sz="2800" b="1" i="1" dirty="0" smtClean="0">
+              <a:rPr lang="ja-JP" altLang="en-US" sz="2800" b="1" i="1" dirty="0">
                 <a:sym typeface="Symbol" pitchFamily="18" charset="2"/>
               </a:rPr>
               <a:t> </a:t>
             </a:r>
             <a:r>
-              <a:rPr lang="ja-JP" altLang="en-US" sz="2800" dirty="0" smtClean="0">
+              <a:rPr lang="ja-JP" altLang="en-US" sz="2800" dirty="0">
                 <a:sym typeface="Symbol" pitchFamily="18" charset="2"/>
               </a:rPr>
               <a:t>において変数</a:t>
             </a:r>
             <a:r>
-              <a:rPr lang="en-US" altLang="ja-JP" sz="2800" i="1" dirty="0" smtClean="0">
+              <a:rPr lang="en-US" altLang="ja-JP" sz="2800" i="1" dirty="0">
                 <a:sym typeface="Symbol" pitchFamily="18" charset="2"/>
               </a:rPr>
               <a:t>x</a:t>
             </a:r>
             <a:r>
-              <a:rPr lang="ja-JP" altLang="en-US" sz="2800" dirty="0" smtClean="0">
+              <a:rPr lang="ja-JP" altLang="en-US" sz="2800" dirty="0">
                 <a:sym typeface="Symbol" pitchFamily="18" charset="2"/>
               </a:rPr>
               <a:t>に整数</a:t>
             </a:r>
             <a:r>
-              <a:rPr lang="en-US" altLang="ja-JP" sz="2800" i="1" dirty="0" smtClean="0">
+              <a:rPr lang="en-US" altLang="ja-JP" sz="2800" i="1" dirty="0">
                 <a:sym typeface="Symbol" pitchFamily="18" charset="2"/>
               </a:rPr>
               <a:t>m</a:t>
             </a:r>
             <a:r>
-              <a:rPr lang="ja-JP" altLang="en-US" sz="2800" dirty="0" smtClean="0">
+              <a:rPr lang="ja-JP" altLang="en-US" sz="2800" dirty="0">
                 <a:sym typeface="Symbol" pitchFamily="18" charset="2"/>
               </a:rPr>
               <a:t>が代入された時の状態を </a:t>
             </a:r>
             <a:r>
-              <a:rPr lang="ja-JP" altLang="en-US" sz="2800" i="1" dirty="0" smtClean="0">
+              <a:rPr lang="ja-JP" altLang="en-US" sz="2800" i="1" dirty="0">
                 <a:sym typeface="Symbol" pitchFamily="18" charset="2"/>
               </a:rPr>
               <a:t></a:t>
             </a:r>
             <a:r>
-              <a:rPr lang="ja-JP" altLang="en-US" sz="2800" dirty="0" smtClean="0">
+              <a:rPr lang="ja-JP" altLang="en-US" sz="2800" dirty="0">
                 <a:sym typeface="Symbol" pitchFamily="18" charset="2"/>
               </a:rPr>
               <a:t> </a:t>
             </a:r>
             <a:r>
-              <a:rPr lang="en-US" altLang="ja-JP" sz="2800" dirty="0" smtClean="0">
+              <a:rPr lang="en-US" altLang="ja-JP" sz="2800" dirty="0">
                 <a:sym typeface="Symbol" pitchFamily="18" charset="2"/>
               </a:rPr>
               <a:t>[ </a:t>
             </a:r>
             <a:r>
-              <a:rPr lang="en-US" altLang="ja-JP" sz="2800" i="1" dirty="0" smtClean="0">
+              <a:rPr lang="en-US" altLang="ja-JP" sz="2800" i="1" dirty="0">
                 <a:sym typeface="Symbol" pitchFamily="18" charset="2"/>
               </a:rPr>
               <a:t>m</a:t>
             </a:r>
             <a:r>
-              <a:rPr lang="en-US" altLang="ja-JP" sz="2800" dirty="0" smtClean="0">
+              <a:rPr lang="en-US" altLang="ja-JP" sz="2800" dirty="0">
                 <a:sym typeface="Symbol" pitchFamily="18" charset="2"/>
               </a:rPr>
               <a:t> / </a:t>
             </a:r>
             <a:r>
-              <a:rPr lang="en-US" altLang="ja-JP" sz="2800" i="1" dirty="0" smtClean="0">
+              <a:rPr lang="en-US" altLang="ja-JP" sz="2800" i="1" dirty="0">
                 <a:sym typeface="Symbol" pitchFamily="18" charset="2"/>
               </a:rPr>
               <a:t>x</a:t>
             </a:r>
             <a:r>
-              <a:rPr lang="en-US" altLang="ja-JP" sz="2800" dirty="0" smtClean="0">
+              <a:rPr lang="en-US" altLang="ja-JP" sz="2800" dirty="0">
                 <a:sym typeface="Symbol" pitchFamily="18" charset="2"/>
               </a:rPr>
               <a:t> ] </a:t>
             </a:r>
             <a:r>
-              <a:rPr lang="ja-JP" altLang="en-US" sz="2800" dirty="0" smtClean="0">
+              <a:rPr lang="ja-JP" altLang="en-US" sz="2800" dirty="0">
                 <a:sym typeface="Symbol" pitchFamily="18" charset="2"/>
               </a:rPr>
               <a:t>と書く。</a:t>
             </a:r>
-            <a:endParaRPr lang="en-US" altLang="ja-JP" sz="2800" dirty="0" smtClean="0"/>
+            <a:endParaRPr lang="en-US" altLang="ja-JP" sz="2800" dirty="0"/>
           </a:p>
         </p:txBody>
       </p:sp>
@@ -7635,18 +7502,14 @@
           <a:p>
             <a:r>
               <a:rPr lang="ja-JP" altLang="en-US" sz="2800" b="0" dirty="0"/>
-              <a:t>（</a:t>
-            </a:r>
-            <a:r>
-              <a:rPr lang="ja-JP" altLang="en-US" sz="2800" b="0" dirty="0" smtClean="0"/>
-              <a:t>例</a:t>
-            </a:r>
-            <a:r>
-              <a:rPr lang="en-US" altLang="ja-JP" sz="2800" b="0" dirty="0" smtClean="0"/>
+              <a:t>（例</a:t>
+            </a:r>
+            <a:r>
+              <a:rPr lang="en-US" altLang="ja-JP" sz="2800" b="0" dirty="0"/>
               <a:t>1</a:t>
             </a:r>
             <a:r>
-              <a:rPr lang="ja-JP" altLang="en-US" sz="2800" b="0" dirty="0" smtClean="0"/>
+              <a:rPr lang="ja-JP" altLang="en-US" sz="2800" b="0" dirty="0"/>
               <a:t>） </a:t>
             </a:r>
             <a:r>
@@ -7664,28 +7527,28 @@
           </a:p>
           <a:p>
             <a:r>
-              <a:rPr lang="ja-JP" altLang="en-US" sz="2800" b="0" dirty="0" smtClean="0">
-                <a:sym typeface="Symbol" pitchFamily="18" charset="2"/>
-              </a:rPr>
-              <a:t>この</a:t>
-            </a:r>
-            <a:r>
               <a:rPr lang="ja-JP" altLang="en-US" sz="2800" b="0" dirty="0">
                 <a:sym typeface="Symbol" pitchFamily="18" charset="2"/>
               </a:rPr>
-              <a:t>代入文</a:t>
-            </a:r>
-            <a:r>
-              <a:rPr lang="ja-JP" altLang="en-US" sz="2800" b="0" dirty="0" smtClean="0">
-                <a:sym typeface="Symbol" pitchFamily="18" charset="2"/>
-              </a:rPr>
-              <a:t>の実行前</a:t>
+              <a:t>この代入文の実行前の状態を</a:t>
+            </a:r>
+            <a:r>
+              <a:rPr lang="en-US" altLang="ja-JP" sz="2800" b="0" i="1" dirty="0">
+                <a:sym typeface="Symbol" pitchFamily="18" charset="2"/>
+              </a:rPr>
+              <a:t></a:t>
+            </a:r>
+            <a:r>
+              <a:rPr lang="en-US" altLang="ja-JP" sz="2800" b="0" dirty="0">
+                <a:sym typeface="Symbol" pitchFamily="18" charset="2"/>
+              </a:rPr>
+              <a:t> </a:t>
             </a:r>
             <a:r>
               <a:rPr lang="ja-JP" altLang="en-US" sz="2800" b="0" dirty="0">
                 <a:sym typeface="Symbol" pitchFamily="18" charset="2"/>
               </a:rPr>
-              <a:t>の状態を</a:t>
+              <a:t>とすると、実行後の状態は、</a:t>
             </a:r>
             <a:r>
               <a:rPr lang="en-US" altLang="ja-JP" sz="2800" b="0" i="1" dirty="0">
@@ -7694,49 +7557,19 @@
               <a:t></a:t>
             </a:r>
             <a:r>
+              <a:rPr lang="ja-JP" altLang="en-US" sz="2800" b="0" dirty="0">
+                <a:sym typeface="Symbol" pitchFamily="18" charset="2"/>
+              </a:rPr>
+              <a:t> </a:t>
+            </a:r>
+            <a:r>
               <a:rPr lang="en-US" altLang="ja-JP" sz="2800" b="0" dirty="0">
                 <a:sym typeface="Symbol" pitchFamily="18" charset="2"/>
               </a:rPr>
-              <a:t> </a:t>
+              <a:t>[ 2 / X ] </a:t>
             </a:r>
             <a:r>
               <a:rPr lang="ja-JP" altLang="en-US" sz="2800" b="0" dirty="0">
-                <a:sym typeface="Symbol" pitchFamily="18" charset="2"/>
-              </a:rPr>
-              <a:t>とすると、実行後の状態は、</a:t>
-            </a:r>
-            <a:r>
-              <a:rPr lang="en-US" altLang="ja-JP" sz="2800" b="0" i="1" dirty="0">
-                <a:sym typeface="Symbol" pitchFamily="18" charset="2"/>
-              </a:rPr>
-              <a:t></a:t>
-            </a:r>
-            <a:r>
-              <a:rPr lang="ja-JP" altLang="en-US" sz="2800" b="0" dirty="0">
-                <a:sym typeface="Symbol" pitchFamily="18" charset="2"/>
-              </a:rPr>
-              <a:t> </a:t>
-            </a:r>
-            <a:r>
-              <a:rPr lang="en-US" altLang="ja-JP" sz="2800" b="0" dirty="0">
-                <a:sym typeface="Symbol" pitchFamily="18" charset="2"/>
-              </a:rPr>
-              <a:t>[ 2 / </a:t>
-            </a:r>
-            <a:r>
-              <a:rPr lang="en-US" altLang="ja-JP" sz="2800" b="0" dirty="0" smtClean="0">
-                <a:sym typeface="Symbol" pitchFamily="18" charset="2"/>
-              </a:rPr>
-              <a:t>X </a:t>
-            </a:r>
-            <a:r>
-              <a:rPr lang="en-US" altLang="ja-JP" sz="2800" b="0" dirty="0">
-                <a:sym typeface="Symbol" pitchFamily="18" charset="2"/>
-              </a:rPr>
-              <a:t>] </a:t>
-            </a:r>
-            <a:r>
-              <a:rPr lang="ja-JP" altLang="en-US" sz="2800" b="0" dirty="0" smtClean="0">
                 <a:sym typeface="Symbol" pitchFamily="18" charset="2"/>
               </a:rPr>
               <a:t>である。</a:t>
@@ -7777,18 +7610,14 @@
           <a:p>
             <a:r>
               <a:rPr lang="ja-JP" altLang="en-US" sz="2800" b="0" dirty="0"/>
-              <a:t>（</a:t>
-            </a:r>
-            <a:r>
-              <a:rPr lang="ja-JP" altLang="en-US" sz="2800" b="0" dirty="0" smtClean="0"/>
-              <a:t>例</a:t>
-            </a:r>
-            <a:r>
-              <a:rPr lang="en-US" altLang="ja-JP" sz="2800" b="0" dirty="0" smtClean="0"/>
+              <a:t>（例</a:t>
+            </a:r>
+            <a:r>
+              <a:rPr lang="en-US" altLang="ja-JP" sz="2800" b="0" dirty="0"/>
               <a:t>2</a:t>
             </a:r>
             <a:r>
-              <a:rPr lang="ja-JP" altLang="en-US" sz="2800" b="0" dirty="0" smtClean="0"/>
+              <a:rPr lang="ja-JP" altLang="en-US" sz="2800" b="0" dirty="0"/>
               <a:t>） </a:t>
             </a:r>
             <a:r>
@@ -7801,40 +7630,33 @@
             </a:r>
             <a:r>
               <a:rPr lang="en-US" altLang="ja-JP" sz="2800" b="0" dirty="0"/>
-              <a:t>= </a:t>
-            </a:r>
-            <a:r>
-              <a:rPr lang="en-US" altLang="ja-JP" sz="2800" b="0" dirty="0" smtClean="0"/>
-              <a:t>(X </a:t>
-            </a:r>
-            <a:r>
-              <a:rPr lang="en-US" altLang="ja-JP" sz="2800" b="0" dirty="0"/>
-              <a:t>+ </a:t>
-            </a:r>
-            <a:r>
-              <a:rPr lang="en-US" altLang="ja-JP" sz="2800" b="0" dirty="0" smtClean="0"/>
-              <a:t>2);</a:t>
-            </a:r>
-            <a:endParaRPr lang="en-US" altLang="ja-JP" sz="2800" b="0" dirty="0"/>
+              <a:t>= (X + 2);</a:t>
+            </a:r>
           </a:p>
           <a:p>
             <a:r>
               <a:rPr lang="ja-JP" altLang="en-US" sz="2800" b="0" dirty="0">
                 <a:sym typeface="Symbol" pitchFamily="18" charset="2"/>
               </a:rPr>
-              <a:t>この代入文</a:t>
-            </a:r>
-            <a:r>
-              <a:rPr lang="ja-JP" altLang="en-US" sz="2800" b="0" dirty="0" smtClean="0">
-                <a:sym typeface="Symbol" pitchFamily="18" charset="2"/>
-              </a:rPr>
-              <a:t>の実行前</a:t>
+              <a:t>この代入文の実行前の状態を</a:t>
+            </a:r>
+            <a:r>
+              <a:rPr lang="en-US" altLang="ja-JP" sz="2800" b="0" i="1" dirty="0">
+                <a:sym typeface="Symbol" pitchFamily="18" charset="2"/>
+              </a:rPr>
+              <a:t></a:t>
+            </a:r>
+            <a:r>
+              <a:rPr lang="en-US" altLang="ja-JP" sz="2800" b="0" dirty="0">
+                <a:sym typeface="Symbol" pitchFamily="18" charset="2"/>
+              </a:rPr>
+              <a:t> </a:t>
             </a:r>
             <a:r>
               <a:rPr lang="ja-JP" altLang="en-US" sz="2800" b="0" dirty="0">
                 <a:sym typeface="Symbol" pitchFamily="18" charset="2"/>
               </a:rPr>
-              <a:t>の状態を</a:t>
+              <a:t>とすると、実行後の状態は、</a:t>
             </a:r>
             <a:r>
               <a:rPr lang="en-US" altLang="ja-JP" sz="2800" b="0" i="1" dirty="0">
@@ -7843,61 +7665,31 @@
               <a:t></a:t>
             </a:r>
             <a:r>
+              <a:rPr lang="ja-JP" altLang="en-US" sz="2800" b="0" dirty="0">
+                <a:sym typeface="Symbol" pitchFamily="18" charset="2"/>
+              </a:rPr>
+              <a:t> </a:t>
+            </a:r>
+            <a:r>
               <a:rPr lang="en-US" altLang="ja-JP" sz="2800" b="0" dirty="0">
                 <a:sym typeface="Symbol" pitchFamily="18" charset="2"/>
               </a:rPr>
-              <a:t> </a:t>
+              <a:t>[ </a:t>
+            </a:r>
+            <a:r>
+              <a:rPr lang="en-US" altLang="ja-JP" sz="2800" b="0" i="1" dirty="0">
+                <a:sym typeface="Symbol" pitchFamily="18" charset="2"/>
+              </a:rPr>
+              <a:t></a:t>
+            </a:r>
+            <a:r>
+              <a:rPr lang="en-US" altLang="ja-JP" sz="2800" b="0" dirty="0">
+                <a:sym typeface="Symbol" pitchFamily="18" charset="2"/>
+              </a:rPr>
+              <a:t> (X) + 2 / X ] </a:t>
             </a:r>
             <a:r>
               <a:rPr lang="ja-JP" altLang="en-US" sz="2800" b="0" dirty="0">
-                <a:sym typeface="Symbol" pitchFamily="18" charset="2"/>
-              </a:rPr>
-              <a:t>とすると、実行後の状態は、</a:t>
-            </a:r>
-            <a:r>
-              <a:rPr lang="en-US" altLang="ja-JP" sz="2800" b="0" i="1" dirty="0">
-                <a:sym typeface="Symbol" pitchFamily="18" charset="2"/>
-              </a:rPr>
-              <a:t></a:t>
-            </a:r>
-            <a:r>
-              <a:rPr lang="ja-JP" altLang="en-US" sz="2800" b="0" dirty="0">
-                <a:sym typeface="Symbol" pitchFamily="18" charset="2"/>
-              </a:rPr>
-              <a:t> </a:t>
-            </a:r>
-            <a:r>
-              <a:rPr lang="en-US" altLang="ja-JP" sz="2800" b="0" dirty="0">
-                <a:sym typeface="Symbol" pitchFamily="18" charset="2"/>
-              </a:rPr>
-              <a:t>[ </a:t>
-            </a:r>
-            <a:r>
-              <a:rPr lang="en-US" altLang="ja-JP" sz="2800" b="0" i="1" dirty="0">
-                <a:sym typeface="Symbol" pitchFamily="18" charset="2"/>
-              </a:rPr>
-              <a:t></a:t>
-            </a:r>
-            <a:r>
-              <a:rPr lang="en-US" altLang="ja-JP" sz="2800" b="0" dirty="0">
-                <a:sym typeface="Symbol" pitchFamily="18" charset="2"/>
-              </a:rPr>
-              <a:t> (X) + 2 / </a:t>
-            </a:r>
-            <a:r>
-              <a:rPr lang="en-US" altLang="ja-JP" sz="2800" b="0" dirty="0" smtClean="0">
-                <a:sym typeface="Symbol" pitchFamily="18" charset="2"/>
-              </a:rPr>
-              <a:t>X </a:t>
-            </a:r>
-            <a:r>
-              <a:rPr lang="en-US" altLang="ja-JP" sz="2800" b="0" dirty="0">
-                <a:sym typeface="Symbol" pitchFamily="18" charset="2"/>
-              </a:rPr>
-              <a:t>] </a:t>
-            </a:r>
-            <a:r>
-              <a:rPr lang="ja-JP" altLang="en-US" sz="2800" b="0" dirty="0" smtClean="0">
                 <a:sym typeface="Symbol" pitchFamily="18" charset="2"/>
               </a:rPr>
               <a:t>である。</a:t>
@@ -7937,49 +7729,49 @@
           <a:lstStyle/>
           <a:p>
             <a:r>
-              <a:rPr lang="en-US" altLang="ja-JP" sz="2800" b="0" i="1" dirty="0" smtClean="0">
+              <a:rPr lang="en-US" altLang="ja-JP" sz="2800" b="0" i="1" dirty="0">
                 <a:sym typeface="Symbol" pitchFamily="18" charset="2"/>
               </a:rPr>
               <a:t>m</a:t>
             </a:r>
             <a:r>
-              <a:rPr lang="en-US" altLang="ja-JP" sz="2800" b="0" dirty="0" smtClean="0">
+              <a:rPr lang="en-US" altLang="ja-JP" sz="2800" b="0" dirty="0">
                 <a:sym typeface="Symbol" pitchFamily="18" charset="2"/>
               </a:rPr>
               <a:t>   </a:t>
             </a:r>
             <a:r>
-              <a:rPr lang="ja-JP" altLang="en-US" sz="2800" b="0" dirty="0" smtClean="0">
+              <a:rPr lang="ja-JP" altLang="en-US" sz="2800" b="0" dirty="0">
                 <a:sym typeface="Symbol" pitchFamily="18" charset="2"/>
               </a:rPr>
               <a:t>  </a:t>
             </a:r>
             <a:r>
-              <a:rPr lang="en-US" altLang="ja-JP" sz="2800" b="0" dirty="0" smtClean="0">
+              <a:rPr lang="en-US" altLang="ja-JP" sz="2800" b="0" dirty="0">
                 <a:sym typeface="Symbol" pitchFamily="18" charset="2"/>
               </a:rPr>
               <a:t>     if </a:t>
             </a:r>
             <a:r>
-              <a:rPr lang="en-US" altLang="ja-JP" sz="2800" b="0" i="1" dirty="0" smtClean="0">
+              <a:rPr lang="en-US" altLang="ja-JP" sz="2800" b="0" i="1" dirty="0">
                 <a:sym typeface="Symbol" pitchFamily="18" charset="2"/>
               </a:rPr>
               <a:t>y</a:t>
             </a:r>
             <a:r>
-              <a:rPr lang="en-US" altLang="ja-JP" sz="2800" b="0" dirty="0" smtClean="0">
+              <a:rPr lang="en-US" altLang="ja-JP" sz="2800" b="0" dirty="0">
                 <a:sym typeface="Symbol" pitchFamily="18" charset="2"/>
               </a:rPr>
               <a:t> = </a:t>
             </a:r>
             <a:r>
-              <a:rPr lang="en-US" altLang="ja-JP" sz="2800" b="0" i="1" dirty="0" smtClean="0">
+              <a:rPr lang="en-US" altLang="ja-JP" sz="2800" b="0" i="1" dirty="0">
                 <a:sym typeface="Symbol" pitchFamily="18" charset="2"/>
               </a:rPr>
               <a:t>x</a:t>
             </a:r>
             <a:r>
-              <a:rPr lang="en-US" altLang="ja-JP" sz="2800" b="0" dirty="0" smtClean="0">
+              <a:rPr lang="en-US" altLang="ja-JP" sz="2800" b="0" dirty="0">
                 <a:sym typeface="Symbol" pitchFamily="18" charset="2"/>
               </a:rPr>
               <a:t>,</a:t>
@@ -7987,61 +7779,61 @@
           </a:p>
           <a:p>
             <a:r>
-              <a:rPr lang="en-US" altLang="ja-JP" sz="2800" b="0" i="1" dirty="0" smtClean="0">
+              <a:rPr lang="en-US" altLang="ja-JP" sz="2800" b="0" i="1" dirty="0">
                 <a:sym typeface="Symbol" pitchFamily="18" charset="2"/>
               </a:rPr>
               <a:t></a:t>
             </a:r>
             <a:r>
-              <a:rPr lang="en-US" altLang="ja-JP" sz="2800" b="0" dirty="0" smtClean="0">
+              <a:rPr lang="en-US" altLang="ja-JP" sz="2800" b="0" dirty="0">
                 <a:sym typeface="Symbol" pitchFamily="18" charset="2"/>
               </a:rPr>
               <a:t> (</a:t>
             </a:r>
             <a:r>
-              <a:rPr lang="en-US" altLang="ja-JP" sz="2800" b="0" i="1" dirty="0" smtClean="0">
+              <a:rPr lang="en-US" altLang="ja-JP" sz="2800" b="0" i="1" dirty="0">
                 <a:sym typeface="Symbol" pitchFamily="18" charset="2"/>
               </a:rPr>
               <a:t>y</a:t>
             </a:r>
             <a:r>
-              <a:rPr lang="en-US" altLang="ja-JP" sz="2800" b="0" dirty="0" smtClean="0">
+              <a:rPr lang="en-US" altLang="ja-JP" sz="2800" b="0" dirty="0">
                 <a:sym typeface="Symbol" pitchFamily="18" charset="2"/>
               </a:rPr>
               <a:t>)  </a:t>
             </a:r>
             <a:r>
-              <a:rPr lang="ja-JP" altLang="en-US" sz="2800" dirty="0" smtClean="0">
+              <a:rPr lang="ja-JP" altLang="en-US" sz="2800" dirty="0">
                 <a:sym typeface="Symbol" pitchFamily="18" charset="2"/>
               </a:rPr>
               <a:t>  </a:t>
             </a:r>
             <a:r>
-              <a:rPr lang="en-US" altLang="ja-JP" sz="2800" b="0" dirty="0" smtClean="0">
+              <a:rPr lang="en-US" altLang="ja-JP" sz="2800" b="0" dirty="0">
                 <a:sym typeface="Symbol" pitchFamily="18" charset="2"/>
               </a:rPr>
               <a:t> if </a:t>
             </a:r>
             <a:r>
-              <a:rPr lang="en-US" altLang="ja-JP" sz="2800" b="0" i="1" dirty="0" smtClean="0">
+              <a:rPr lang="en-US" altLang="ja-JP" sz="2800" b="0" i="1" dirty="0">
                 <a:sym typeface="Symbol" pitchFamily="18" charset="2"/>
               </a:rPr>
               <a:t>y</a:t>
             </a:r>
             <a:r>
-              <a:rPr lang="en-US" altLang="ja-JP" sz="2800" b="0" dirty="0" smtClean="0">
+              <a:rPr lang="en-US" altLang="ja-JP" sz="2800" b="0" dirty="0">
                 <a:sym typeface="Symbol" pitchFamily="18" charset="2"/>
               </a:rPr>
               <a:t>  </a:t>
             </a:r>
             <a:r>
-              <a:rPr lang="en-US" altLang="ja-JP" sz="2800" b="0" i="1" dirty="0" smtClean="0">
+              <a:rPr lang="en-US" altLang="ja-JP" sz="2800" b="0" i="1" dirty="0">
                 <a:sym typeface="Symbol" pitchFamily="18" charset="2"/>
               </a:rPr>
               <a:t>x</a:t>
             </a:r>
             <a:r>
-              <a:rPr lang="en-US" altLang="ja-JP" sz="2800" b="0" dirty="0" smtClean="0">
+              <a:rPr lang="en-US" altLang="ja-JP" sz="2800" b="0" dirty="0">
                 <a:sym typeface="Symbol" pitchFamily="18" charset="2"/>
               </a:rPr>
               <a:t>                                     </a:t>
@@ -8109,61 +7901,61 @@
           <a:lstStyle/>
           <a:p>
             <a:r>
-              <a:rPr lang="en-US" altLang="ja-JP" sz="2800" dirty="0" smtClean="0">
+              <a:rPr lang="en-US" altLang="ja-JP" sz="2800" dirty="0">
                 <a:sym typeface="Symbol" pitchFamily="18" charset="2"/>
               </a:rPr>
               <a:t>(</a:t>
             </a:r>
             <a:r>
-              <a:rPr lang="ja-JP" altLang="en-US" sz="2800" i="1" dirty="0" smtClean="0">
+              <a:rPr lang="ja-JP" altLang="en-US" sz="2800" i="1" dirty="0">
                 <a:sym typeface="Symbol" pitchFamily="18" charset="2"/>
               </a:rPr>
               <a:t></a:t>
             </a:r>
             <a:r>
-              <a:rPr lang="ja-JP" altLang="en-US" sz="2800" dirty="0" smtClean="0">
+              <a:rPr lang="ja-JP" altLang="en-US" sz="2800" dirty="0">
                 <a:sym typeface="Symbol" pitchFamily="18" charset="2"/>
               </a:rPr>
               <a:t> </a:t>
             </a:r>
             <a:r>
-              <a:rPr lang="en-US" altLang="ja-JP" sz="2800" dirty="0" smtClean="0">
+              <a:rPr lang="en-US" altLang="ja-JP" sz="2800" dirty="0">
                 <a:sym typeface="Symbol" pitchFamily="18" charset="2"/>
               </a:rPr>
               <a:t>[ </a:t>
             </a:r>
             <a:r>
-              <a:rPr lang="en-US" altLang="ja-JP" sz="2800" i="1" dirty="0" smtClean="0">
+              <a:rPr lang="en-US" altLang="ja-JP" sz="2800" i="1" dirty="0">
                 <a:sym typeface="Symbol" pitchFamily="18" charset="2"/>
               </a:rPr>
               <a:t>m</a:t>
             </a:r>
             <a:r>
-              <a:rPr lang="en-US" altLang="ja-JP" sz="2800" dirty="0" smtClean="0">
+              <a:rPr lang="en-US" altLang="ja-JP" sz="2800" dirty="0">
                 <a:sym typeface="Symbol" pitchFamily="18" charset="2"/>
               </a:rPr>
               <a:t> / </a:t>
             </a:r>
             <a:r>
-              <a:rPr lang="en-US" altLang="ja-JP" sz="2800" i="1" dirty="0" smtClean="0">
+              <a:rPr lang="en-US" altLang="ja-JP" sz="2800" i="1" dirty="0">
                 <a:sym typeface="Symbol" pitchFamily="18" charset="2"/>
               </a:rPr>
               <a:t>x</a:t>
             </a:r>
             <a:r>
-              <a:rPr lang="en-US" altLang="ja-JP" sz="2800" dirty="0" smtClean="0">
+              <a:rPr lang="en-US" altLang="ja-JP" sz="2800" dirty="0">
                 <a:sym typeface="Symbol" pitchFamily="18" charset="2"/>
               </a:rPr>
               <a:t> ]) (</a:t>
             </a:r>
             <a:r>
-              <a:rPr lang="en-US" altLang="ja-JP" sz="2800" i="1" dirty="0" smtClean="0">
+              <a:rPr lang="en-US" altLang="ja-JP" sz="2800" i="1" dirty="0">
                 <a:sym typeface="Symbol" pitchFamily="18" charset="2"/>
               </a:rPr>
               <a:t>y</a:t>
             </a:r>
             <a:r>
-              <a:rPr lang="en-US" altLang="ja-JP" sz="2800" dirty="0" smtClean="0">
+              <a:rPr lang="en-US" altLang="ja-JP" sz="2800" dirty="0">
                 <a:sym typeface="Symbol" pitchFamily="18" charset="2"/>
               </a:rPr>
               <a:t>)  = </a:t>
@@ -8177,13 +7969,6 @@
   <p:clrMapOvr>
     <a:masterClrMapping/>
   </p:clrMapOvr>
-  <p:timing>
-    <p:tnLst>
-      <p:par>
-        <p:cTn xmlns:p14="http://schemas.microsoft.com/office/powerpoint/2010/main" id="1" dur="indefinite" restart="never" nodeType="tmRoot"/>
-      </p:par>
-    </p:tnLst>
-  </p:timing>
 </p:sld>
 </file>
 
@@ -8220,14 +8005,14 @@
           <a:lstStyle/>
           <a:p>
             <a:r>
-              <a:rPr lang="ja-JP" altLang="en-US" dirty="0" smtClean="0"/>
+              <a:rPr lang="ja-JP" altLang="en-US" dirty="0"/>
               <a:t>練習問題</a:t>
             </a:r>
             <a:r>
-              <a:rPr lang="en-US" altLang="ja-JP" dirty="0" smtClean="0"/>
+              <a:rPr lang="en-US" altLang="ja-JP" dirty="0"/>
               <a:t>2</a:t>
             </a:r>
-            <a:endParaRPr lang="ja-JP" altLang="en-US" dirty="0" smtClean="0"/>
+            <a:endParaRPr lang="ja-JP" altLang="en-US" dirty="0"/>
           </a:p>
         </p:txBody>
       </p:sp>
@@ -8258,34 +8043,34 @@
               <a:buNone/>
             </a:pPr>
             <a:r>
-              <a:rPr lang="ja-JP" altLang="en-US" sz="2800" dirty="0" smtClean="0"/>
+              <a:rPr lang="ja-JP" altLang="en-US" sz="2800" dirty="0"/>
               <a:t>状態 </a:t>
             </a:r>
             <a:r>
-              <a:rPr lang="ja-JP" altLang="en-US" sz="2800" i="1" dirty="0" smtClean="0">
+              <a:rPr lang="ja-JP" altLang="en-US" sz="2800" i="1" dirty="0">
                 <a:sym typeface="Symbol" pitchFamily="18" charset="2"/>
               </a:rPr>
               <a:t></a:t>
             </a:r>
             <a:r>
-              <a:rPr lang="ja-JP" altLang="en-US" sz="2800" dirty="0" smtClean="0">
+              <a:rPr lang="ja-JP" altLang="en-US" sz="2800" dirty="0">
                 <a:sym typeface="Symbol" pitchFamily="18" charset="2"/>
               </a:rPr>
               <a:t> </a:t>
             </a:r>
             <a:r>
-              <a:rPr lang="en-US" altLang="ja-JP" sz="2800" dirty="0" smtClean="0">
+              <a:rPr lang="en-US" altLang="ja-JP" sz="2800" dirty="0">
                 <a:sym typeface="Symbol" pitchFamily="18" charset="2"/>
               </a:rPr>
               <a:t>= { (X, 10), (Y, 20), (Z, 30) } </a:t>
             </a:r>
             <a:r>
-              <a:rPr lang="ja-JP" altLang="en-US" sz="2800" dirty="0" smtClean="0">
+              <a:rPr lang="ja-JP" altLang="en-US" sz="2800" dirty="0">
                 <a:sym typeface="Symbol" pitchFamily="18" charset="2"/>
               </a:rPr>
               <a:t>のとき、</a:t>
             </a:r>
-            <a:endParaRPr lang="en-US" altLang="ja-JP" sz="2800" dirty="0" smtClean="0">
+            <a:endParaRPr lang="en-US" altLang="ja-JP" sz="2800" dirty="0">
               <a:sym typeface="Symbol" pitchFamily="18" charset="2"/>
             </a:endParaRPr>
           </a:p>
@@ -8295,36 +8080,36 @@
               <a:buNone/>
             </a:pPr>
             <a:r>
-              <a:rPr lang="en-US" altLang="ja-JP" sz="2800" dirty="0" smtClean="0">
+              <a:rPr lang="en-US" altLang="ja-JP" sz="2800" dirty="0">
                 <a:sym typeface="Symbol" pitchFamily="18" charset="2"/>
               </a:rPr>
               <a:t> </a:t>
             </a:r>
             <a:r>
-              <a:rPr lang="ja-JP" altLang="en-US" sz="2800" i="1" dirty="0" smtClean="0">
+              <a:rPr lang="ja-JP" altLang="en-US" sz="2800" i="1" dirty="0">
                 <a:sym typeface="Symbol" pitchFamily="18" charset="2"/>
               </a:rPr>
               <a:t></a:t>
             </a:r>
             <a:r>
-              <a:rPr lang="ja-JP" altLang="en-US" sz="2800" dirty="0" smtClean="0">
+              <a:rPr lang="ja-JP" altLang="en-US" sz="2800" dirty="0">
                 <a:sym typeface="Symbol" pitchFamily="18" charset="2"/>
               </a:rPr>
               <a:t> </a:t>
             </a:r>
             <a:r>
-              <a:rPr lang="en-US" altLang="ja-JP" sz="2800" dirty="0" smtClean="0">
+              <a:rPr lang="en-US" altLang="ja-JP" sz="2800" dirty="0">
                 <a:sym typeface="Symbol" pitchFamily="18" charset="2"/>
               </a:rPr>
               <a:t>[ 40 / X ] </a:t>
             </a:r>
             <a:r>
-              <a:rPr lang="ja-JP" altLang="en-US" sz="2800" dirty="0" smtClean="0">
+              <a:rPr lang="ja-JP" altLang="en-US" sz="2800" dirty="0">
                 <a:sym typeface="Symbol" pitchFamily="18" charset="2"/>
               </a:rPr>
               <a:t> はどういう状態か。</a:t>
             </a:r>
-            <a:endParaRPr lang="en-US" altLang="ja-JP" sz="2800" dirty="0" smtClean="0"/>
+            <a:endParaRPr lang="en-US" altLang="ja-JP" sz="2800" dirty="0"/>
           </a:p>
         </p:txBody>
       </p:sp>
@@ -8333,13 +8118,6 @@
   <p:clrMapOvr>
     <a:masterClrMapping/>
   </p:clrMapOvr>
-  <p:timing>
-    <p:tnLst>
-      <p:par>
-        <p:cTn xmlns:p14="http://schemas.microsoft.com/office/powerpoint/2010/main" id="1" dur="indefinite" restart="never" nodeType="tmRoot"/>
-      </p:par>
-    </p:tnLst>
-  </p:timing>
 </p:sld>
 </file>
 
@@ -8377,7 +8155,7 @@
           <a:p>
             <a:pPr eaLnBrk="1" hangingPunct="1"/>
             <a:r>
-              <a:rPr lang="ja-JP" altLang="en-US" smtClean="0"/>
+              <a:rPr lang="ja-JP" altLang="en-US"/>
               <a:t>文の定義</a:t>
             </a:r>
           </a:p>
@@ -8415,31 +8193,23 @@
           <a:p>
             <a:r>
               <a:rPr lang="ja-JP" altLang="en-US" sz="2800" b="0" dirty="0"/>
-              <a:t>文を、代入</a:t>
-            </a:r>
-            <a:r>
-              <a:rPr lang="ja-JP" altLang="en-US" sz="2800" b="0" dirty="0" smtClean="0"/>
+              <a:t>文を、代入文</a:t>
+            </a:r>
+            <a:r>
+              <a:rPr lang="ja-JP" altLang="en-US" sz="2800" dirty="0"/>
+              <a:t>あるいは</a:t>
+            </a:r>
+            <a:r>
+              <a:rPr lang="en-US" altLang="ja-JP" sz="2800" dirty="0"/>
+              <a:t>while</a:t>
+            </a:r>
+            <a:r>
+              <a:rPr lang="ja-JP" altLang="en-US" sz="2800" dirty="0"/>
               <a:t>文</a:t>
             </a:r>
             <a:r>
-              <a:rPr lang="ja-JP" altLang="en-US" sz="2800" dirty="0" smtClean="0"/>
-              <a:t>あるいは</a:t>
-            </a:r>
-            <a:r>
-              <a:rPr lang="en-US" altLang="ja-JP" sz="2800" dirty="0" smtClean="0"/>
-              <a:t>while</a:t>
-            </a:r>
-            <a:r>
-              <a:rPr lang="ja-JP" altLang="en-US" sz="2800" dirty="0" smtClean="0"/>
-              <a:t>文</a:t>
-            </a:r>
-            <a:r>
-              <a:rPr lang="ja-JP" altLang="en-US" sz="2800" b="0" dirty="0" smtClean="0"/>
-              <a:t>の</a:t>
-            </a:r>
-            <a:r>
               <a:rPr lang="ja-JP" altLang="en-US" sz="2800" b="0" dirty="0"/>
-              <a:t>並びで定義する。</a:t>
+              <a:t>の並びで定義する。</a:t>
             </a:r>
             <a:endParaRPr lang="en-US" altLang="ja-JP" sz="2800" b="0" dirty="0"/>
           </a:p>
@@ -8499,76 +8269,76 @@
               <a:t>文</a:t>
             </a:r>
             <a:r>
-              <a:rPr lang="en-US" altLang="ja-JP" sz="2800" dirty="0" smtClean="0"/>
+              <a:rPr lang="en-US" altLang="ja-JP" sz="2800" dirty="0"/>
               <a:t>&gt;</a:t>
             </a:r>
           </a:p>
           <a:p>
             <a:r>
-              <a:rPr lang="en-US" altLang="ja-JP" sz="2800" dirty="0" smtClean="0"/>
+              <a:rPr lang="en-US" altLang="ja-JP" sz="2800" dirty="0"/>
               <a:t>                |  </a:t>
             </a:r>
             <a:r>
-              <a:rPr lang="ja-JP" altLang="en-US" sz="2800" dirty="0" smtClean="0"/>
+              <a:rPr lang="ja-JP" altLang="en-US" sz="2800" dirty="0"/>
               <a:t> </a:t>
             </a:r>
             <a:r>
-              <a:rPr lang="en-US" altLang="ja-JP" sz="2800" dirty="0" smtClean="0"/>
+              <a:rPr lang="en-US" altLang="ja-JP" sz="2800" dirty="0"/>
               <a:t>while (&lt;</a:t>
             </a:r>
             <a:r>
-              <a:rPr lang="ja-JP" altLang="en-US" sz="2800" dirty="0" smtClean="0"/>
+              <a:rPr lang="ja-JP" altLang="en-US" sz="2800" dirty="0"/>
               <a:t>式</a:t>
             </a:r>
             <a:r>
-              <a:rPr lang="en-US" altLang="ja-JP" sz="2800" dirty="0" smtClean="0"/>
+              <a:rPr lang="en-US" altLang="ja-JP" sz="2800" dirty="0"/>
               <a:t>&gt;) { &lt;</a:t>
             </a:r>
             <a:r>
-              <a:rPr lang="ja-JP" altLang="en-US" sz="2800" dirty="0" smtClean="0"/>
+              <a:rPr lang="ja-JP" altLang="en-US" sz="2800" dirty="0"/>
               <a:t>文</a:t>
             </a:r>
             <a:r>
-              <a:rPr lang="en-US" altLang="ja-JP" sz="2800" dirty="0" smtClean="0"/>
+              <a:rPr lang="en-US" altLang="ja-JP" sz="2800" dirty="0"/>
               <a:t>&gt; }</a:t>
             </a:r>
-            <a:endParaRPr lang="en-US" altLang="ja-JP" sz="2800" b="0" dirty="0" smtClean="0"/>
-          </a:p>
-          <a:p>
-            <a:r>
-              <a:rPr lang="ja-JP" altLang="en-US" sz="2800" dirty="0" smtClean="0"/>
+            <a:endParaRPr lang="en-US" altLang="ja-JP" sz="2800" b="0" dirty="0"/>
+          </a:p>
+          <a:p>
+            <a:r>
+              <a:rPr lang="ja-JP" altLang="en-US" sz="2800" dirty="0"/>
               <a:t>文を表すためのメタ変数として</a:t>
             </a:r>
             <a:r>
-              <a:rPr lang="en-US" altLang="ja-JP" sz="2800" i="1" dirty="0" smtClean="0"/>
+              <a:rPr lang="en-US" altLang="ja-JP" sz="2800" i="1" dirty="0"/>
               <a:t>c</a:t>
             </a:r>
             <a:r>
-              <a:rPr lang="en-US" altLang="ja-JP" sz="2800" dirty="0" smtClean="0"/>
+              <a:rPr lang="en-US" altLang="ja-JP" sz="2800" dirty="0"/>
               <a:t>, </a:t>
             </a:r>
             <a:r>
-              <a:rPr lang="en-US" altLang="ja-JP" sz="2800" i="1" dirty="0" smtClean="0"/>
+              <a:rPr lang="en-US" altLang="ja-JP" sz="2800" i="1" dirty="0"/>
               <a:t>c</a:t>
             </a:r>
             <a:r>
-              <a:rPr lang="en-US" altLang="ja-JP" sz="2800" baseline="-25000" dirty="0" smtClean="0"/>
+              <a:rPr lang="en-US" altLang="ja-JP" sz="2800" baseline="-25000" dirty="0"/>
               <a:t>1</a:t>
             </a:r>
             <a:r>
-              <a:rPr lang="en-US" altLang="ja-JP" sz="2800" dirty="0" smtClean="0"/>
+              <a:rPr lang="en-US" altLang="ja-JP" sz="2800" dirty="0"/>
               <a:t>, </a:t>
             </a:r>
             <a:r>
-              <a:rPr lang="en-US" altLang="ja-JP" sz="2800" i="1" dirty="0" smtClean="0"/>
+              <a:rPr lang="en-US" altLang="ja-JP" sz="2800" i="1" dirty="0"/>
               <a:t>c</a:t>
             </a:r>
             <a:r>
-              <a:rPr lang="en-US" altLang="ja-JP" sz="2800" baseline="-25000" dirty="0" smtClean="0"/>
+              <a:rPr lang="en-US" altLang="ja-JP" sz="2800" baseline="-25000" dirty="0"/>
               <a:t>2</a:t>
             </a:r>
             <a:r>
-              <a:rPr lang="ja-JP" altLang="en-US" sz="2800" dirty="0" smtClean="0"/>
+              <a:rPr lang="ja-JP" altLang="en-US" sz="2800" dirty="0"/>
               <a:t>等を用いる。</a:t>
             </a:r>
             <a:endParaRPr lang="en-US" altLang="ja-JP" sz="2800" b="0" dirty="0"/>
@@ -8598,31 +8368,31 @@
           <a:lstStyle/>
           <a:p>
             <a:r>
-              <a:rPr kumimoji="1" lang="ja-JP" altLang="en-US" sz="2800" dirty="0" smtClean="0"/>
+              <a:rPr kumimoji="1" lang="ja-JP" altLang="en-US" sz="2800" dirty="0"/>
               <a:t>（注）</a:t>
             </a:r>
             <a:r>
-              <a:rPr kumimoji="1" lang="en-US" altLang="ja-JP" sz="2800" dirty="0" smtClean="0"/>
+              <a:rPr kumimoji="1" lang="en-US" altLang="ja-JP" sz="2800" dirty="0"/>
               <a:t>C</a:t>
             </a:r>
             <a:r>
-              <a:rPr kumimoji="1" lang="ja-JP" altLang="en-US" sz="2800" dirty="0" smtClean="0"/>
+              <a:rPr kumimoji="1" lang="ja-JP" altLang="en-US" sz="2800" dirty="0"/>
               <a:t>言語では、</a:t>
             </a:r>
             <a:r>
-              <a:rPr kumimoji="1" lang="en-US" altLang="ja-JP" sz="2800" dirty="0" smtClean="0"/>
+              <a:rPr kumimoji="1" lang="en-US" altLang="ja-JP" sz="2800" dirty="0"/>
               <a:t>while</a:t>
             </a:r>
             <a:r>
-              <a:rPr lang="ja-JP" altLang="en-US" sz="2800" dirty="0" smtClean="0"/>
+              <a:rPr lang="ja-JP" altLang="en-US" sz="2800" dirty="0"/>
               <a:t>文の本体が</a:t>
             </a:r>
             <a:r>
-              <a:rPr lang="en-US" altLang="ja-JP" sz="2800" dirty="0" smtClean="0"/>
+              <a:rPr lang="en-US" altLang="ja-JP" sz="2800" dirty="0"/>
               <a:t>1</a:t>
             </a:r>
             <a:r>
-              <a:rPr lang="ja-JP" altLang="en-US" sz="2800" dirty="0" smtClean="0"/>
+              <a:rPr lang="ja-JP" altLang="en-US" sz="2800" dirty="0"/>
               <a:t>つの文の場合は中括弧は必要ではないが、上記文法定義においては文の並びも文と定義しているので、中括弧を必ず書くこととしている。</a:t>
             </a:r>
             <a:endParaRPr kumimoji="1" lang="ja-JP" altLang="en-US" sz="2800" dirty="0"/>
@@ -8634,13 +8404,6 @@
   <p:clrMapOvr>
     <a:masterClrMapping/>
   </p:clrMapOvr>
-  <p:timing>
-    <p:tnLst>
-      <p:par>
-        <p:cTn xmlns:p14="http://schemas.microsoft.com/office/powerpoint/2010/main" id="1" dur="indefinite" restart="never" nodeType="tmRoot"/>
-      </p:par>
-    </p:tnLst>
-  </p:timing>
 </p:sld>
 </file>
 
@@ -8677,7 +8440,7 @@
           <a:lstStyle/>
           <a:p>
             <a:r>
-              <a:rPr lang="ja-JP" altLang="en-US" smtClean="0"/>
+              <a:rPr lang="ja-JP" altLang="en-US"/>
               <a:t>文の実行</a:t>
             </a:r>
           </a:p>
@@ -8722,28 +8485,22 @@
               <a:t>状態</a:t>
             </a:r>
             <a:r>
-              <a:rPr lang="ja-JP" altLang="en-US" sz="2800" b="0" i="1" dirty="0" smtClean="0">
+              <a:rPr lang="ja-JP" altLang="en-US" sz="2800" b="0" i="1" dirty="0">
                 <a:sym typeface="Symbol" pitchFamily="18" charset="2"/>
               </a:rPr>
               <a:t></a:t>
             </a:r>
             <a:r>
-              <a:rPr lang="en-US" altLang="ja-JP" sz="2800" baseline="-25000" dirty="0" smtClean="0">
+              <a:rPr lang="en-US" altLang="ja-JP" sz="2800" baseline="-25000" dirty="0">
                 <a:sym typeface="Symbol" pitchFamily="18" charset="2"/>
               </a:rPr>
               <a:t>1</a:t>
             </a:r>
             <a:r>
-              <a:rPr lang="ja-JP" altLang="en-US" sz="2800" b="0" dirty="0" smtClean="0">
-                <a:sym typeface="Symbol" pitchFamily="18" charset="2"/>
-              </a:rPr>
-              <a:t>の</a:t>
-            </a:r>
-            <a:r>
               <a:rPr lang="ja-JP" altLang="en-US" sz="2800" b="0" dirty="0">
                 <a:sym typeface="Symbol" pitchFamily="18" charset="2"/>
               </a:rPr>
-              <a:t>もとで文</a:t>
+              <a:t>のもとで文</a:t>
             </a:r>
             <a:r>
               <a:rPr lang="en-US" altLang="ja-JP" sz="2800" b="0" i="1" dirty="0">
@@ -8758,28 +8515,22 @@
               <a:t>を実行したら状態が</a:t>
             </a:r>
             <a:r>
-              <a:rPr lang="en-US" altLang="ja-JP" sz="2800" b="0" i="1" dirty="0" smtClean="0">
+              <a:rPr lang="en-US" altLang="ja-JP" sz="2800" b="0" i="1" dirty="0">
                 <a:sym typeface="Symbol" pitchFamily="18" charset="2"/>
               </a:rPr>
               <a:t></a:t>
             </a:r>
             <a:r>
-              <a:rPr lang="en-US" altLang="ja-JP" sz="2800" baseline="-25000" dirty="0" smtClean="0">
+              <a:rPr lang="en-US" altLang="ja-JP" sz="2800" baseline="-25000" dirty="0">
                 <a:sym typeface="Symbol" pitchFamily="18" charset="2"/>
               </a:rPr>
               <a:t>2</a:t>
             </a:r>
             <a:r>
-              <a:rPr lang="ja-JP" altLang="en-US" sz="2800" b="0" dirty="0" smtClean="0">
-                <a:sym typeface="Symbol" pitchFamily="18" charset="2"/>
-              </a:rPr>
-              <a:t>に</a:t>
-            </a:r>
-            <a:r>
               <a:rPr lang="ja-JP" altLang="en-US" sz="2800" b="0" dirty="0">
                 <a:sym typeface="Symbol" pitchFamily="18" charset="2"/>
               </a:rPr>
-              <a:t>なる</a:t>
+              <a:t>になる</a:t>
             </a:r>
             <a:endParaRPr lang="en-US" altLang="ja-JP" sz="2800" b="0" dirty="0">
               <a:sym typeface="Symbol" pitchFamily="18" charset="2"/>
@@ -8801,16 +8552,10 @@
               <a:rPr lang="en-US" altLang="ja-JP" sz="2800" b="0" dirty="0">
                 <a:sym typeface="Symbol" pitchFamily="18" charset="2"/>
               </a:rPr>
-              <a:t>     </a:t>
-            </a:r>
-            <a:r>
-              <a:rPr lang="en-US" altLang="ja-JP" sz="2800" b="0" dirty="0" smtClean="0">
-                <a:sym typeface="Symbol" pitchFamily="18" charset="2"/>
-              </a:rPr>
-              <a:t>&lt; </a:t>
-            </a:r>
-            <a:r>
-              <a:rPr lang="en-US" altLang="ja-JP" sz="2800" b="0" i="1" dirty="0" smtClean="0">
+              <a:t>     &lt; </a:t>
+            </a:r>
+            <a:r>
+              <a:rPr lang="en-US" altLang="ja-JP" sz="2800" b="0" i="1" dirty="0">
                 <a:sym typeface="Symbol" pitchFamily="18" charset="2"/>
               </a:rPr>
               <a:t>c</a:t>
@@ -8822,19 +8567,19 @@
               <a:t>, </a:t>
             </a:r>
             <a:r>
-              <a:rPr lang="en-US" altLang="ja-JP" sz="2800" b="0" i="1" dirty="0" smtClean="0">
+              <a:rPr lang="en-US" altLang="ja-JP" sz="2800" b="0" i="1" dirty="0">
                 <a:sym typeface="Symbol" pitchFamily="18" charset="2"/>
               </a:rPr>
               <a:t></a:t>
             </a:r>
             <a:r>
-              <a:rPr lang="en-US" altLang="ja-JP" sz="2800" baseline="-25000" dirty="0" smtClean="0">
+              <a:rPr lang="en-US" altLang="ja-JP" sz="2800" baseline="-25000" dirty="0">
                 <a:sym typeface="Symbol" pitchFamily="18" charset="2"/>
               </a:rPr>
               <a:t>1</a:t>
             </a:r>
             <a:r>
-              <a:rPr lang="en-US" altLang="ja-JP" sz="2800" b="0" i="1" dirty="0" smtClean="0">
+              <a:rPr lang="en-US" altLang="ja-JP" sz="2800" b="0" i="1" dirty="0">
                 <a:sym typeface="Symbol" pitchFamily="18" charset="2"/>
               </a:rPr>
               <a:t> </a:t>
@@ -8846,13 +8591,13 @@
               <a:t>&gt;  </a:t>
             </a:r>
             <a:r>
-              <a:rPr lang="en-US" altLang="ja-JP" sz="2800" b="0" i="1" dirty="0" smtClean="0">
+              <a:rPr lang="en-US" altLang="ja-JP" sz="2800" b="0" i="1" dirty="0">
                 <a:sym typeface="Symbol" pitchFamily="18" charset="2"/>
               </a:rPr>
               <a:t></a:t>
             </a:r>
             <a:r>
-              <a:rPr lang="en-US" altLang="ja-JP" sz="2800" baseline="-25000" dirty="0" smtClean="0">
+              <a:rPr lang="en-US" altLang="ja-JP" sz="2800" baseline="-25000" dirty="0">
                 <a:sym typeface="Symbol" pitchFamily="18" charset="2"/>
               </a:rPr>
               <a:t>2</a:t>
@@ -8983,12 +8728,8 @@
               <a:t> </a:t>
             </a:r>
             <a:r>
-              <a:rPr lang="en-US" altLang="ja-JP" sz="2800" b="0" dirty="0" smtClean="0"/>
-              <a:t>{ </a:t>
-            </a:r>
-            <a:r>
               <a:rPr lang="en-US" altLang="ja-JP" sz="2800" b="0" dirty="0"/>
-              <a:t>(X, 10), (Y, 40), (Z, 30) } </a:t>
+              <a:t>{ (X, 10), (Y, 40), (Z, 30) } </a:t>
             </a:r>
           </a:p>
           <a:p>
@@ -9005,13 +8746,6 @@
   <p:clrMapOvr>
     <a:masterClrMapping/>
   </p:clrMapOvr>
-  <p:timing>
-    <p:tnLst>
-      <p:par>
-        <p:cTn xmlns:p14="http://schemas.microsoft.com/office/powerpoint/2010/main" id="1" dur="indefinite" restart="never" nodeType="tmRoot"/>
-      </p:par>
-    </p:tnLst>
-  </p:timing>
 </p:sld>
 </file>
 
@@ -9048,7 +8782,7 @@
           <a:lstStyle/>
           <a:p>
             <a:r>
-              <a:rPr lang="ja-JP" altLang="en-US" smtClean="0"/>
+              <a:rPr lang="ja-JP" altLang="en-US"/>
               <a:t>文の実行に関する規則</a:t>
             </a:r>
           </a:p>
@@ -9121,7 +8855,7 @@
               <a:t> &gt;  </a:t>
             </a:r>
             <a:r>
-              <a:rPr lang="en-US" altLang="ja-JP" sz="2800" b="0" i="1" dirty="0" smtClean="0">
+              <a:rPr lang="en-US" altLang="ja-JP" sz="2800" b="0" i="1" dirty="0">
                 <a:sym typeface="Symbol" pitchFamily="18" charset="2"/>
               </a:rPr>
               <a:t>m</a:t>
@@ -9180,16 +8914,10 @@
               <a:t> </a:t>
             </a:r>
             <a:r>
-              <a:rPr lang="en-US" altLang="ja-JP" sz="2800" b="0" i="1" dirty="0" smtClean="0">
-                <a:sym typeface="Symbol" pitchFamily="18" charset="2"/>
-              </a:rPr>
-              <a:t>m </a:t>
-            </a:r>
-            <a:r>
               <a:rPr lang="en-US" altLang="ja-JP" sz="2800" b="0" i="1" dirty="0">
                 <a:sym typeface="Symbol" pitchFamily="18" charset="2"/>
               </a:rPr>
-              <a:t>/ x </a:t>
+              <a:t>m / x </a:t>
             </a:r>
             <a:r>
               <a:rPr lang="en-US" altLang="ja-JP" sz="2800" b="0" dirty="0">
@@ -9345,19 +9073,19 @@
               <a:t>  </a:t>
             </a:r>
             <a:r>
-              <a:rPr lang="en-US" altLang="ja-JP" sz="2800" b="0" dirty="0" smtClean="0">
+              <a:rPr lang="en-US" altLang="ja-JP" sz="2800" b="0" dirty="0">
                 <a:sym typeface="Symbol" pitchFamily="18" charset="2"/>
               </a:rPr>
               <a:t>&lt; </a:t>
             </a:r>
             <a:r>
-              <a:rPr lang="en-US" altLang="ja-JP" sz="2800" b="0" i="1" dirty="0" smtClean="0">
+              <a:rPr lang="en-US" altLang="ja-JP" sz="2800" b="0" i="1" dirty="0">
                 <a:sym typeface="Symbol" pitchFamily="18" charset="2"/>
               </a:rPr>
               <a:t>c</a:t>
             </a:r>
             <a:r>
-              <a:rPr lang="en-US" altLang="ja-JP" sz="2800" b="0" baseline="-25000" dirty="0" smtClean="0">
+              <a:rPr lang="en-US" altLang="ja-JP" sz="2800" b="0" baseline="-25000" dirty="0">
                 <a:sym typeface="Symbol" pitchFamily="18" charset="2"/>
               </a:rPr>
               <a:t>1</a:t>
@@ -9396,22 +9124,16 @@
               <a:rPr lang="en-US" altLang="ja-JP" sz="2800" b="0" dirty="0">
                 <a:sym typeface="Symbol" pitchFamily="18" charset="2"/>
               </a:rPr>
-              <a:t>   </a:t>
-            </a:r>
-            <a:r>
-              <a:rPr lang="en-US" altLang="ja-JP" sz="2800" b="0" dirty="0" smtClean="0">
-                <a:sym typeface="Symbol" pitchFamily="18" charset="2"/>
-              </a:rPr>
-              <a:t>&lt; </a:t>
-            </a:r>
-            <a:r>
-              <a:rPr lang="en-US" altLang="ja-JP" sz="2800" b="0" i="1" dirty="0" smtClean="0">
+              <a:t>   &lt; </a:t>
+            </a:r>
+            <a:r>
+              <a:rPr lang="en-US" altLang="ja-JP" sz="2800" b="0" i="1" dirty="0">
                 <a:sym typeface="Symbol" pitchFamily="18" charset="2"/>
               </a:rPr>
               <a:t>c</a:t>
             </a:r>
             <a:r>
-              <a:rPr lang="en-US" altLang="ja-JP" sz="2800" b="0" baseline="-25000" dirty="0" smtClean="0">
+              <a:rPr lang="en-US" altLang="ja-JP" sz="2800" b="0" baseline="-25000" dirty="0">
                 <a:sym typeface="Symbol" pitchFamily="18" charset="2"/>
               </a:rPr>
               <a:t>2</a:t>
@@ -9429,22 +9151,16 @@
               <a:t></a:t>
             </a:r>
             <a:r>
-              <a:rPr lang="en-US" altLang="ja-JP" sz="2800" b="0" baseline="-25000" dirty="0" smtClean="0">
+              <a:rPr lang="en-US" altLang="ja-JP" sz="2800" b="0" baseline="-25000" dirty="0">
                 <a:sym typeface="Symbol" pitchFamily="18" charset="2"/>
               </a:rPr>
               <a:t>1 </a:t>
             </a:r>
             <a:r>
-              <a:rPr lang="en-US" altLang="ja-JP" sz="2800" b="0" dirty="0" smtClean="0">
-                <a:sym typeface="Symbol" pitchFamily="18" charset="2"/>
-              </a:rPr>
-              <a:t>&gt; </a:t>
-            </a:r>
-            <a:r>
               <a:rPr lang="en-US" altLang="ja-JP" sz="2800" b="0" dirty="0">
                 <a:sym typeface="Symbol" pitchFamily="18" charset="2"/>
               </a:rPr>
-              <a:t> </a:t>
+              <a:t>&gt;  </a:t>
             </a:r>
             <a:r>
               <a:rPr lang="en-US" altLang="ja-JP" sz="2800" b="0" i="1" dirty="0">
@@ -9568,13 +9284,6 @@
   <p:clrMapOvr>
     <a:masterClrMapping/>
   </p:clrMapOvr>
-  <p:timing>
-    <p:tnLst>
-      <p:par>
-        <p:cTn xmlns:p14="http://schemas.microsoft.com/office/powerpoint/2010/main" id="1" dur="indefinite" restart="never" nodeType="tmRoot"/>
-      </p:par>
-    </p:tnLst>
-  </p:timing>
 </p:sld>
 </file>
 
@@ -9611,7 +9320,7 @@
           <a:lstStyle/>
           <a:p>
             <a:r>
-              <a:rPr lang="ja-JP" altLang="en-US" smtClean="0"/>
+              <a:rPr lang="ja-JP" altLang="en-US"/>
               <a:t>例１</a:t>
             </a:r>
           </a:p>
@@ -9851,7 +9560,7 @@
           <a:lstStyle/>
           <a:p>
             <a:r>
-              <a:rPr lang="en-US" altLang="ja-JP" sz="2800" b="0" dirty="0" smtClean="0">
+              <a:rPr lang="en-US" altLang="ja-JP" sz="2800" b="0" dirty="0">
                 <a:sym typeface="Symbol" pitchFamily="18" charset="2"/>
               </a:rPr>
               <a:t> </a:t>
@@ -9913,13 +9622,6 @@
   <p:clrMapOvr>
     <a:masterClrMapping/>
   </p:clrMapOvr>
-  <p:timing>
-    <p:tnLst>
-      <p:par>
-        <p:cTn xmlns:p14="http://schemas.microsoft.com/office/powerpoint/2010/main" id="1" dur="indefinite" restart="never" nodeType="tmRoot"/>
-      </p:par>
-    </p:tnLst>
-  </p:timing>
 </p:sld>
 </file>
 
@@ -9957,7 +9659,7 @@
           <a:p>
             <a:pPr eaLnBrk="1" hangingPunct="1"/>
             <a:r>
-              <a:rPr lang="ja-JP" altLang="en-US" dirty="0" smtClean="0"/>
+              <a:rPr lang="ja-JP" altLang="en-US" dirty="0"/>
               <a:t>今日の内容</a:t>
             </a:r>
           </a:p>
@@ -9986,54 +9688,54 @@
           <a:lstStyle/>
           <a:p>
             <a:r>
-              <a:rPr lang="en-US" altLang="ja-JP" sz="2800" dirty="0" smtClean="0"/>
+              <a:rPr lang="en-US" altLang="ja-JP" sz="2800" dirty="0"/>
               <a:t>C</a:t>
             </a:r>
             <a:r>
-              <a:rPr lang="ja-JP" altLang="en-US" sz="2800" dirty="0" smtClean="0"/>
+              <a:rPr lang="ja-JP" altLang="en-US" sz="2800" dirty="0"/>
               <a:t>言語の非常に小さい</a:t>
             </a:r>
             <a:r>
-              <a:rPr lang="en-US" altLang="ja-JP" sz="2800" dirty="0" smtClean="0"/>
+              <a:rPr lang="en-US" altLang="ja-JP" sz="2800" dirty="0"/>
               <a:t>subset</a:t>
             </a:r>
             <a:r>
-              <a:rPr lang="ja-JP" altLang="en-US" sz="2800" dirty="0" smtClean="0"/>
+              <a:rPr lang="ja-JP" altLang="en-US" sz="2800" dirty="0"/>
               <a:t>の意味を操作的意味論（</a:t>
             </a:r>
             <a:r>
-              <a:rPr lang="en-US" altLang="ja-JP" sz="2800" dirty="0" smtClean="0"/>
+              <a:rPr lang="en-US" altLang="ja-JP" sz="2800" dirty="0"/>
               <a:t>operational semantics</a:t>
             </a:r>
             <a:r>
-              <a:rPr lang="ja-JP" altLang="en-US" sz="2800" dirty="0" smtClean="0"/>
+              <a:rPr lang="ja-JP" altLang="en-US" sz="2800" dirty="0"/>
               <a:t>）で定義する。 </a:t>
             </a:r>
-            <a:endParaRPr lang="en-US" altLang="ja-JP" sz="2800" dirty="0" smtClean="0"/>
+            <a:endParaRPr lang="en-US" altLang="ja-JP" sz="2800" dirty="0"/>
           </a:p>
           <a:p>
             <a:pPr lvl="1"/>
             <a:r>
-              <a:rPr lang="ja-JP" altLang="en-US" dirty="0" smtClean="0"/>
+              <a:rPr lang="ja-JP" altLang="en-US" dirty="0"/>
               <a:t>操作的意味論の中の、自然意味論（</a:t>
             </a:r>
             <a:r>
-              <a:rPr lang="en-US" altLang="ja-JP" dirty="0" smtClean="0"/>
+              <a:rPr lang="en-US" altLang="ja-JP" dirty="0"/>
               <a:t>Natural Semantics</a:t>
             </a:r>
             <a:r>
-              <a:rPr lang="ja-JP" altLang="en-US" dirty="0" smtClean="0"/>
+              <a:rPr lang="ja-JP" altLang="en-US" dirty="0"/>
               <a:t>）あるいは構造的な操作的意味論</a:t>
             </a:r>
             <a:r>
-              <a:rPr lang="en-US" altLang="ja-JP" dirty="0" smtClean="0"/>
+              <a:rPr lang="en-US" altLang="ja-JP" dirty="0"/>
               <a:t>(Structural operational semantics</a:t>
             </a:r>
             <a:r>
-              <a:rPr lang="ja-JP" altLang="en-US" dirty="0" smtClean="0"/>
+              <a:rPr lang="ja-JP" altLang="en-US" dirty="0"/>
               <a:t>）と呼ばれる意味論で定義する。</a:t>
             </a:r>
-            <a:endParaRPr lang="en-US" altLang="ja-JP" dirty="0" smtClean="0"/>
+            <a:endParaRPr lang="en-US" altLang="ja-JP" dirty="0"/>
           </a:p>
         </p:txBody>
       </p:sp>
@@ -10042,13 +9744,6 @@
   <p:clrMapOvr>
     <a:masterClrMapping/>
   </p:clrMapOvr>
-  <p:timing>
-    <p:tnLst>
-      <p:par>
-        <p:cTn xmlns:p14="http://schemas.microsoft.com/office/powerpoint/2010/main" id="1" dur="indefinite" restart="never" nodeType="tmRoot"/>
-      </p:par>
-    </p:tnLst>
-  </p:timing>
 </p:sld>
 </file>
 
@@ -10085,7 +9780,7 @@
           <a:lstStyle/>
           <a:p>
             <a:r>
-              <a:rPr lang="ja-JP" altLang="en-US" smtClean="0"/>
+              <a:rPr lang="ja-JP" altLang="en-US"/>
               <a:t>例２</a:t>
             </a:r>
           </a:p>
@@ -10126,30 +9821,20 @@
               <a:t>               </a:t>
             </a:r>
             <a:r>
-              <a:rPr lang="en-US" altLang="ja-JP" sz="2800" b="0" dirty="0" smtClean="0"/>
-              <a:t>&lt; </a:t>
-            </a:r>
-            <a:r>
               <a:rPr lang="en-US" altLang="ja-JP" sz="2800" b="0" dirty="0"/>
-              <a:t>40, </a:t>
-            </a:r>
-            <a:r>
-              <a:rPr lang="en-US" altLang="ja-JP" sz="2800" b="0" i="1" dirty="0" smtClean="0">
+              <a:t>&lt; 40, </a:t>
+            </a:r>
+            <a:r>
+              <a:rPr lang="en-US" altLang="ja-JP" sz="2800" b="0" i="1" dirty="0">
                 <a:sym typeface="Symbol" pitchFamily="18" charset="2"/>
               </a:rPr>
               <a:t></a:t>
             </a:r>
             <a:r>
-              <a:rPr lang="en-US" altLang="ja-JP" sz="2800" b="0" dirty="0" smtClean="0">
-                <a:sym typeface="Symbol" pitchFamily="18" charset="2"/>
-              </a:rPr>
-              <a:t> [3 / X] </a:t>
-            </a:r>
-            <a:r>
               <a:rPr lang="en-US" altLang="ja-JP" sz="2800" b="0" dirty="0">
                 <a:sym typeface="Symbol" pitchFamily="18" charset="2"/>
               </a:rPr>
-              <a:t>&gt;  40</a:t>
+              <a:t> [3 / X] &gt;  40</a:t>
             </a:r>
             <a:endParaRPr lang="en-US" altLang="ja-JP" sz="2400" b="0" dirty="0"/>
           </a:p>
@@ -10356,12 +10041,8 @@
           <a:lstStyle/>
           <a:p>
             <a:r>
-              <a:rPr lang="en-US" altLang="ja-JP" sz="2800" b="0" dirty="0" smtClean="0"/>
-              <a:t>{ </a:t>
-            </a:r>
-            <a:r>
               <a:rPr lang="en-US" altLang="ja-JP" sz="2800" b="0" dirty="0"/>
-              <a:t>(X, 3), (Y, 40), (Z, 30) } </a:t>
+              <a:t>{ (X, 3), (Y, 40), (Z, 30) } </a:t>
             </a:r>
             <a:endParaRPr lang="ja-JP" altLang="en-US" sz="2800" dirty="0"/>
           </a:p>
@@ -10461,25 +10142,21 @@
           </a:p>
           <a:p>
             <a:r>
-              <a:rPr lang="en-US" altLang="ja-JP" sz="2800" b="0" dirty="0" smtClean="0"/>
-              <a:t>&lt;X </a:t>
-            </a:r>
-            <a:r>
               <a:rPr lang="en-US" altLang="ja-JP" sz="2800" b="0" dirty="0"/>
-              <a:t>= 3;, </a:t>
-            </a:r>
-            <a:r>
-              <a:rPr lang="en-US" altLang="ja-JP" sz="2800" b="0" i="1" dirty="0" smtClean="0">
+              <a:t>&lt;X = 3;, </a:t>
+            </a:r>
+            <a:r>
+              <a:rPr lang="en-US" altLang="ja-JP" sz="2800" b="0" i="1" dirty="0">
                 <a:sym typeface="Symbol" pitchFamily="18" charset="2"/>
               </a:rPr>
               <a:t></a:t>
             </a:r>
             <a:r>
-              <a:rPr lang="en-US" altLang="ja-JP" sz="2800" b="0" dirty="0" smtClean="0"/>
+              <a:rPr lang="en-US" altLang="ja-JP" sz="2800" b="0" dirty="0"/>
               <a:t>&gt;</a:t>
             </a:r>
             <a:r>
-              <a:rPr lang="ja-JP" altLang="en-US" sz="2800" b="0" dirty="0" smtClean="0">
+              <a:rPr lang="ja-JP" altLang="en-US" sz="2800" b="0" dirty="0">
                 <a:sym typeface="Symbol" pitchFamily="18" charset="2"/>
               </a:rPr>
               <a:t> </a:t>
@@ -10509,14 +10186,11 @@
               <a:t> </a:t>
             </a:r>
             <a:r>
-              <a:rPr lang="en-US" altLang="ja-JP" sz="2800" b="0" dirty="0" smtClean="0">
+              <a:rPr lang="en-US" altLang="ja-JP" sz="2800" b="0" dirty="0">
                 <a:sym typeface="Symbol" pitchFamily="18" charset="2"/>
               </a:rPr>
               <a:t>[3/X]</a:t>
             </a:r>
-            <a:endParaRPr lang="en-US" altLang="ja-JP" sz="2800" b="0" dirty="0">
-              <a:sym typeface="Symbol" pitchFamily="18" charset="2"/>
-            </a:endParaRPr>
           </a:p>
         </p:txBody>
       </p:sp>
@@ -10647,13 +10321,6 @@
   <p:clrMapOvr>
     <a:masterClrMapping/>
   </p:clrMapOvr>
-  <p:timing>
-    <p:tnLst>
-      <p:par>
-        <p:cTn xmlns:p14="http://schemas.microsoft.com/office/powerpoint/2010/main" id="1" dur="indefinite" restart="never" nodeType="tmRoot"/>
-      </p:par>
-    </p:tnLst>
-  </p:timing>
 </p:sld>
 </file>
 
@@ -10690,14 +10357,14 @@
           <a:lstStyle/>
           <a:p>
             <a:r>
-              <a:rPr lang="ja-JP" altLang="en-US" dirty="0" smtClean="0"/>
+              <a:rPr lang="ja-JP" altLang="en-US" dirty="0"/>
               <a:t>練習問題</a:t>
             </a:r>
             <a:r>
-              <a:rPr lang="en-US" altLang="ja-JP" dirty="0" smtClean="0"/>
+              <a:rPr lang="en-US" altLang="ja-JP" dirty="0"/>
               <a:t>3</a:t>
             </a:r>
-            <a:endParaRPr lang="ja-JP" altLang="en-US" dirty="0" smtClean="0"/>
+            <a:endParaRPr lang="ja-JP" altLang="en-US" dirty="0"/>
           </a:p>
         </p:txBody>
       </p:sp>
@@ -10765,39 +10432,15 @@
             </a:r>
             <a:r>
               <a:rPr lang="en-US" altLang="ja-JP" sz="2800" b="0" dirty="0"/>
-              <a:t>X = </a:t>
-            </a:r>
-            <a:r>
-              <a:rPr lang="en-US" altLang="ja-JP" sz="2800" b="0" dirty="0" smtClean="0"/>
-              <a:t>(Y </a:t>
-            </a:r>
-            <a:r>
-              <a:rPr lang="en-US" altLang="ja-JP" sz="2800" b="0" dirty="0"/>
-              <a:t>+ </a:t>
-            </a:r>
-            <a:r>
-              <a:rPr lang="en-US" altLang="ja-JP" sz="2800" b="0" dirty="0" smtClean="0"/>
-              <a:t>2); </a:t>
-            </a:r>
-            <a:r>
-              <a:rPr lang="en-US" altLang="ja-JP" sz="2800" b="0" dirty="0"/>
-              <a:t>Y = </a:t>
+              <a:t>X = (Y + 2); Y = </a:t>
             </a:r>
             <a:r>
               <a:rPr lang="en-US" altLang="ja-JP" sz="2800" dirty="0"/>
               <a:t>(</a:t>
             </a:r>
             <a:r>
-              <a:rPr lang="en-US" altLang="ja-JP" sz="2800" b="0" dirty="0" smtClean="0"/>
-              <a:t>Y </a:t>
-            </a:r>
-            <a:r>
               <a:rPr lang="en-US" altLang="ja-JP" sz="2800" b="0" dirty="0"/>
-              <a:t>+ </a:t>
-            </a:r>
-            <a:r>
-              <a:rPr lang="en-US" altLang="ja-JP" sz="2800" b="0" dirty="0" smtClean="0"/>
-              <a:t>3); </a:t>
+              <a:t>Y + 3); </a:t>
             </a:r>
             <a:r>
               <a:rPr lang="ja-JP" altLang="en-US" sz="2800" b="0" dirty="0"/>
@@ -10819,13 +10462,6 @@
   <p:clrMapOvr>
     <a:masterClrMapping/>
   </p:clrMapOvr>
-  <p:timing>
-    <p:tnLst>
-      <p:par>
-        <p:cTn xmlns:p14="http://schemas.microsoft.com/office/powerpoint/2010/main" id="1" dur="indefinite" restart="never" nodeType="tmRoot"/>
-      </p:par>
-    </p:tnLst>
-  </p:timing>
 </p:sld>
 </file>
 
@@ -10862,14 +10498,14 @@
           <a:lstStyle/>
           <a:p>
             <a:r>
-              <a:rPr lang="en-US" altLang="ja-JP" smtClean="0"/>
+              <a:rPr lang="en-US" altLang="ja-JP"/>
               <a:t>while</a:t>
             </a:r>
             <a:r>
-              <a:rPr lang="ja-JP" altLang="en-US" smtClean="0"/>
+              <a:rPr lang="ja-JP" altLang="en-US"/>
               <a:t>文の意味</a:t>
             </a:r>
-            <a:endParaRPr lang="en-US" altLang="ja-JP" smtClean="0"/>
+            <a:endParaRPr lang="en-US" altLang="ja-JP"/>
           </a:p>
         </p:txBody>
       </p:sp>
@@ -11081,22 +10717,16 @@
               <a:t> &gt;  </a:t>
             </a:r>
             <a:r>
-              <a:rPr lang="en-US" altLang="ja-JP" sz="2800" b="0" i="1" dirty="0" smtClean="0">
+              <a:rPr lang="en-US" altLang="ja-JP" sz="2800" b="0" i="1" dirty="0">
                 <a:sym typeface="Symbol" pitchFamily="18" charset="2"/>
               </a:rPr>
               <a:t>m</a:t>
             </a:r>
             <a:r>
-              <a:rPr lang="en-US" altLang="ja-JP" sz="2800" b="0" dirty="0" smtClean="0">
-                <a:sym typeface="Symbol" pitchFamily="18" charset="2"/>
-              </a:rPr>
-              <a:t>   </a:t>
-            </a:r>
-            <a:r>
               <a:rPr lang="en-US" altLang="ja-JP" sz="2800" b="0" dirty="0">
                 <a:sym typeface="Symbol" pitchFamily="18" charset="2"/>
               </a:rPr>
-              <a:t>&lt;c, </a:t>
+              <a:t>   &lt;c, </a:t>
             </a:r>
             <a:r>
               <a:rPr lang="en-US" altLang="ja-JP" sz="2800" b="0" i="1" dirty="0">
@@ -11307,11 +10937,11 @@
               <a:t>if </a:t>
             </a:r>
             <a:r>
-              <a:rPr lang="en-US" altLang="ja-JP" sz="2800" b="0" i="1" dirty="0" smtClean="0"/>
+              <a:rPr lang="en-US" altLang="ja-JP" sz="2800" b="0" i="1" dirty="0"/>
               <a:t>m</a:t>
             </a:r>
             <a:r>
-              <a:rPr lang="en-US" altLang="ja-JP" sz="2800" b="0" dirty="0" smtClean="0">
+              <a:rPr lang="en-US" altLang="ja-JP" sz="2800" b="0" dirty="0">
                 <a:sym typeface="Symbol" pitchFamily="18" charset="2"/>
               </a:rPr>
               <a:t></a:t>
@@ -11328,13 +10958,6 @@
   <p:clrMapOvr>
     <a:masterClrMapping/>
   </p:clrMapOvr>
-  <p:timing>
-    <p:tnLst>
-      <p:par>
-        <p:cTn xmlns:p14="http://schemas.microsoft.com/office/powerpoint/2010/main" id="1" dur="indefinite" restart="never" nodeType="tmRoot"/>
-      </p:par>
-    </p:tnLst>
-  </p:timing>
 </p:sld>
 </file>
 
@@ -11376,10 +10999,10 @@
           <a:lstStyle/>
           <a:p>
             <a:r>
-              <a:rPr lang="ja-JP" altLang="en-US" smtClean="0"/>
+              <a:rPr lang="ja-JP" altLang="en-US"/>
               <a:t>例３</a:t>
             </a:r>
-            <a:endParaRPr lang="en-US" altLang="ja-JP" smtClean="0"/>
+            <a:endParaRPr lang="en-US" altLang="ja-JP"/>
           </a:p>
         </p:txBody>
       </p:sp>
@@ -11414,20 +11037,12 @@
           <a:lstStyle/>
           <a:p>
             <a:r>
-              <a:rPr lang="ja-JP" altLang="en-US" sz="2800" dirty="0" smtClean="0"/>
+              <a:rPr lang="ja-JP" altLang="en-US" sz="2800" dirty="0"/>
               <a:t>       </a:t>
             </a:r>
             <a:r>
-              <a:rPr lang="en-US" altLang="ja-JP" sz="2800" b="0" dirty="0" smtClean="0"/>
-              <a:t>&lt;(Y</a:t>
-            </a:r>
-            <a:r>
               <a:rPr lang="en-US" altLang="ja-JP" sz="2800" b="0" dirty="0"/>
-              <a:t>-</a:t>
-            </a:r>
-            <a:r>
-              <a:rPr lang="en-US" altLang="ja-JP" sz="2800" b="0" dirty="0" smtClean="0"/>
-              <a:t>20), </a:t>
+              <a:t>&lt;(Y-20), </a:t>
             </a:r>
             <a:r>
               <a:rPr lang="en-US" altLang="ja-JP" sz="2800" b="0" i="1" dirty="0">
@@ -11462,36 +11077,20 @@
           <a:p>
             <a:r>
               <a:rPr lang="en-US" altLang="ja-JP" sz="2400" b="0" dirty="0"/>
-              <a:t>     &lt;Y</a:t>
-            </a:r>
-            <a:r>
-              <a:rPr lang="en-US" altLang="ja-JP" sz="2400" b="0" dirty="0" smtClean="0"/>
-              <a:t>=(Y</a:t>
+              <a:t>     &lt;Y=(Y-20);, </a:t>
+            </a:r>
+            <a:r>
+              <a:rPr lang="en-US" altLang="ja-JP" sz="2400" b="0" i="1" dirty="0">
+                <a:sym typeface="Symbol" pitchFamily="18" charset="2"/>
+              </a:rPr>
+              <a:t> </a:t>
             </a:r>
             <a:r>
               <a:rPr lang="en-US" altLang="ja-JP" sz="2400" b="0" dirty="0"/>
-              <a:t>-</a:t>
-            </a:r>
-            <a:r>
-              <a:rPr lang="en-US" altLang="ja-JP" sz="2400" b="0" dirty="0" smtClean="0"/>
-              <a:t>20);</a:t>
-            </a:r>
-            <a:r>
-              <a:rPr lang="en-US" altLang="ja-JP" sz="2400" b="0" dirty="0"/>
-              <a:t>, </a:t>
-            </a:r>
-            <a:r>
-              <a:rPr lang="en-US" altLang="ja-JP" sz="2400" b="0" i="1" dirty="0" smtClean="0">
-                <a:sym typeface="Symbol" pitchFamily="18" charset="2"/>
-              </a:rPr>
-              <a:t> </a:t>
-            </a:r>
-            <a:r>
-              <a:rPr lang="en-US" altLang="ja-JP" sz="2400" b="0" dirty="0" smtClean="0"/>
               <a:t>&gt;</a:t>
             </a:r>
             <a:r>
-              <a:rPr lang="ja-JP" altLang="en-US" sz="2400" b="0" dirty="0" smtClean="0">
+              <a:rPr lang="ja-JP" altLang="en-US" sz="2400" b="0" dirty="0">
                 <a:sym typeface="Symbol" pitchFamily="18" charset="2"/>
               </a:rPr>
               <a:t> </a:t>
@@ -11623,31 +11222,7 @@
               <a:rPr lang="en-US" altLang="ja-JP" sz="2800" b="0" dirty="0">
                 <a:sym typeface="Symbol" pitchFamily="18" charset="2"/>
               </a:rPr>
-              <a:t>while ( Y ) { Y = </a:t>
-            </a:r>
-            <a:r>
-              <a:rPr lang="en-US" altLang="ja-JP" sz="2800" b="0" dirty="0" smtClean="0">
-                <a:sym typeface="Symbol" pitchFamily="18" charset="2"/>
-              </a:rPr>
-              <a:t>(Y </a:t>
-            </a:r>
-            <a:r>
-              <a:rPr lang="en-US" altLang="ja-JP" sz="2800" b="0" dirty="0">
-                <a:sym typeface="Symbol" pitchFamily="18" charset="2"/>
-              </a:rPr>
-              <a:t>– </a:t>
-            </a:r>
-            <a:r>
-              <a:rPr lang="en-US" altLang="ja-JP" sz="2800" b="0" dirty="0" smtClean="0">
-                <a:sym typeface="Symbol" pitchFamily="18" charset="2"/>
-              </a:rPr>
-              <a:t>20); </a:t>
-            </a:r>
-            <a:r>
-              <a:rPr lang="en-US" altLang="ja-JP" sz="2800" b="0" dirty="0">
-                <a:sym typeface="Symbol" pitchFamily="18" charset="2"/>
-              </a:rPr>
-              <a:t>} </a:t>
+              <a:t>while ( Y ) { Y = (Y – 20); } </a:t>
             </a:r>
             <a:r>
               <a:rPr lang="ja-JP" altLang="en-US" sz="2800" b="0" dirty="0">
@@ -11690,16 +11265,8 @@
           <a:lstStyle/>
           <a:p>
             <a:r>
-              <a:rPr lang="en-US" altLang="ja-JP" sz="2800" b="0" dirty="0" smtClean="0"/>
-              <a:t>{ </a:t>
-            </a:r>
-            <a:r>
               <a:rPr lang="en-US" altLang="ja-JP" sz="2800" b="0" dirty="0"/>
-              <a:t>(X, 10), (Y, 0), (Z, 30) </a:t>
-            </a:r>
-            <a:r>
-              <a:rPr lang="en-US" altLang="ja-JP" sz="2800" b="0" dirty="0" smtClean="0"/>
-              <a:t>} </a:t>
+              <a:t>{ (X, 10), (Y, 0), (Z, 30) } </a:t>
             </a:r>
             <a:endParaRPr lang="ja-JP" altLang="en-US" sz="2800" dirty="0"/>
           </a:p>
@@ -11854,11 +11421,7 @@
           <a:p>
             <a:r>
               <a:rPr lang="en-US" altLang="ja-JP" sz="2400" b="0" dirty="0"/>
-              <a:t>&lt;</a:t>
-            </a:r>
-            <a:r>
-              <a:rPr lang="en-US" altLang="ja-JP" sz="2400" b="0" dirty="0" smtClean="0"/>
-              <a:t>Y, </a:t>
+              <a:t>&lt;Y, </a:t>
             </a:r>
             <a:r>
               <a:rPr lang="en-US" altLang="ja-JP" sz="2400" b="0" i="1" dirty="0">
@@ -11989,15 +11552,7 @@
           <a:p>
             <a:r>
               <a:rPr lang="en-US" altLang="ja-JP" sz="3200" b="0" dirty="0"/>
-              <a:t>&lt; while (Y) {Y = </a:t>
-            </a:r>
-            <a:r>
-              <a:rPr lang="en-US" altLang="ja-JP" sz="3200" b="0" dirty="0" smtClean="0"/>
-              <a:t>(Y – 20);</a:t>
-            </a:r>
-            <a:r>
-              <a:rPr lang="en-US" altLang="ja-JP" sz="3200" b="0" dirty="0"/>
-              <a:t>} , </a:t>
+              <a:t>&lt; while (Y) {Y = (Y – 20);} , </a:t>
             </a:r>
             <a:r>
               <a:rPr lang="en-US" altLang="ja-JP" sz="3200" b="0" i="1" dirty="0">
@@ -12121,59 +11676,31 @@
           <a:p>
             <a:r>
               <a:rPr lang="en-US" altLang="ja-JP" sz="2000" b="0" dirty="0"/>
-              <a:t>&lt;while(Y){Y</a:t>
-            </a:r>
-            <a:r>
-              <a:rPr lang="en-US" altLang="ja-JP" sz="2000" b="0" dirty="0" smtClean="0"/>
-              <a:t>=(Y</a:t>
-            </a:r>
-            <a:r>
-              <a:rPr lang="en-US" altLang="ja-JP" sz="2000" b="0" dirty="0"/>
-              <a:t>-</a:t>
-            </a:r>
-            <a:r>
-              <a:rPr lang="en-US" altLang="ja-JP" sz="2000" b="0" dirty="0" smtClean="0"/>
-              <a:t>20);</a:t>
-            </a:r>
-            <a:r>
-              <a:rPr lang="en-US" altLang="ja-JP" sz="2000" b="0" dirty="0"/>
-              <a:t>}, </a:t>
-            </a:r>
-            <a:r>
-              <a:rPr lang="en-US" altLang="ja-JP" sz="2000" b="0" i="1" dirty="0" smtClean="0">
+              <a:t>&lt;while(Y){Y=(Y-20);}, </a:t>
+            </a:r>
+            <a:r>
+              <a:rPr lang="en-US" altLang="ja-JP" sz="2000" b="0" i="1" dirty="0">
                 <a:sym typeface="Symbol" pitchFamily="18" charset="2"/>
               </a:rPr>
               <a:t> </a:t>
             </a:r>
             <a:r>
-              <a:rPr lang="en-US" altLang="ja-JP" sz="2000" b="0" dirty="0" smtClean="0">
-                <a:sym typeface="Symbol" pitchFamily="18" charset="2"/>
-              </a:rPr>
-              <a:t>[</a:t>
-            </a:r>
-            <a:r>
               <a:rPr lang="en-US" altLang="ja-JP" sz="2000" b="0" dirty="0">
                 <a:sym typeface="Symbol" pitchFamily="18" charset="2"/>
               </a:rPr>
-              <a:t>0/Y]&gt;  </a:t>
-            </a:r>
-            <a:r>
-              <a:rPr lang="ja-JP" altLang="en-US" sz="2000" b="0" i="1" dirty="0" smtClean="0">
+              <a:t>[0/Y]&gt;  </a:t>
+            </a:r>
+            <a:r>
+              <a:rPr lang="ja-JP" altLang="en-US" sz="2000" b="0" i="1" dirty="0">
                 <a:sym typeface="Symbol" pitchFamily="18" charset="2"/>
               </a:rPr>
               <a:t> </a:t>
             </a:r>
             <a:r>
-              <a:rPr lang="en-US" altLang="ja-JP" sz="2000" b="0" dirty="0" smtClean="0">
-                <a:sym typeface="Symbol" pitchFamily="18" charset="2"/>
-              </a:rPr>
-              <a:t>[</a:t>
-            </a:r>
-            <a:r>
               <a:rPr lang="en-US" altLang="ja-JP" sz="2000" b="0" dirty="0">
                 <a:sym typeface="Symbol" pitchFamily="18" charset="2"/>
               </a:rPr>
-              <a:t>0/Y]</a:t>
+              <a:t>[0/Y]</a:t>
             </a:r>
             <a:endParaRPr lang="ja-JP" altLang="en-US" sz="2000" b="0" dirty="0">
               <a:sym typeface="Symbol" pitchFamily="18" charset="2"/>
@@ -12203,61 +11730,61 @@
           <a:lstStyle/>
           <a:p>
             <a:r>
-              <a:rPr lang="en-US" altLang="ja-JP" sz="2800" dirty="0" smtClean="0"/>
+              <a:rPr lang="en-US" altLang="ja-JP" sz="2800" dirty="0"/>
               <a:t>&lt;Y, </a:t>
             </a:r>
             <a:r>
-              <a:rPr lang="en-US" altLang="ja-JP" sz="2800" i="1" dirty="0" smtClean="0">
+              <a:rPr lang="en-US" altLang="ja-JP" sz="2800" i="1" dirty="0">
                 <a:sym typeface="Symbol" pitchFamily="18" charset="2"/>
               </a:rPr>
               <a:t></a:t>
             </a:r>
             <a:r>
-              <a:rPr lang="en-US" altLang="ja-JP" sz="2800" dirty="0" smtClean="0">
+              <a:rPr lang="en-US" altLang="ja-JP" sz="2800" dirty="0">
                 <a:sym typeface="Symbol" pitchFamily="18" charset="2"/>
               </a:rPr>
               <a:t> </a:t>
             </a:r>
             <a:r>
-              <a:rPr lang="en-US" altLang="ja-JP" sz="2800" dirty="0" smtClean="0"/>
+              <a:rPr lang="en-US" altLang="ja-JP" sz="2800" dirty="0"/>
               <a:t>&gt;</a:t>
             </a:r>
             <a:r>
-              <a:rPr lang="ja-JP" altLang="en-US" sz="2800" dirty="0" smtClean="0">
+              <a:rPr lang="ja-JP" altLang="en-US" sz="2800" dirty="0">
                 <a:sym typeface="Symbol" pitchFamily="18" charset="2"/>
               </a:rPr>
               <a:t> </a:t>
             </a:r>
             <a:r>
-              <a:rPr lang="en-US" altLang="ja-JP" sz="2800" dirty="0" smtClean="0">
+              <a:rPr lang="en-US" altLang="ja-JP" sz="2800" dirty="0">
                 <a:sym typeface="Symbol" pitchFamily="18" charset="2"/>
               </a:rPr>
               <a:t> 20   &lt;20, </a:t>
             </a:r>
             <a:r>
-              <a:rPr lang="en-US" altLang="ja-JP" sz="2800" i="1" dirty="0" smtClean="0">
+              <a:rPr lang="en-US" altLang="ja-JP" sz="2800" i="1" dirty="0">
                 <a:sym typeface="Symbol" pitchFamily="18" charset="2"/>
               </a:rPr>
               <a:t></a:t>
             </a:r>
             <a:r>
-              <a:rPr lang="en-US" altLang="ja-JP" sz="2800" dirty="0" smtClean="0">
+              <a:rPr lang="en-US" altLang="ja-JP" sz="2800" dirty="0">
                 <a:sym typeface="Symbol" pitchFamily="18" charset="2"/>
               </a:rPr>
               <a:t> </a:t>
             </a:r>
             <a:r>
-              <a:rPr lang="en-US" altLang="ja-JP" sz="2800" dirty="0" smtClean="0"/>
+              <a:rPr lang="en-US" altLang="ja-JP" sz="2800" dirty="0"/>
               <a:t>&gt;</a:t>
             </a:r>
             <a:r>
-              <a:rPr lang="ja-JP" altLang="en-US" sz="2800" dirty="0" smtClean="0">
+              <a:rPr lang="ja-JP" altLang="en-US" sz="2800" dirty="0">
                 <a:sym typeface="Symbol" pitchFamily="18" charset="2"/>
               </a:rPr>
               <a:t> </a:t>
             </a:r>
             <a:r>
-              <a:rPr lang="en-US" altLang="ja-JP" sz="2800" dirty="0" smtClean="0">
+              <a:rPr lang="en-US" altLang="ja-JP" sz="2800" dirty="0">
                 <a:sym typeface="Symbol" pitchFamily="18" charset="2"/>
               </a:rPr>
               <a:t> 20</a:t>
@@ -12270,13 +11797,6 @@
   <p:clrMapOvr>
     <a:masterClrMapping/>
   </p:clrMapOvr>
-  <p:timing>
-    <p:tnLst>
-      <p:par>
-        <p:cTn xmlns:p14="http://schemas.microsoft.com/office/powerpoint/2010/main" id="1" dur="indefinite" restart="never" nodeType="tmRoot"/>
-      </p:par>
-    </p:tnLst>
-  </p:timing>
 </p:sld>
 </file>
 
@@ -12313,14 +11833,14 @@
           <a:lstStyle/>
           <a:p>
             <a:r>
-              <a:rPr lang="ja-JP" altLang="en-US" dirty="0" smtClean="0"/>
+              <a:rPr lang="ja-JP" altLang="en-US" dirty="0"/>
               <a:t>練習問題</a:t>
             </a:r>
             <a:r>
-              <a:rPr lang="en-US" altLang="ja-JP" dirty="0" smtClean="0"/>
+              <a:rPr lang="en-US" altLang="ja-JP" dirty="0"/>
               <a:t>4</a:t>
             </a:r>
-            <a:endParaRPr lang="ja-JP" altLang="en-US" dirty="0" smtClean="0"/>
+            <a:endParaRPr lang="ja-JP" altLang="en-US" dirty="0"/>
           </a:p>
         </p:txBody>
       </p:sp>
@@ -12378,79 +11898,35 @@
             </a:r>
             <a:r>
               <a:rPr lang="en-US" altLang="ja-JP" sz="2800" b="0" dirty="0"/>
-              <a:t>{ (X, 10), (Y, 40), (Z, 30) </a:t>
-            </a:r>
-            <a:r>
-              <a:rPr lang="en-US" altLang="ja-JP" sz="2800" b="0" dirty="0" smtClean="0"/>
-              <a:t>} </a:t>
-            </a:r>
-            <a:r>
-              <a:rPr lang="ja-JP" altLang="en-US" sz="2800" b="0" dirty="0" smtClean="0"/>
-              <a:t>に</a:t>
+              <a:t>{ (X, 10), (Y, 40), (Z, 30) } </a:t>
             </a:r>
             <a:r>
               <a:rPr lang="ja-JP" altLang="en-US" sz="2800" b="0" dirty="0"/>
-              <a:t>おいて</a:t>
-            </a:r>
-            <a:r>
-              <a:rPr lang="ja-JP" altLang="en-US" sz="2800" b="0" dirty="0" smtClean="0"/>
-              <a:t>、</a:t>
-            </a:r>
-            <a:endParaRPr lang="en-US" altLang="ja-JP" sz="2800" b="0" dirty="0" smtClean="0"/>
-          </a:p>
-          <a:p>
-            <a:r>
-              <a:rPr lang="ja-JP" altLang="en-US" sz="2800" b="0" dirty="0" smtClean="0"/>
+              <a:t>において、</a:t>
+            </a:r>
+            <a:endParaRPr lang="en-US" altLang="ja-JP" sz="2800" b="0" dirty="0"/>
+          </a:p>
+          <a:p>
+            <a:r>
+              <a:rPr lang="ja-JP" altLang="en-US" sz="2800" b="0" dirty="0"/>
               <a:t>文 </a:t>
             </a:r>
             <a:r>
               <a:rPr lang="en-US" altLang="ja-JP" sz="2800" b="0" dirty="0">
                 <a:sym typeface="Symbol" pitchFamily="18" charset="2"/>
               </a:rPr>
-              <a:t>while ( Y ) { Y = </a:t>
-            </a:r>
-            <a:r>
-              <a:rPr lang="en-US" altLang="ja-JP" sz="2800" b="0" dirty="0" smtClean="0">
-                <a:sym typeface="Symbol" pitchFamily="18" charset="2"/>
-              </a:rPr>
-              <a:t>(Y </a:t>
-            </a:r>
-            <a:r>
-              <a:rPr lang="en-US" altLang="ja-JP" sz="2800" b="0" dirty="0">
-                <a:sym typeface="Symbol" pitchFamily="18" charset="2"/>
-              </a:rPr>
-              <a:t>– </a:t>
-            </a:r>
-            <a:r>
-              <a:rPr lang="en-US" altLang="ja-JP" sz="2800" b="0" dirty="0" smtClean="0">
-                <a:sym typeface="Symbol" pitchFamily="18" charset="2"/>
-              </a:rPr>
-              <a:t>20); </a:t>
-            </a:r>
-            <a:r>
-              <a:rPr lang="en-US" altLang="ja-JP" sz="2800" b="0" dirty="0">
-                <a:sym typeface="Symbol" pitchFamily="18" charset="2"/>
-              </a:rPr>
-              <a:t>} </a:t>
+              <a:t>while ( Y ) { Y = (Y – 20); } </a:t>
             </a:r>
             <a:r>
               <a:rPr lang="ja-JP" altLang="en-US" sz="2800" b="0" dirty="0"/>
-              <a:t>を実行</a:t>
-            </a:r>
-            <a:r>
-              <a:rPr lang="ja-JP" altLang="en-US" sz="2800" b="0" dirty="0" smtClean="0"/>
-              <a:t>したら</a:t>
-            </a:r>
-            <a:endParaRPr lang="en-US" altLang="ja-JP" sz="2800" b="0" dirty="0" smtClean="0"/>
-          </a:p>
-          <a:p>
-            <a:r>
-              <a:rPr lang="ja-JP" altLang="en-US" sz="2800" b="0" dirty="0" smtClean="0"/>
-              <a:t>状態</a:t>
-            </a:r>
+              <a:t>を実行したら</a:t>
+            </a:r>
+            <a:endParaRPr lang="en-US" altLang="ja-JP" sz="2800" b="0" dirty="0"/>
+          </a:p>
+          <a:p>
             <a:r>
               <a:rPr lang="ja-JP" altLang="en-US" sz="2800" b="0" dirty="0"/>
-              <a:t>はどうなるか。規則を使って導出せよ。</a:t>
+              <a:t>状態はどうなるか。規則を使って導出せよ。</a:t>
             </a:r>
             <a:endParaRPr lang="en-US" altLang="ja-JP" sz="2800" b="0" dirty="0"/>
           </a:p>
@@ -12461,13 +11937,6 @@
   <p:clrMapOvr>
     <a:masterClrMapping/>
   </p:clrMapOvr>
-  <p:timing>
-    <p:tnLst>
-      <p:par>
-        <p:cTn xmlns:p14="http://schemas.microsoft.com/office/powerpoint/2010/main" id="1" dur="indefinite" restart="never" nodeType="tmRoot"/>
-      </p:par>
-    </p:tnLst>
-  </p:timing>
 </p:sld>
 </file>
 
@@ -12505,7 +11974,7 @@
           <a:p>
             <a:pPr eaLnBrk="1" hangingPunct="1"/>
             <a:r>
-              <a:rPr lang="ja-JP" altLang="en-US" dirty="0" smtClean="0"/>
+              <a:rPr lang="ja-JP" altLang="en-US" dirty="0"/>
               <a:t>算術式の意味</a:t>
             </a:r>
           </a:p>
@@ -12551,22 +12020,18 @@
             </a:r>
             <a:r>
               <a:rPr lang="en-US" altLang="ja-JP" sz="2800" b="0" dirty="0"/>
-              <a:t>&gt; ::= </a:t>
-            </a:r>
-            <a:r>
-              <a:rPr lang="en-US" altLang="ja-JP" sz="2800" b="0" dirty="0" smtClean="0"/>
-              <a:t>&lt;</a:t>
-            </a:r>
-            <a:r>
-              <a:rPr lang="ja-JP" altLang="en-US" sz="2800" dirty="0" smtClean="0"/>
+              <a:t>&gt; ::= &lt;</a:t>
+            </a:r>
+            <a:r>
+              <a:rPr lang="ja-JP" altLang="en-US" sz="2800" dirty="0"/>
               <a:t>数字列</a:t>
             </a:r>
             <a:r>
-              <a:rPr lang="en-US" altLang="ja-JP" sz="2800" b="0" dirty="0" smtClean="0"/>
+              <a:rPr lang="en-US" altLang="ja-JP" sz="2800" b="0" dirty="0"/>
               <a:t>&gt;</a:t>
             </a:r>
             <a:r>
-              <a:rPr lang="ja-JP" altLang="en-US" sz="2800" b="0" dirty="0" smtClean="0"/>
+              <a:rPr lang="ja-JP" altLang="en-US" sz="2800" b="0" dirty="0"/>
               <a:t> </a:t>
             </a:r>
             <a:endParaRPr lang="en-US" altLang="ja-JP" sz="2800" b="0" dirty="0"/>
@@ -12574,21 +12039,16 @@
           <a:p>
             <a:r>
               <a:rPr lang="en-US" altLang="ja-JP" sz="2800" b="0" dirty="0"/>
-              <a:t>          | </a:t>
-            </a:r>
-            <a:r>
-              <a:rPr lang="en-US" altLang="ja-JP" sz="2800" b="0" dirty="0" smtClean="0"/>
-              <a:t>&lt;</a:t>
-            </a:r>
-            <a:r>
-              <a:rPr lang="ja-JP" altLang="en-US" sz="2800" dirty="0" smtClean="0"/>
+              <a:t>          | &lt;</a:t>
+            </a:r>
+            <a:r>
+              <a:rPr lang="ja-JP" altLang="en-US" sz="2800" dirty="0"/>
               <a:t>変数</a:t>
             </a:r>
             <a:r>
-              <a:rPr lang="en-US" altLang="ja-JP" sz="2800" b="0" dirty="0" smtClean="0"/>
+              <a:rPr lang="en-US" altLang="ja-JP" sz="2800" b="0" dirty="0"/>
               <a:t>&gt;</a:t>
             </a:r>
-            <a:endParaRPr lang="en-US" altLang="ja-JP" sz="2800" b="0" dirty="0"/>
           </a:p>
           <a:p>
             <a:r>
@@ -12670,45 +12130,45 @@
               <a:t>&gt; ::= X | Y | </a:t>
             </a:r>
             <a:r>
-              <a:rPr lang="en-US" altLang="ja-JP" sz="2800" dirty="0" smtClean="0"/>
+              <a:rPr lang="en-US" altLang="ja-JP" sz="2800" dirty="0"/>
               <a:t>Z</a:t>
             </a:r>
           </a:p>
           <a:p>
             <a:r>
-              <a:rPr lang="en-US" altLang="ja-JP" sz="2800" dirty="0" smtClean="0"/>
+              <a:rPr lang="en-US" altLang="ja-JP" sz="2800" dirty="0"/>
               <a:t>&lt;</a:t>
             </a:r>
             <a:r>
-              <a:rPr lang="ja-JP" altLang="en-US" sz="2800" dirty="0" smtClean="0"/>
+              <a:rPr lang="ja-JP" altLang="en-US" sz="2800" dirty="0"/>
               <a:t>数字列</a:t>
             </a:r>
             <a:r>
-              <a:rPr lang="en-US" altLang="ja-JP" sz="2800" dirty="0" smtClean="0"/>
+              <a:rPr lang="en-US" altLang="ja-JP" sz="2800" dirty="0"/>
               <a:t>&gt; ::= &lt;</a:t>
             </a:r>
             <a:r>
-              <a:rPr lang="ja-JP" altLang="en-US" sz="2800" dirty="0" smtClean="0"/>
+              <a:rPr lang="ja-JP" altLang="en-US" sz="2800" dirty="0"/>
               <a:t>数字</a:t>
             </a:r>
             <a:r>
-              <a:rPr lang="en-US" altLang="ja-JP" sz="2800" dirty="0" smtClean="0"/>
+              <a:rPr lang="en-US" altLang="ja-JP" sz="2800" dirty="0"/>
               <a:t>&gt; | &lt;</a:t>
             </a:r>
             <a:r>
-              <a:rPr lang="ja-JP" altLang="en-US" sz="2800" dirty="0" smtClean="0"/>
+              <a:rPr lang="ja-JP" altLang="en-US" sz="2800" dirty="0"/>
               <a:t>数字列</a:t>
             </a:r>
             <a:r>
-              <a:rPr lang="en-US" altLang="ja-JP" sz="2800" dirty="0" smtClean="0"/>
+              <a:rPr lang="en-US" altLang="ja-JP" sz="2800" dirty="0"/>
               <a:t>&gt; &lt;</a:t>
             </a:r>
             <a:r>
-              <a:rPr lang="ja-JP" altLang="en-US" sz="2800" dirty="0" smtClean="0"/>
+              <a:rPr lang="ja-JP" altLang="en-US" sz="2800" dirty="0"/>
               <a:t>数字</a:t>
             </a:r>
             <a:r>
-              <a:rPr lang="en-US" altLang="ja-JP" sz="2800" dirty="0" smtClean="0"/>
+              <a:rPr lang="en-US" altLang="ja-JP" sz="2800" dirty="0"/>
               <a:t>&gt;</a:t>
             </a:r>
             <a:endParaRPr lang="en-US" altLang="ja-JP" sz="2800" b="0" dirty="0"/>
@@ -12724,13 +12184,8 @@
             </a:r>
             <a:r>
               <a:rPr lang="en-US" altLang="ja-JP" sz="2800" b="0" dirty="0"/>
-              <a:t>&gt; ::= 0 | 1 | 2 | 3 | 4 | 5 | 6 | 7 | 8 | </a:t>
-            </a:r>
-            <a:r>
-              <a:rPr lang="en-US" altLang="ja-JP" sz="2800" b="0" dirty="0" smtClean="0"/>
-              <a:t>9</a:t>
-            </a:r>
-            <a:endParaRPr lang="en-US" altLang="ja-JP" sz="2800" b="0" dirty="0"/>
+              <a:t>&gt; ::= 0 | 1 | 2 | 3 | 4 | 5 | 6 | 7 | 8 | 9</a:t>
+            </a:r>
           </a:p>
         </p:txBody>
       </p:sp>
@@ -12765,12 +12220,8 @@
           <a:lstStyle/>
           <a:p>
             <a:r>
-              <a:rPr lang="ja-JP" altLang="en-US" sz="2800" b="0" dirty="0" smtClean="0"/>
-              <a:t>まず、以下</a:t>
-            </a:r>
-            <a:r>
               <a:rPr lang="ja-JP" altLang="en-US" sz="2800" b="0" dirty="0"/>
-              <a:t>の</a:t>
+              <a:t>まず、以下の</a:t>
             </a:r>
             <a:r>
               <a:rPr lang="en-US" altLang="ja-JP" sz="2800" b="0" dirty="0"/>
@@ -12778,15 +12229,7 @@
             </a:r>
             <a:r>
               <a:rPr lang="ja-JP" altLang="en-US" sz="2800" b="0" dirty="0"/>
-              <a:t>記法で定義</a:t>
-            </a:r>
-            <a:r>
-              <a:rPr lang="ja-JP" altLang="en-US" sz="2800" b="0" dirty="0" smtClean="0"/>
-              <a:t>される式</a:t>
-            </a:r>
-            <a:r>
-              <a:rPr lang="ja-JP" altLang="en-US" sz="2800" b="0" dirty="0"/>
-              <a:t>を対象とし、その意味を操作的意味論で定義する。</a:t>
+              <a:t>記法で定義される式を対象とし、その意味を操作的意味論で定義する。</a:t>
             </a:r>
           </a:p>
         </p:txBody>
@@ -12827,27 +12270,11 @@
             </a:r>
             <a:r>
               <a:rPr lang="en-US" altLang="ja-JP" sz="2800" b="0" dirty="0"/>
-              <a:t>(12 + 34),  </a:t>
-            </a:r>
-            <a:r>
-              <a:rPr lang="en-US" altLang="ja-JP" sz="2800" b="0" dirty="0" smtClean="0"/>
-              <a:t>(3 </a:t>
-            </a:r>
-            <a:r>
-              <a:rPr lang="en-US" altLang="ja-JP" sz="2800" b="0" dirty="0"/>
-              <a:t>* (45 – X</a:t>
-            </a:r>
-            <a:r>
-              <a:rPr lang="en-US" altLang="ja-JP" sz="2800" b="0" dirty="0" smtClean="0"/>
-              <a:t>))</a:t>
-            </a:r>
-            <a:r>
-              <a:rPr lang="ja-JP" altLang="en-US" sz="2800" b="0" dirty="0" smtClean="0"/>
-              <a:t> </a:t>
+              <a:t>(12 + 34),  (3 * (45 – X))</a:t>
             </a:r>
             <a:r>
               <a:rPr lang="ja-JP" altLang="en-US" sz="2800" b="0" dirty="0"/>
-              <a:t>など。</a:t>
+              <a:t> など。</a:t>
             </a:r>
           </a:p>
         </p:txBody>
@@ -12857,13 +12284,6 @@
   <p:clrMapOvr>
     <a:masterClrMapping/>
   </p:clrMapOvr>
-  <p:timing>
-    <p:tnLst>
-      <p:par>
-        <p:cTn xmlns:p14="http://schemas.microsoft.com/office/powerpoint/2010/main" id="1" dur="indefinite" restart="never" nodeType="tmRoot"/>
-      </p:par>
-    </p:tnLst>
-  </p:timing>
 </p:sld>
 </file>
 
@@ -12906,7 +12326,7 @@
           <a:p>
             <a:pPr eaLnBrk="1" hangingPunct="1"/>
             <a:r>
-              <a:rPr lang="ja-JP" altLang="en-US" dirty="0" smtClean="0"/>
+              <a:rPr lang="ja-JP" altLang="en-US" dirty="0"/>
               <a:t>状態</a:t>
             </a:r>
           </a:p>
@@ -13000,15 +12420,7 @@
             </a:r>
             <a:r>
               <a:rPr lang="ja-JP" altLang="en-US" sz="2800" b="0" dirty="0"/>
-              <a:t>）から</a:t>
-            </a:r>
-            <a:r>
-              <a:rPr lang="ja-JP" altLang="en-US" sz="2800" b="0" dirty="0" smtClean="0"/>
-              <a:t>整数へ</a:t>
-            </a:r>
-            <a:r>
-              <a:rPr lang="ja-JP" altLang="en-US" sz="2800" b="0" dirty="0"/>
-              <a:t>の関数。</a:t>
+              <a:t>）から整数への関数。</a:t>
             </a:r>
             <a:endParaRPr lang="en-US" altLang="ja-JP" sz="2800" b="0" dirty="0"/>
           </a:p>
@@ -13079,27 +12491,19 @@
             </a:r>
             <a:r>
               <a:rPr lang="en-US" altLang="ja-JP" sz="2800" b="0" dirty="0"/>
-              <a:t> X = 3</a:t>
-            </a:r>
-            <a:r>
-              <a:rPr lang="en-US" altLang="ja-JP" sz="2800" b="0" dirty="0" smtClean="0"/>
-              <a:t>;</a:t>
-            </a:r>
-            <a:r>
-              <a:rPr lang="ja-JP" altLang="en-US" sz="2800" dirty="0" smtClean="0"/>
+              <a:t> X = 3;</a:t>
+            </a:r>
+            <a:r>
+              <a:rPr lang="ja-JP" altLang="en-US" sz="2800" dirty="0"/>
               <a:t>   </a:t>
             </a:r>
             <a:r>
-              <a:rPr lang="en-US" altLang="ja-JP" sz="2800" b="0" dirty="0" err="1" smtClean="0"/>
+              <a:rPr lang="en-US" altLang="ja-JP" sz="2800" b="0" dirty="0" err="1"/>
               <a:t>int</a:t>
             </a:r>
             <a:r>
-              <a:rPr lang="en-US" altLang="ja-JP" sz="2800" b="0" dirty="0" smtClean="0"/>
-              <a:t> </a:t>
-            </a:r>
-            <a:r>
               <a:rPr lang="en-US" altLang="ja-JP" sz="2800" b="0" dirty="0"/>
-              <a:t>Y = 4;</a:t>
+              <a:t> Y = 4;</a:t>
             </a:r>
           </a:p>
           <a:p>
@@ -13112,15 +12516,7 @@
           <a:p>
             <a:r>
               <a:rPr lang="en-US" altLang="ja-JP" sz="2800" b="0" dirty="0"/>
-              <a:t>    { (X, 3), (Y, 4), (Z</a:t>
-            </a:r>
-            <a:r>
-              <a:rPr lang="en-US" altLang="ja-JP" sz="2800" b="0" dirty="0" smtClean="0"/>
-              <a:t>, 0</a:t>
-            </a:r>
-            <a:r>
-              <a:rPr lang="en-US" altLang="ja-JP" sz="2800" b="0" dirty="0"/>
-              <a:t>) }</a:t>
+              <a:t>    { (X, 3), (Y, 4), (Z, 0) }</a:t>
             </a:r>
           </a:p>
           <a:p>
@@ -13137,13 +12533,6 @@
   <p:clrMapOvr>
     <a:masterClrMapping/>
   </p:clrMapOvr>
-  <p:timing>
-    <p:tnLst>
-      <p:par>
-        <p:cTn xmlns:p14="http://schemas.microsoft.com/office/powerpoint/2010/main" id="1" dur="indefinite" restart="never" nodeType="tmRoot"/>
-      </p:par>
-    </p:tnLst>
-  </p:timing>
 </p:sld>
 </file>
 
@@ -13181,7 +12570,7 @@
           <a:p>
             <a:pPr eaLnBrk="1" hangingPunct="1"/>
             <a:r>
-              <a:rPr lang="ja-JP" altLang="en-US" dirty="0" smtClean="0"/>
+              <a:rPr lang="ja-JP" altLang="en-US" dirty="0"/>
               <a:t>メタ変数について</a:t>
             </a:r>
           </a:p>
@@ -13218,11 +12607,11 @@
           <a:lstStyle/>
           <a:p>
             <a:r>
-              <a:rPr lang="ja-JP" altLang="en-US" sz="2800" dirty="0" smtClean="0"/>
+              <a:rPr lang="ja-JP" altLang="en-US" sz="2800" dirty="0"/>
               <a:t>以下で行う意味定義において、</a:t>
             </a:r>
             <a:r>
-              <a:rPr lang="ja-JP" altLang="en-US" sz="2800" b="0" dirty="0" smtClean="0"/>
+              <a:rPr lang="ja-JP" altLang="en-US" sz="2800" b="0" dirty="0"/>
               <a:t>式、数字列、整数、変数、状態を表すための変数（メタ変数）として以下のものを用いる。</a:t>
             </a:r>
           </a:p>
@@ -13259,47 +12648,47 @@
           <a:lstStyle/>
           <a:p>
             <a:r>
-              <a:rPr lang="en-US" altLang="ja-JP" sz="3200" b="0" i="1" dirty="0" smtClean="0"/>
+              <a:rPr lang="en-US" altLang="ja-JP" sz="3200" b="0" i="1" dirty="0"/>
               <a:t> </a:t>
             </a:r>
             <a:r>
-              <a:rPr lang="ja-JP" altLang="en-US" sz="3200" b="0" dirty="0" smtClean="0"/>
+              <a:rPr lang="ja-JP" altLang="en-US" sz="3200" b="0" dirty="0"/>
               <a:t>式 </a:t>
             </a:r>
             <a:r>
-              <a:rPr lang="en-US" altLang="ja-JP" sz="3200" b="0" dirty="0" smtClean="0"/>
+              <a:rPr lang="en-US" altLang="ja-JP" sz="3200" b="0" dirty="0"/>
               <a:t>: </a:t>
             </a:r>
             <a:r>
-              <a:rPr lang="en-US" altLang="ja-JP" sz="3200" b="0" i="1" dirty="0" smtClean="0"/>
+              <a:rPr lang="en-US" altLang="ja-JP" sz="3200" b="0" i="1" dirty="0"/>
               <a:t>a</a:t>
             </a:r>
             <a:r>
-              <a:rPr lang="en-US" altLang="ja-JP" sz="3200" b="0" dirty="0" smtClean="0"/>
+              <a:rPr lang="en-US" altLang="ja-JP" sz="3200" b="0" dirty="0"/>
               <a:t>, </a:t>
             </a:r>
             <a:r>
-              <a:rPr lang="en-US" altLang="ja-JP" sz="3200" b="0" i="1" dirty="0" smtClean="0"/>
+              <a:rPr lang="en-US" altLang="ja-JP" sz="3200" b="0" i="1" dirty="0"/>
               <a:t>a</a:t>
             </a:r>
             <a:r>
-              <a:rPr lang="en-US" altLang="ja-JP" sz="3200" b="0" baseline="-25000" dirty="0" smtClean="0"/>
+              <a:rPr lang="en-US" altLang="ja-JP" sz="3200" b="0" baseline="-25000" dirty="0"/>
               <a:t>1</a:t>
             </a:r>
             <a:r>
-              <a:rPr lang="en-US" altLang="ja-JP" sz="3200" b="0" dirty="0" smtClean="0"/>
+              <a:rPr lang="en-US" altLang="ja-JP" sz="3200" b="0" dirty="0"/>
               <a:t>, </a:t>
             </a:r>
             <a:r>
-              <a:rPr lang="en-US" altLang="ja-JP" sz="3200" b="0" i="1" dirty="0" smtClean="0"/>
+              <a:rPr lang="en-US" altLang="ja-JP" sz="3200" b="0" i="1" dirty="0"/>
               <a:t>a</a:t>
             </a:r>
             <a:r>
-              <a:rPr lang="en-US" altLang="ja-JP" sz="3200" b="0" baseline="-25000" dirty="0" smtClean="0"/>
+              <a:rPr lang="en-US" altLang="ja-JP" sz="3200" b="0" baseline="-25000" dirty="0"/>
               <a:t>2</a:t>
             </a:r>
             <a:r>
-              <a:rPr lang="ja-JP" altLang="en-US" sz="3200" b="0" dirty="0" smtClean="0"/>
+              <a:rPr lang="ja-JP" altLang="en-US" sz="3200" b="0" dirty="0"/>
               <a:t>等</a:t>
             </a:r>
             <a:endParaRPr lang="en-US" altLang="ja-JP" sz="3200" b="0" dirty="0"/>
@@ -13310,90 +12699,90 @@
               <a:t> </a:t>
             </a:r>
             <a:r>
-              <a:rPr lang="ja-JP" altLang="en-US" sz="3200" dirty="0" smtClean="0"/>
+              <a:rPr lang="ja-JP" altLang="en-US" sz="3200" dirty="0"/>
               <a:t>数字列</a:t>
             </a:r>
             <a:r>
-              <a:rPr lang="ja-JP" altLang="en-US" sz="3200" b="0" dirty="0" smtClean="0"/>
+              <a:rPr lang="ja-JP" altLang="en-US" sz="3200" b="0" dirty="0"/>
               <a:t> </a:t>
             </a:r>
             <a:r>
-              <a:rPr lang="en-US" altLang="ja-JP" sz="3200" b="0" dirty="0" smtClean="0"/>
+              <a:rPr lang="en-US" altLang="ja-JP" sz="3200" b="0" dirty="0"/>
               <a:t>: </a:t>
             </a:r>
             <a:r>
-              <a:rPr lang="en-US" altLang="ja-JP" sz="3200" b="0" i="1" dirty="0" smtClean="0"/>
+              <a:rPr lang="en-US" altLang="ja-JP" sz="3200" b="0" i="1" dirty="0"/>
               <a:t>n</a:t>
             </a:r>
             <a:r>
-              <a:rPr lang="en-US" altLang="ja-JP" sz="3200" b="0" dirty="0" smtClean="0"/>
+              <a:rPr lang="en-US" altLang="ja-JP" sz="3200" b="0" dirty="0"/>
               <a:t>, </a:t>
             </a:r>
             <a:r>
-              <a:rPr lang="en-US" altLang="ja-JP" sz="3200" b="0" i="1" dirty="0" smtClean="0"/>
+              <a:rPr lang="en-US" altLang="ja-JP" sz="3200" b="0" i="1" dirty="0"/>
               <a:t>n</a:t>
             </a:r>
             <a:r>
-              <a:rPr lang="en-US" altLang="ja-JP" sz="3200" b="0" baseline="-25000" dirty="0" smtClean="0"/>
+              <a:rPr lang="en-US" altLang="ja-JP" sz="3200" b="0" baseline="-25000" dirty="0"/>
               <a:t>1</a:t>
             </a:r>
             <a:r>
-              <a:rPr lang="en-US" altLang="ja-JP" sz="3200" b="0" dirty="0" smtClean="0"/>
+              <a:rPr lang="en-US" altLang="ja-JP" sz="3200" b="0" dirty="0"/>
               <a:t>, </a:t>
             </a:r>
             <a:r>
-              <a:rPr lang="en-US" altLang="ja-JP" sz="3200" b="0" i="1" dirty="0" smtClean="0"/>
+              <a:rPr lang="en-US" altLang="ja-JP" sz="3200" b="0" i="1" dirty="0"/>
               <a:t>n</a:t>
             </a:r>
             <a:r>
-              <a:rPr lang="en-US" altLang="ja-JP" sz="3200" b="0" baseline="-25000" dirty="0" smtClean="0"/>
+              <a:rPr lang="en-US" altLang="ja-JP" sz="3200" b="0" baseline="-25000" dirty="0"/>
               <a:t>2</a:t>
             </a:r>
             <a:r>
-              <a:rPr lang="ja-JP" altLang="en-US" sz="3200" b="0" dirty="0" smtClean="0"/>
+              <a:rPr lang="ja-JP" altLang="en-US" sz="3200" b="0" dirty="0"/>
               <a:t>等</a:t>
             </a:r>
-            <a:endParaRPr lang="en-US" altLang="ja-JP" sz="3200" b="0" dirty="0" smtClean="0"/>
-          </a:p>
-          <a:p>
-            <a:r>
-              <a:rPr lang="ja-JP" altLang="en-US" sz="3200" dirty="0" smtClean="0"/>
+            <a:endParaRPr lang="en-US" altLang="ja-JP" sz="3200" b="0" dirty="0"/>
+          </a:p>
+          <a:p>
+            <a:r>
+              <a:rPr lang="ja-JP" altLang="en-US" sz="3200" dirty="0"/>
               <a:t> 整数 </a:t>
             </a:r>
             <a:r>
-              <a:rPr lang="en-US" altLang="ja-JP" sz="3200" dirty="0" smtClean="0"/>
+              <a:rPr lang="en-US" altLang="ja-JP" sz="3200" dirty="0"/>
               <a:t>: </a:t>
             </a:r>
             <a:r>
-              <a:rPr lang="en-US" altLang="ja-JP" sz="3200" i="1" dirty="0" smtClean="0"/>
+              <a:rPr lang="en-US" altLang="ja-JP" sz="3200" i="1" dirty="0"/>
               <a:t>m</a:t>
             </a:r>
             <a:r>
-              <a:rPr lang="en-US" altLang="ja-JP" sz="3200" dirty="0" smtClean="0"/>
+              <a:rPr lang="en-US" altLang="ja-JP" sz="3200" dirty="0"/>
               <a:t>, </a:t>
             </a:r>
             <a:r>
-              <a:rPr lang="en-US" altLang="ja-JP" sz="3200" i="1" dirty="0" smtClean="0"/>
+              <a:rPr lang="en-US" altLang="ja-JP" sz="3200" i="1" dirty="0"/>
               <a:t>m</a:t>
             </a:r>
             <a:r>
-              <a:rPr lang="en-US" altLang="ja-JP" sz="3200" baseline="-25000" dirty="0" smtClean="0"/>
+              <a:rPr lang="en-US" altLang="ja-JP" sz="3200" baseline="-25000" dirty="0"/>
               <a:t>1</a:t>
             </a:r>
             <a:r>
-              <a:rPr lang="en-US" altLang="ja-JP" sz="3200" dirty="0" smtClean="0"/>
+              <a:rPr lang="en-US" altLang="ja-JP" sz="3200" dirty="0"/>
               <a:t>, </a:t>
             </a:r>
             <a:r>
-              <a:rPr lang="en-US" altLang="ja-JP" sz="3200" i="1" dirty="0" smtClean="0"/>
+              <a:rPr lang="en-US" altLang="ja-JP" sz="3200" i="1" dirty="0"/>
               <a:t>m</a:t>
             </a:r>
             <a:r>
-              <a:rPr lang="en-US" altLang="ja-JP" sz="3200" baseline="-25000" dirty="0" smtClean="0"/>
+              <a:rPr lang="en-US" altLang="ja-JP" sz="3200" baseline="-25000" dirty="0"/>
               <a:t>2</a:t>
             </a:r>
             <a:r>
-              <a:rPr lang="ja-JP" altLang="en-US" sz="3200" dirty="0" smtClean="0"/>
+              <a:rPr lang="ja-JP" altLang="en-US" sz="3200" dirty="0"/>
               <a:t>等</a:t>
             </a:r>
             <a:endParaRPr lang="en-US" altLang="ja-JP" sz="3200" b="0" dirty="0"/>
@@ -13404,74 +12793,74 @@
               <a:t> </a:t>
             </a:r>
             <a:r>
-              <a:rPr lang="ja-JP" altLang="en-US" sz="3200" b="0" dirty="0" smtClean="0"/>
+              <a:rPr lang="ja-JP" altLang="en-US" sz="3200" b="0" dirty="0"/>
               <a:t>変数 </a:t>
             </a:r>
             <a:r>
-              <a:rPr lang="en-US" altLang="ja-JP" sz="3200" b="0" dirty="0" smtClean="0"/>
+              <a:rPr lang="en-US" altLang="ja-JP" sz="3200" b="0" dirty="0"/>
               <a:t>: </a:t>
             </a:r>
             <a:r>
-              <a:rPr lang="en-US" altLang="ja-JP" sz="3200" b="0" i="1" dirty="0" smtClean="0"/>
+              <a:rPr lang="en-US" altLang="ja-JP" sz="3200" b="0" i="1" dirty="0"/>
               <a:t>x</a:t>
             </a:r>
             <a:r>
-              <a:rPr lang="en-US" altLang="ja-JP" sz="3200" b="0" dirty="0" smtClean="0"/>
+              <a:rPr lang="en-US" altLang="ja-JP" sz="3200" b="0" dirty="0"/>
               <a:t>, </a:t>
             </a:r>
             <a:r>
-              <a:rPr lang="en-US" altLang="ja-JP" sz="3200" b="0" i="1" dirty="0" smtClean="0"/>
+              <a:rPr lang="en-US" altLang="ja-JP" sz="3200" b="0" i="1" dirty="0"/>
               <a:t>y</a:t>
             </a:r>
             <a:r>
-              <a:rPr lang="ja-JP" altLang="en-US" sz="3200" b="0" dirty="0" smtClean="0"/>
+              <a:rPr lang="ja-JP" altLang="en-US" sz="3200" b="0" dirty="0"/>
               <a:t>等</a:t>
             </a:r>
-            <a:endParaRPr lang="en-US" altLang="ja-JP" sz="3200" b="0" dirty="0" smtClean="0"/>
-          </a:p>
-          <a:p>
-            <a:r>
-              <a:rPr lang="en-US" altLang="ja-JP" sz="3200" dirty="0" smtClean="0"/>
+            <a:endParaRPr lang="en-US" altLang="ja-JP" sz="3200" b="0" dirty="0"/>
+          </a:p>
+          <a:p>
+            <a:r>
+              <a:rPr lang="en-US" altLang="ja-JP" sz="3200" dirty="0"/>
               <a:t> </a:t>
             </a:r>
             <a:r>
-              <a:rPr lang="ja-JP" altLang="en-US" sz="3200" dirty="0" smtClean="0"/>
+              <a:rPr lang="ja-JP" altLang="en-US" sz="3200" dirty="0"/>
               <a:t>状態 </a:t>
             </a:r>
             <a:r>
-              <a:rPr lang="en-US" altLang="ja-JP" sz="3200" dirty="0" smtClean="0"/>
+              <a:rPr lang="en-US" altLang="ja-JP" sz="3200" dirty="0"/>
               <a:t>: </a:t>
             </a:r>
             <a:r>
-              <a:rPr lang="en-US" altLang="ja-JP" sz="3200" i="1" dirty="0" smtClean="0"/>
+              <a:rPr lang="en-US" altLang="ja-JP" sz="3200" i="1" dirty="0"/>
               <a:t>σ</a:t>
             </a:r>
             <a:r>
-              <a:rPr lang="en-US" altLang="ja-JP" sz="3200" dirty="0" smtClean="0"/>
+              <a:rPr lang="en-US" altLang="ja-JP" sz="3200" dirty="0"/>
               <a:t>, </a:t>
             </a:r>
             <a:r>
-              <a:rPr lang="en-US" altLang="ja-JP" sz="3200" i="1" dirty="0" smtClean="0"/>
+              <a:rPr lang="en-US" altLang="ja-JP" sz="3200" i="1" dirty="0"/>
               <a:t>σ</a:t>
             </a:r>
             <a:r>
-              <a:rPr lang="en-US" altLang="ja-JP" sz="3200" baseline="-25000" dirty="0" smtClean="0"/>
+              <a:rPr lang="en-US" altLang="ja-JP" sz="3200" baseline="-25000" dirty="0"/>
               <a:t>1</a:t>
             </a:r>
             <a:r>
-              <a:rPr lang="en-US" altLang="ja-JP" sz="3200" dirty="0" smtClean="0"/>
+              <a:rPr lang="en-US" altLang="ja-JP" sz="3200" dirty="0"/>
               <a:t>, </a:t>
             </a:r>
             <a:r>
-              <a:rPr lang="en-US" altLang="ja-JP" sz="3200" i="1" dirty="0" smtClean="0"/>
+              <a:rPr lang="en-US" altLang="ja-JP" sz="3200" i="1" dirty="0"/>
               <a:t>σ</a:t>
             </a:r>
             <a:r>
-              <a:rPr lang="en-US" altLang="ja-JP" sz="3200" baseline="-25000" dirty="0" smtClean="0"/>
+              <a:rPr lang="en-US" altLang="ja-JP" sz="3200" baseline="-25000" dirty="0"/>
               <a:t>2</a:t>
             </a:r>
             <a:r>
-              <a:rPr lang="ja-JP" altLang="en-US" sz="3200" dirty="0" smtClean="0"/>
+              <a:rPr lang="ja-JP" altLang="en-US" sz="3200" dirty="0"/>
               <a:t>等</a:t>
             </a:r>
             <a:endParaRPr lang="en-US" altLang="ja-JP" sz="3200" b="0" dirty="0"/>
@@ -13483,13 +12872,6 @@
   <p:clrMapOvr>
     <a:masterClrMapping/>
   </p:clrMapOvr>
-  <p:timing>
-    <p:tnLst>
-      <p:par>
-        <p:cTn xmlns:p14="http://schemas.microsoft.com/office/powerpoint/2010/main" id="1" dur="indefinite" restart="never" nodeType="tmRoot"/>
-      </p:par>
-    </p:tnLst>
-  </p:timing>
 </p:sld>
 </file>
 
@@ -13527,7 +12909,7 @@
           <a:p>
             <a:pPr eaLnBrk="1" hangingPunct="1"/>
             <a:r>
-              <a:rPr lang="ja-JP" altLang="en-US" dirty="0" smtClean="0"/>
+              <a:rPr lang="ja-JP" altLang="en-US" dirty="0"/>
               <a:t>算術式の評価</a:t>
             </a:r>
           </a:p>
@@ -13577,20 +12959,16 @@
             </a:r>
             <a:r>
               <a:rPr lang="ja-JP" altLang="en-US" sz="2800" b="0" dirty="0"/>
-              <a:t>を</a:t>
-            </a:r>
-            <a:r>
-              <a:rPr lang="ja-JP" altLang="en-US" sz="2800" b="0" dirty="0" smtClean="0"/>
-              <a:t>状態 </a:t>
-            </a:r>
-            <a:r>
-              <a:rPr lang="en-US" altLang="ja-JP" sz="2800" b="0" i="1" dirty="0" smtClean="0">
+              <a:t>を状態 </a:t>
+            </a:r>
+            <a:r>
+              <a:rPr lang="en-US" altLang="ja-JP" sz="2800" b="0" i="1" dirty="0">
                 <a:sym typeface="Symbol" pitchFamily="18" charset="2"/>
               </a:rPr>
               <a:t></a:t>
             </a:r>
             <a:r>
-              <a:rPr lang="en-US" altLang="ja-JP" sz="2800" b="0" dirty="0" smtClean="0">
+              <a:rPr lang="en-US" altLang="ja-JP" sz="2800" b="0" dirty="0">
                 <a:sym typeface="Symbol" pitchFamily="18" charset="2"/>
               </a:rPr>
               <a:t> </a:t>
@@ -13619,13 +12997,13 @@
               <a:t> </a:t>
             </a:r>
             <a:r>
-              <a:rPr lang="en-US" altLang="ja-JP" sz="2800" b="0" i="1" dirty="0" smtClean="0">
+              <a:rPr lang="en-US" altLang="ja-JP" sz="2800" b="0" i="1" dirty="0">
                 <a:sym typeface="Symbol" pitchFamily="18" charset="2"/>
               </a:rPr>
               <a:t>m</a:t>
             </a:r>
             <a:r>
-              <a:rPr lang="en-US" altLang="ja-JP" sz="2800" b="0" dirty="0" smtClean="0">
+              <a:rPr lang="en-US" altLang="ja-JP" sz="2800" b="0" dirty="0">
                 <a:sym typeface="Symbol" pitchFamily="18" charset="2"/>
               </a:rPr>
               <a:t> </a:t>
@@ -13672,14 +13050,11 @@
               <a:t> &gt;  </a:t>
             </a:r>
             <a:r>
-              <a:rPr lang="en-US" altLang="ja-JP" sz="2800" b="0" i="1" dirty="0" smtClean="0">
+              <a:rPr lang="en-US" altLang="ja-JP" sz="2800" b="0" i="1" dirty="0">
                 <a:sym typeface="Symbol" pitchFamily="18" charset="2"/>
               </a:rPr>
               <a:t>m</a:t>
             </a:r>
-            <a:endParaRPr lang="en-US" altLang="ja-JP" sz="2800" b="0" i="1" dirty="0">
-              <a:sym typeface="Symbol" pitchFamily="18" charset="2"/>
-            </a:endParaRPr>
           </a:p>
           <a:p>
             <a:r>
@@ -13736,13 +13111,13 @@
           </a:p>
           <a:p>
             <a:r>
-              <a:rPr lang="en-US" altLang="ja-JP" sz="2800" b="0" i="1" dirty="0" smtClean="0">
+              <a:rPr lang="en-US" altLang="ja-JP" sz="2800" b="0" i="1" dirty="0">
                 <a:sym typeface="Symbol" pitchFamily="18" charset="2"/>
               </a:rPr>
               <a:t></a:t>
             </a:r>
             <a:r>
-              <a:rPr lang="ja-JP" altLang="en-US" sz="2800" b="0" baseline="-25000" dirty="0" smtClean="0">
+              <a:rPr lang="ja-JP" altLang="en-US" sz="2800" b="0" baseline="-25000" dirty="0">
                 <a:sym typeface="Symbol" pitchFamily="18" charset="2"/>
               </a:rPr>
               <a:t>  </a:t>
@@ -13767,22 +13142,16 @@
               <a:t>          &lt; ((10 + 20) * 4), </a:t>
             </a:r>
             <a:r>
-              <a:rPr lang="en-US" altLang="ja-JP" sz="2800" b="0" i="1" dirty="0" smtClean="0">
+              <a:rPr lang="en-US" altLang="ja-JP" sz="2800" b="0" i="1" dirty="0">
                 <a:sym typeface="Symbol" pitchFamily="18" charset="2"/>
               </a:rPr>
               <a:t></a:t>
             </a:r>
             <a:r>
-              <a:rPr lang="en-US" altLang="ja-JP" sz="2800" b="0" dirty="0" smtClean="0">
-                <a:sym typeface="Symbol" pitchFamily="18" charset="2"/>
-              </a:rPr>
-              <a:t> </a:t>
-            </a:r>
-            <a:r>
               <a:rPr lang="en-US" altLang="ja-JP" sz="2800" b="0" dirty="0">
                 <a:sym typeface="Symbol" pitchFamily="18" charset="2"/>
               </a:rPr>
-              <a:t>&gt;  120 </a:t>
+              <a:t> &gt;  120 </a:t>
             </a:r>
           </a:p>
           <a:p>
@@ -13793,22 +13162,16 @@
               <a:t>          &lt; (5 * (X + 1)), </a:t>
             </a:r>
             <a:r>
-              <a:rPr lang="en-US" altLang="ja-JP" sz="2800" b="0" i="1" dirty="0" smtClean="0">
+              <a:rPr lang="en-US" altLang="ja-JP" sz="2800" b="0" i="1" dirty="0">
                 <a:sym typeface="Symbol" pitchFamily="18" charset="2"/>
               </a:rPr>
               <a:t></a:t>
             </a:r>
             <a:r>
-              <a:rPr lang="en-US" altLang="ja-JP" sz="2800" b="0" dirty="0" smtClean="0">
-                <a:sym typeface="Symbol" pitchFamily="18" charset="2"/>
-              </a:rPr>
-              <a:t> </a:t>
-            </a:r>
-            <a:r>
               <a:rPr lang="en-US" altLang="ja-JP" sz="2800" b="0" dirty="0">
                 <a:sym typeface="Symbol" pitchFamily="18" charset="2"/>
               </a:rPr>
-              <a:t>&gt;  20</a:t>
+              <a:t> &gt;  20</a:t>
             </a:r>
           </a:p>
           <a:p>
@@ -13827,13 +13190,6 @@
   <p:clrMapOvr>
     <a:masterClrMapping/>
   </p:clrMapOvr>
-  <p:timing>
-    <p:tnLst>
-      <p:par>
-        <p:cTn xmlns:p14="http://schemas.microsoft.com/office/powerpoint/2010/main" id="1" dur="indefinite" restart="never" nodeType="tmRoot"/>
-      </p:par>
-    </p:tnLst>
-  </p:timing>
 </p:sld>
 </file>
 
@@ -13871,7 +13227,7 @@
           <a:p>
             <a:pPr eaLnBrk="1" hangingPunct="1"/>
             <a:r>
-              <a:rPr lang="ja-JP" altLang="en-US" dirty="0" smtClean="0"/>
+              <a:rPr lang="ja-JP" altLang="en-US" dirty="0"/>
               <a:t>算術式の評価</a:t>
             </a:r>
           </a:p>
@@ -13908,36 +13264,16 @@
           <a:lstStyle/>
           <a:p>
             <a:r>
-              <a:rPr lang="en-US" altLang="ja-JP" sz="2800" b="0" dirty="0" smtClean="0"/>
-              <a:t>((10 </a:t>
-            </a:r>
-            <a:r>
               <a:rPr lang="en-US" altLang="ja-JP" sz="2800" b="0" dirty="0"/>
-              <a:t>+ </a:t>
-            </a:r>
-            <a:r>
-              <a:rPr lang="en-US" altLang="ja-JP" sz="2800" b="0" dirty="0" smtClean="0"/>
-              <a:t>20) </a:t>
-            </a:r>
-            <a:r>
-              <a:rPr lang="en-US" altLang="ja-JP" sz="2800" b="0" dirty="0"/>
-              <a:t>* 4) </a:t>
+              <a:t>((10 + 20) * 4) </a:t>
             </a:r>
             <a:r>
               <a:rPr lang="ja-JP" altLang="en-US" sz="2800" b="0" dirty="0"/>
               <a:t>という式は、まず</a:t>
             </a:r>
             <a:r>
-              <a:rPr lang="en-US" altLang="ja-JP" sz="2800" b="0" dirty="0" smtClean="0"/>
-              <a:t>(10 </a:t>
-            </a:r>
-            <a:r>
               <a:rPr lang="en-US" altLang="ja-JP" sz="2800" b="0" dirty="0"/>
-              <a:t>+ </a:t>
-            </a:r>
-            <a:r>
-              <a:rPr lang="en-US" altLang="ja-JP" sz="2800" b="0" dirty="0" smtClean="0"/>
-              <a:t>20) </a:t>
+              <a:t>(10 + 20) </a:t>
             </a:r>
             <a:r>
               <a:rPr lang="ja-JP" altLang="en-US" sz="2800" b="0" dirty="0" err="1"/>
@@ -13945,43 +13281,27 @@
             </a:r>
             <a:r>
               <a:rPr lang="ja-JP" altLang="en-US" sz="2800" b="0" dirty="0"/>
-              <a:t>価し</a:t>
-            </a:r>
-            <a:r>
-              <a:rPr lang="ja-JP" altLang="en-US" sz="2800" b="0" dirty="0" smtClean="0"/>
-              <a:t>、</a:t>
-            </a:r>
-            <a:r>
-              <a:rPr lang="en-US" altLang="ja-JP" sz="2800" dirty="0" smtClean="0"/>
+              <a:t>価し、</a:t>
+            </a:r>
+            <a:r>
+              <a:rPr lang="en-US" altLang="ja-JP" sz="2800" dirty="0"/>
               <a:t>30</a:t>
             </a:r>
             <a:r>
-              <a:rPr lang="ja-JP" altLang="en-US" sz="2800" b="0" dirty="0" smtClean="0"/>
-              <a:t>を</a:t>
-            </a:r>
-            <a:r>
               <a:rPr lang="ja-JP" altLang="en-US" sz="2800" b="0" dirty="0"/>
-              <a:t>得てから</a:t>
-            </a:r>
-            <a:r>
-              <a:rPr lang="ja-JP" altLang="en-US" sz="2800" b="0" dirty="0" smtClean="0"/>
-              <a:t>、</a:t>
-            </a:r>
-            <a:r>
-              <a:rPr lang="en-US" altLang="ja-JP" sz="2800" b="0" dirty="0" smtClean="0"/>
+              <a:t>を得てから、</a:t>
+            </a:r>
+            <a:r>
+              <a:rPr lang="en-US" altLang="ja-JP" sz="2800" b="0" dirty="0"/>
               <a:t>(</a:t>
             </a:r>
             <a:r>
-              <a:rPr lang="en-US" altLang="ja-JP" sz="2800" dirty="0" smtClean="0"/>
+              <a:rPr lang="en-US" altLang="ja-JP" sz="2800" dirty="0"/>
               <a:t>30</a:t>
             </a:r>
             <a:r>
-              <a:rPr lang="en-US" altLang="ja-JP" sz="2800" b="0" dirty="0" smtClean="0"/>
-              <a:t> </a:t>
-            </a:r>
-            <a:r>
               <a:rPr lang="en-US" altLang="ja-JP" sz="2800" b="0" dirty="0"/>
-              <a:t>* 4)</a:t>
+              <a:t> * 4)</a:t>
             </a:r>
             <a:r>
               <a:rPr lang="ja-JP" altLang="en-US" sz="2800" b="0" dirty="0"/>
@@ -13993,14 +13313,10 @@
             </a:r>
             <a:r>
               <a:rPr lang="ja-JP" altLang="en-US" sz="2800" b="0" dirty="0"/>
-              <a:t>価</a:t>
-            </a:r>
-            <a:r>
-              <a:rPr lang="ja-JP" altLang="en-US" sz="2800" b="0" dirty="0" smtClean="0"/>
-              <a:t>して</a:t>
-            </a:r>
-            <a:r>
-              <a:rPr lang="en-US" altLang="ja-JP" sz="2800" b="0" dirty="0" smtClean="0"/>
+              <a:t>価して</a:t>
+            </a:r>
+            <a:r>
+              <a:rPr lang="en-US" altLang="ja-JP" sz="2800" b="0" dirty="0"/>
               <a:t>120</a:t>
             </a:r>
             <a:r>
@@ -14022,13 +13338,6 @@
   <p:clrMapOvr>
     <a:masterClrMapping/>
   </p:clrMapOvr>
-  <p:timing>
-    <p:tnLst>
-      <p:par>
-        <p:cTn xmlns:p14="http://schemas.microsoft.com/office/powerpoint/2010/main" id="1" dur="indefinite" restart="never" nodeType="tmRoot"/>
-      </p:par>
-    </p:tnLst>
-  </p:timing>
 </p:sld>
 </file>
 
@@ -14066,7 +13375,7 @@
           <a:p>
             <a:pPr eaLnBrk="1" hangingPunct="1"/>
             <a:r>
-              <a:rPr lang="ja-JP" altLang="en-US" dirty="0" smtClean="0"/>
+              <a:rPr lang="ja-JP" altLang="en-US" dirty="0"/>
               <a:t>算術式の評価規則</a:t>
             </a:r>
           </a:p>
@@ -14112,19 +13421,7 @@
               <a:rPr lang="ja-JP" altLang="en-US" sz="2800" b="0" dirty="0">
                 <a:sym typeface="Symbol" pitchFamily="18" charset="2"/>
               </a:rPr>
-              <a:t>式</a:t>
-            </a:r>
-            <a:r>
-              <a:rPr lang="ja-JP" altLang="en-US" sz="2800" b="0" dirty="0" smtClean="0">
-                <a:sym typeface="Symbol" pitchFamily="18" charset="2"/>
-              </a:rPr>
-              <a:t>が数字列の</a:t>
-            </a:r>
-            <a:r>
-              <a:rPr lang="ja-JP" altLang="en-US" sz="2800" b="0" dirty="0">
-                <a:sym typeface="Symbol" pitchFamily="18" charset="2"/>
-              </a:rPr>
-              <a:t>場合</a:t>
+              <a:t>式が数字列の場合</a:t>
             </a:r>
             <a:endParaRPr lang="en-US" altLang="ja-JP" sz="2800" b="0" dirty="0">
               <a:sym typeface="Symbol" pitchFamily="18" charset="2"/>
@@ -14162,43 +13459,43 @@
               <a:t> &gt;  </a:t>
             </a:r>
             <a:r>
-              <a:rPr lang="en-US" altLang="ja-JP" sz="2800" i="1" dirty="0" smtClean="0">
+              <a:rPr lang="en-US" altLang="ja-JP" sz="2800" i="1" dirty="0">
                 <a:sym typeface="Symbol" pitchFamily="18" charset="2"/>
               </a:rPr>
               <a:t>m  </a:t>
             </a:r>
             <a:r>
-              <a:rPr lang="ja-JP" altLang="en-US" sz="2800" dirty="0" smtClean="0">
+              <a:rPr lang="ja-JP" altLang="en-US" sz="2800" dirty="0">
                 <a:sym typeface="Symbol" pitchFamily="18" charset="2"/>
               </a:rPr>
               <a:t>（</a:t>
             </a:r>
             <a:r>
-              <a:rPr lang="en-US" altLang="ja-JP" sz="2800" i="1" dirty="0" smtClean="0">
+              <a:rPr lang="en-US" altLang="ja-JP" sz="2800" i="1" dirty="0">
                 <a:sym typeface="Symbol" pitchFamily="18" charset="2"/>
               </a:rPr>
               <a:t>m</a:t>
             </a:r>
             <a:r>
-              <a:rPr lang="ja-JP" altLang="en-US" sz="2800" dirty="0" smtClean="0">
+              <a:rPr lang="ja-JP" altLang="en-US" sz="2800" dirty="0">
                 <a:sym typeface="Symbol" pitchFamily="18" charset="2"/>
               </a:rPr>
               <a:t>は数字列</a:t>
             </a:r>
             <a:r>
-              <a:rPr lang="en-US" altLang="ja-JP" sz="2800" i="1" dirty="0" smtClean="0">
+              <a:rPr lang="en-US" altLang="ja-JP" sz="2800" i="1" dirty="0">
                 <a:sym typeface="Symbol" pitchFamily="18" charset="2"/>
               </a:rPr>
               <a:t>n</a:t>
             </a:r>
             <a:r>
-              <a:rPr lang="ja-JP" altLang="en-US" sz="2800" dirty="0" smtClean="0">
+              <a:rPr lang="ja-JP" altLang="en-US" sz="2800" dirty="0">
                 <a:sym typeface="Symbol" pitchFamily="18" charset="2"/>
               </a:rPr>
               <a:t>に対応する整数</a:t>
             </a:r>
             <a:r>
-              <a:rPr lang="en-US" altLang="ja-JP" sz="2800" dirty="0" smtClean="0">
+              <a:rPr lang="en-US" altLang="ja-JP" sz="2800" dirty="0">
                 <a:sym typeface="Symbol" pitchFamily="18" charset="2"/>
               </a:rPr>
               <a:t>)</a:t>
@@ -14309,19 +13606,19 @@
               <a:t> &lt; </a:t>
             </a:r>
             <a:r>
-              <a:rPr lang="en-US" altLang="ja-JP" sz="2800" b="0" i="1" dirty="0" smtClean="0">
+              <a:rPr lang="en-US" altLang="ja-JP" sz="2800" b="0" i="1" dirty="0">
                 <a:sym typeface="Symbol" pitchFamily="18" charset="2"/>
               </a:rPr>
               <a:t>a</a:t>
             </a:r>
             <a:r>
-              <a:rPr lang="en-US" altLang="ja-JP" sz="2800" b="0" baseline="-25000" dirty="0" smtClean="0">
+              <a:rPr lang="en-US" altLang="ja-JP" sz="2800" b="0" baseline="-25000" dirty="0">
                 <a:sym typeface="Symbol" pitchFamily="18" charset="2"/>
               </a:rPr>
               <a:t>1</a:t>
             </a:r>
             <a:r>
-              <a:rPr lang="en-US" altLang="ja-JP" sz="2800" b="0" dirty="0" smtClean="0">
+              <a:rPr lang="en-US" altLang="ja-JP" sz="2800" b="0" dirty="0">
                 <a:sym typeface="Symbol" pitchFamily="18" charset="2"/>
               </a:rPr>
               <a:t>, </a:t>
@@ -14339,43 +13636,37 @@
               <a:t> &gt;  </a:t>
             </a:r>
             <a:r>
-              <a:rPr lang="en-US" altLang="ja-JP" sz="2800" b="0" i="1" dirty="0" smtClean="0">
+              <a:rPr lang="en-US" altLang="ja-JP" sz="2800" b="0" i="1" dirty="0">
                 <a:sym typeface="Symbol" pitchFamily="18" charset="2"/>
               </a:rPr>
               <a:t>m</a:t>
             </a:r>
             <a:r>
-              <a:rPr lang="en-US" altLang="ja-JP" sz="2800" b="0" baseline="-25000" dirty="0" smtClean="0">
+              <a:rPr lang="en-US" altLang="ja-JP" sz="2800" b="0" baseline="-25000" dirty="0">
                 <a:sym typeface="Symbol" pitchFamily="18" charset="2"/>
               </a:rPr>
               <a:t>1</a:t>
             </a:r>
             <a:r>
-              <a:rPr lang="en-US" altLang="ja-JP" sz="2800" b="0" dirty="0" smtClean="0">
-                <a:sym typeface="Symbol" pitchFamily="18" charset="2"/>
-              </a:rPr>
-              <a:t>       </a:t>
-            </a:r>
-            <a:r>
               <a:rPr lang="en-US" altLang="ja-JP" sz="2800" b="0" dirty="0">
                 <a:sym typeface="Symbol" pitchFamily="18" charset="2"/>
               </a:rPr>
-              <a:t>&lt; </a:t>
-            </a:r>
-            <a:r>
-              <a:rPr lang="en-US" altLang="ja-JP" sz="2800" b="0" i="1" dirty="0" smtClean="0">
+              <a:t>       &lt; </a:t>
+            </a:r>
+            <a:r>
+              <a:rPr lang="en-US" altLang="ja-JP" sz="2800" b="0" i="1" dirty="0">
                 <a:sym typeface="Symbol" pitchFamily="18" charset="2"/>
               </a:rPr>
               <a:t>a</a:t>
             </a:r>
             <a:r>
-              <a:rPr lang="en-US" altLang="ja-JP" sz="2800" b="0" baseline="-25000" dirty="0" smtClean="0">
+              <a:rPr lang="en-US" altLang="ja-JP" sz="2800" b="0" baseline="-25000" dirty="0">
                 <a:sym typeface="Symbol" pitchFamily="18" charset="2"/>
               </a:rPr>
               <a:t>2</a:t>
             </a:r>
             <a:r>
-              <a:rPr lang="en-US" altLang="ja-JP" sz="2800" b="0" dirty="0" smtClean="0">
+              <a:rPr lang="en-US" altLang="ja-JP" sz="2800" b="0" dirty="0">
                 <a:sym typeface="Symbol" pitchFamily="18" charset="2"/>
               </a:rPr>
               <a:t>, </a:t>
@@ -14393,20 +13684,17 @@
               <a:t> &gt;  </a:t>
             </a:r>
             <a:r>
-              <a:rPr lang="en-US" altLang="ja-JP" sz="2800" b="0" i="1" dirty="0" smtClean="0">
+              <a:rPr lang="en-US" altLang="ja-JP" sz="2800" b="0" i="1" dirty="0">
                 <a:sym typeface="Symbol" pitchFamily="18" charset="2"/>
               </a:rPr>
               <a:t>m</a:t>
             </a:r>
             <a:r>
-              <a:rPr lang="en-US" altLang="ja-JP" sz="2800" b="0" baseline="-25000" dirty="0" smtClean="0">
+              <a:rPr lang="en-US" altLang="ja-JP" sz="2800" b="0" baseline="-25000" dirty="0">
                 <a:sym typeface="Symbol" pitchFamily="18" charset="2"/>
               </a:rPr>
               <a:t>2</a:t>
             </a:r>
-            <a:endParaRPr lang="en-US" altLang="ja-JP" sz="2800" b="0" baseline="-25000" dirty="0">
-              <a:sym typeface="Symbol" pitchFamily="18" charset="2"/>
-            </a:endParaRPr>
           </a:p>
           <a:p>
             <a:r>
@@ -14416,13 +13704,13 @@
               <a:t>              &lt; (</a:t>
             </a:r>
             <a:r>
-              <a:rPr lang="en-US" altLang="ja-JP" sz="2800" b="0" i="1" dirty="0" smtClean="0">
+              <a:rPr lang="en-US" altLang="ja-JP" sz="2800" b="0" i="1" dirty="0">
                 <a:sym typeface="Symbol" pitchFamily="18" charset="2"/>
               </a:rPr>
               <a:t>a</a:t>
             </a:r>
             <a:r>
-              <a:rPr lang="en-US" altLang="ja-JP" sz="2800" b="0" baseline="-25000" dirty="0" smtClean="0">
+              <a:rPr lang="en-US" altLang="ja-JP" sz="2800" b="0" baseline="-25000" dirty="0">
                 <a:sym typeface="Symbol" pitchFamily="18" charset="2"/>
               </a:rPr>
               <a:t>1  </a:t>
@@ -14434,28 +13722,22 @@
               <a:t>+ </a:t>
             </a:r>
             <a:r>
-              <a:rPr lang="en-US" altLang="ja-JP" sz="2800" b="0" i="1" dirty="0" smtClean="0">
+              <a:rPr lang="en-US" altLang="ja-JP" sz="2800" b="0" i="1" dirty="0">
                 <a:sym typeface="Symbol" pitchFamily="18" charset="2"/>
               </a:rPr>
               <a:t>a</a:t>
             </a:r>
             <a:r>
-              <a:rPr lang="en-US" altLang="ja-JP" sz="2800" b="0" baseline="-25000" dirty="0" smtClean="0">
+              <a:rPr lang="en-US" altLang="ja-JP" sz="2800" b="0" baseline="-25000" dirty="0">
                 <a:sym typeface="Symbol" pitchFamily="18" charset="2"/>
               </a:rPr>
               <a:t>2</a:t>
             </a:r>
             <a:r>
-              <a:rPr lang="en-US" altLang="ja-JP" sz="2800" b="0" dirty="0" smtClean="0">
-                <a:sym typeface="Symbol" pitchFamily="18" charset="2"/>
-              </a:rPr>
-              <a:t> </a:t>
-            </a:r>
-            <a:r>
               <a:rPr lang="en-US" altLang="ja-JP" sz="2800" b="0" dirty="0">
                 <a:sym typeface="Symbol" pitchFamily="18" charset="2"/>
               </a:rPr>
-              <a:t>), </a:t>
+              <a:t> ), </a:t>
             </a:r>
             <a:r>
               <a:rPr lang="en-US" altLang="ja-JP" sz="2800" b="0" i="1" dirty="0">
@@ -14470,7 +13752,7 @@
               <a:t> &gt;  </a:t>
             </a:r>
             <a:r>
-              <a:rPr lang="en-US" altLang="ja-JP" sz="2800" b="0" i="1" dirty="0" smtClean="0">
+              <a:rPr lang="en-US" altLang="ja-JP" sz="2800" b="0" i="1" dirty="0">
                 <a:sym typeface="Symbol" pitchFamily="18" charset="2"/>
               </a:rPr>
               <a:t>m     </a:t>
@@ -14537,44 +13819,40 @@
           <a:lstStyle/>
           <a:p>
             <a:r>
-              <a:rPr lang="ja-JP" altLang="en-US" sz="2800" b="0" dirty="0" smtClean="0"/>
+              <a:rPr lang="ja-JP" altLang="en-US" sz="2800" b="0" dirty="0"/>
               <a:t>（</a:t>
             </a:r>
             <a:r>
-              <a:rPr lang="en-US" altLang="ja-JP" sz="2800" b="0" i="1" dirty="0" smtClean="0"/>
+              <a:rPr lang="en-US" altLang="ja-JP" sz="2800" b="0" i="1" dirty="0"/>
               <a:t>m</a:t>
             </a:r>
             <a:r>
-              <a:rPr lang="ja-JP" altLang="en-US" sz="2800" b="0" dirty="0" smtClean="0"/>
+              <a:rPr lang="ja-JP" altLang="en-US" sz="2800" b="0" dirty="0"/>
               <a:t>は</a:t>
             </a:r>
             <a:r>
-              <a:rPr lang="en-US" altLang="ja-JP" sz="2800" b="0" i="1" dirty="0" smtClean="0"/>
+              <a:rPr lang="en-US" altLang="ja-JP" sz="2800" b="0" i="1" dirty="0"/>
               <a:t>m</a:t>
             </a:r>
             <a:r>
-              <a:rPr lang="en-US" altLang="ja-JP" sz="2800" b="0" baseline="-25000" dirty="0" smtClean="0"/>
+              <a:rPr lang="en-US" altLang="ja-JP" sz="2800" b="0" baseline="-25000" dirty="0"/>
               <a:t>1</a:t>
             </a:r>
             <a:r>
-              <a:rPr lang="ja-JP" altLang="en-US" sz="2800" b="0" dirty="0" smtClean="0"/>
+              <a:rPr lang="ja-JP" altLang="en-US" sz="2800" b="0" dirty="0"/>
               <a:t>と</a:t>
             </a:r>
             <a:r>
-              <a:rPr lang="en-US" altLang="ja-JP" sz="2800" b="0" i="1" dirty="0" smtClean="0"/>
+              <a:rPr lang="en-US" altLang="ja-JP" sz="2800" b="0" i="1" dirty="0"/>
               <a:t>m</a:t>
             </a:r>
             <a:r>
-              <a:rPr lang="en-US" altLang="ja-JP" sz="2800" b="0" baseline="-25000" dirty="0" smtClean="0"/>
+              <a:rPr lang="en-US" altLang="ja-JP" sz="2800" b="0" baseline="-25000" dirty="0"/>
               <a:t>2</a:t>
             </a:r>
             <a:r>
-              <a:rPr lang="ja-JP" altLang="en-US" sz="2800" b="0" dirty="0" smtClean="0"/>
-              <a:t>の</a:t>
-            </a:r>
-            <a:r>
               <a:rPr lang="ja-JP" altLang="en-US" sz="2800" b="0" dirty="0"/>
-              <a:t>和）</a:t>
+              <a:t>の和）</a:t>
             </a:r>
           </a:p>
         </p:txBody>
@@ -14584,13 +13862,6 @@
   <p:clrMapOvr>
     <a:masterClrMapping/>
   </p:clrMapOvr>
-  <p:timing>
-    <p:tnLst>
-      <p:par>
-        <p:cTn xmlns:p14="http://schemas.microsoft.com/office/powerpoint/2010/main" id="1" dur="indefinite" restart="never" nodeType="tmRoot"/>
-      </p:par>
-    </p:tnLst>
-  </p:timing>
 </p:sld>
 </file>
 
@@ -14628,7 +13899,7 @@
           <a:p>
             <a:pPr eaLnBrk="1" hangingPunct="1"/>
             <a:r>
-              <a:rPr lang="ja-JP" altLang="en-US" dirty="0" smtClean="0"/>
+              <a:rPr lang="ja-JP" altLang="en-US" dirty="0"/>
               <a:t>算術式の評価規則（続き）</a:t>
             </a:r>
           </a:p>
@@ -14688,19 +13959,19 @@
               <a:t> &lt; </a:t>
             </a:r>
             <a:r>
-              <a:rPr lang="en-US" altLang="ja-JP" sz="2800" b="0" i="1" dirty="0" smtClean="0">
+              <a:rPr lang="en-US" altLang="ja-JP" sz="2800" b="0" i="1" dirty="0">
                 <a:sym typeface="Symbol" pitchFamily="18" charset="2"/>
               </a:rPr>
               <a:t>a</a:t>
             </a:r>
             <a:r>
-              <a:rPr lang="en-US" altLang="ja-JP" sz="2800" b="0" baseline="-25000" dirty="0" smtClean="0">
+              <a:rPr lang="en-US" altLang="ja-JP" sz="2800" b="0" baseline="-25000" dirty="0">
                 <a:sym typeface="Symbol" pitchFamily="18" charset="2"/>
               </a:rPr>
               <a:t>1</a:t>
             </a:r>
             <a:r>
-              <a:rPr lang="en-US" altLang="ja-JP" sz="2800" b="0" dirty="0" smtClean="0">
+              <a:rPr lang="en-US" altLang="ja-JP" sz="2800" b="0" dirty="0">
                 <a:sym typeface="Symbol" pitchFamily="18" charset="2"/>
               </a:rPr>
               <a:t>, </a:t>
@@ -14718,43 +13989,37 @@
               <a:t> &gt;  </a:t>
             </a:r>
             <a:r>
-              <a:rPr lang="en-US" altLang="ja-JP" sz="2800" b="0" i="1" dirty="0" smtClean="0">
+              <a:rPr lang="en-US" altLang="ja-JP" sz="2800" b="0" i="1" dirty="0">
                 <a:sym typeface="Symbol" pitchFamily="18" charset="2"/>
               </a:rPr>
               <a:t>m</a:t>
             </a:r>
             <a:r>
-              <a:rPr lang="en-US" altLang="ja-JP" sz="2800" b="0" baseline="-25000" dirty="0" smtClean="0">
+              <a:rPr lang="en-US" altLang="ja-JP" sz="2800" b="0" baseline="-25000" dirty="0">
                 <a:sym typeface="Symbol" pitchFamily="18" charset="2"/>
               </a:rPr>
               <a:t>1</a:t>
             </a:r>
             <a:r>
-              <a:rPr lang="en-US" altLang="ja-JP" sz="2800" b="0" dirty="0" smtClean="0">
-                <a:sym typeface="Symbol" pitchFamily="18" charset="2"/>
-              </a:rPr>
-              <a:t>       </a:t>
-            </a:r>
-            <a:r>
               <a:rPr lang="en-US" altLang="ja-JP" sz="2800" b="0" dirty="0">
                 <a:sym typeface="Symbol" pitchFamily="18" charset="2"/>
               </a:rPr>
-              <a:t>&lt; </a:t>
-            </a:r>
-            <a:r>
-              <a:rPr lang="en-US" altLang="ja-JP" sz="2800" b="0" i="1" dirty="0" smtClean="0">
+              <a:t>       &lt; </a:t>
+            </a:r>
+            <a:r>
+              <a:rPr lang="en-US" altLang="ja-JP" sz="2800" b="0" i="1" dirty="0">
                 <a:sym typeface="Symbol" pitchFamily="18" charset="2"/>
               </a:rPr>
               <a:t>a</a:t>
             </a:r>
             <a:r>
-              <a:rPr lang="en-US" altLang="ja-JP" sz="2800" b="0" baseline="-25000" dirty="0" smtClean="0">
+              <a:rPr lang="en-US" altLang="ja-JP" sz="2800" b="0" baseline="-25000" dirty="0">
                 <a:sym typeface="Symbol" pitchFamily="18" charset="2"/>
               </a:rPr>
               <a:t>2</a:t>
             </a:r>
             <a:r>
-              <a:rPr lang="en-US" altLang="ja-JP" sz="2800" b="0" dirty="0" smtClean="0">
+              <a:rPr lang="en-US" altLang="ja-JP" sz="2800" b="0" dirty="0">
                 <a:sym typeface="Symbol" pitchFamily="18" charset="2"/>
               </a:rPr>
               <a:t>, </a:t>
@@ -14772,20 +14037,17 @@
               <a:t> &gt;  </a:t>
             </a:r>
             <a:r>
-              <a:rPr lang="en-US" altLang="ja-JP" sz="2800" b="0" i="1" dirty="0" smtClean="0">
+              <a:rPr lang="en-US" altLang="ja-JP" sz="2800" b="0" i="1" dirty="0">
                 <a:sym typeface="Symbol" pitchFamily="18" charset="2"/>
               </a:rPr>
               <a:t>m</a:t>
             </a:r>
             <a:r>
-              <a:rPr lang="en-US" altLang="ja-JP" sz="2800" b="0" baseline="-25000" dirty="0" smtClean="0">
+              <a:rPr lang="en-US" altLang="ja-JP" sz="2800" b="0" baseline="-25000" dirty="0">
                 <a:sym typeface="Symbol" pitchFamily="18" charset="2"/>
               </a:rPr>
               <a:t>2</a:t>
             </a:r>
-            <a:endParaRPr lang="en-US" altLang="ja-JP" sz="2800" b="0" baseline="-25000" dirty="0">
-              <a:sym typeface="Symbol" pitchFamily="18" charset="2"/>
-            </a:endParaRPr>
           </a:p>
           <a:p>
             <a:r>
@@ -14795,13 +14057,13 @@
               <a:t>              &lt; (</a:t>
             </a:r>
             <a:r>
-              <a:rPr lang="en-US" altLang="ja-JP" sz="2800" b="0" i="1" dirty="0" smtClean="0">
+              <a:rPr lang="en-US" altLang="ja-JP" sz="2800" b="0" i="1" dirty="0">
                 <a:sym typeface="Symbol" pitchFamily="18" charset="2"/>
               </a:rPr>
               <a:t>a</a:t>
             </a:r>
             <a:r>
-              <a:rPr lang="en-US" altLang="ja-JP" sz="2800" b="0" baseline="-25000" dirty="0" smtClean="0">
+              <a:rPr lang="en-US" altLang="ja-JP" sz="2800" b="0" baseline="-25000" dirty="0">
                 <a:sym typeface="Symbol" pitchFamily="18" charset="2"/>
               </a:rPr>
               <a:t>1  </a:t>
@@ -14813,28 +14075,22 @@
               <a:t>- </a:t>
             </a:r>
             <a:r>
-              <a:rPr lang="en-US" altLang="ja-JP" sz="2800" b="0" i="1" dirty="0" smtClean="0">
+              <a:rPr lang="en-US" altLang="ja-JP" sz="2800" b="0" i="1" dirty="0">
                 <a:sym typeface="Symbol" pitchFamily="18" charset="2"/>
               </a:rPr>
               <a:t>a</a:t>
             </a:r>
             <a:r>
-              <a:rPr lang="en-US" altLang="ja-JP" sz="2800" b="0" baseline="-25000" dirty="0" smtClean="0">
+              <a:rPr lang="en-US" altLang="ja-JP" sz="2800" b="0" baseline="-25000" dirty="0">
                 <a:sym typeface="Symbol" pitchFamily="18" charset="2"/>
               </a:rPr>
               <a:t>2</a:t>
             </a:r>
             <a:r>
-              <a:rPr lang="en-US" altLang="ja-JP" sz="2800" b="0" dirty="0" smtClean="0">
-                <a:sym typeface="Symbol" pitchFamily="18" charset="2"/>
-              </a:rPr>
-              <a:t> </a:t>
-            </a:r>
-            <a:r>
               <a:rPr lang="en-US" altLang="ja-JP" sz="2800" b="0" dirty="0">
                 <a:sym typeface="Symbol" pitchFamily="18" charset="2"/>
               </a:rPr>
-              <a:t>), </a:t>
+              <a:t> ), </a:t>
             </a:r>
             <a:r>
               <a:rPr lang="en-US" altLang="ja-JP" sz="2800" b="0" i="1" dirty="0">
@@ -14849,7 +14105,7 @@
               <a:t> &gt;  </a:t>
             </a:r>
             <a:r>
-              <a:rPr lang="en-US" altLang="ja-JP" sz="2800" b="0" i="1" dirty="0" smtClean="0">
+              <a:rPr lang="en-US" altLang="ja-JP" sz="2800" b="0" i="1" dirty="0">
                 <a:sym typeface="Symbol" pitchFamily="18" charset="2"/>
               </a:rPr>
               <a:t>m     </a:t>
@@ -14916,44 +14172,40 @@
           <a:lstStyle/>
           <a:p>
             <a:r>
-              <a:rPr lang="ja-JP" altLang="en-US" sz="2800" b="0" dirty="0" smtClean="0"/>
+              <a:rPr lang="ja-JP" altLang="en-US" sz="2800" b="0" dirty="0"/>
               <a:t>（</a:t>
             </a:r>
             <a:r>
-              <a:rPr lang="en-US" altLang="ja-JP" sz="2800" b="0" i="1" dirty="0" smtClean="0"/>
+              <a:rPr lang="en-US" altLang="ja-JP" sz="2800" b="0" i="1" dirty="0"/>
               <a:t>m</a:t>
             </a:r>
             <a:r>
-              <a:rPr lang="ja-JP" altLang="en-US" sz="2800" b="0" dirty="0" smtClean="0"/>
+              <a:rPr lang="ja-JP" altLang="en-US" sz="2800" b="0" dirty="0"/>
               <a:t>は</a:t>
             </a:r>
             <a:r>
-              <a:rPr lang="en-US" altLang="ja-JP" sz="2800" b="0" i="1" dirty="0" smtClean="0"/>
+              <a:rPr lang="en-US" altLang="ja-JP" sz="2800" b="0" i="1" dirty="0"/>
               <a:t>m</a:t>
             </a:r>
             <a:r>
-              <a:rPr lang="en-US" altLang="ja-JP" sz="2800" b="0" baseline="-25000" dirty="0" smtClean="0"/>
+              <a:rPr lang="en-US" altLang="ja-JP" sz="2800" b="0" baseline="-25000" dirty="0"/>
               <a:t>1</a:t>
             </a:r>
             <a:r>
-              <a:rPr lang="ja-JP" altLang="en-US" sz="2800" b="0" dirty="0" smtClean="0"/>
+              <a:rPr lang="ja-JP" altLang="en-US" sz="2800" b="0" dirty="0"/>
               <a:t>と</a:t>
             </a:r>
             <a:r>
-              <a:rPr lang="en-US" altLang="ja-JP" sz="2800" b="0" i="1" dirty="0" smtClean="0"/>
+              <a:rPr lang="en-US" altLang="ja-JP" sz="2800" b="0" i="1" dirty="0"/>
               <a:t>m</a:t>
             </a:r>
             <a:r>
-              <a:rPr lang="en-US" altLang="ja-JP" sz="2800" b="0" baseline="-25000" dirty="0" smtClean="0"/>
+              <a:rPr lang="en-US" altLang="ja-JP" sz="2800" b="0" baseline="-25000" dirty="0"/>
               <a:t>2</a:t>
             </a:r>
             <a:r>
-              <a:rPr lang="ja-JP" altLang="en-US" sz="2800" b="0" dirty="0" smtClean="0"/>
-              <a:t>の</a:t>
-            </a:r>
-            <a:r>
               <a:rPr lang="ja-JP" altLang="en-US" sz="2800" b="0" dirty="0"/>
-              <a:t>差）</a:t>
+              <a:t>の差）</a:t>
             </a:r>
           </a:p>
         </p:txBody>
@@ -15012,19 +14264,19 @@
               <a:t> &lt; </a:t>
             </a:r>
             <a:r>
-              <a:rPr lang="en-US" altLang="ja-JP" sz="2800" b="0" i="1" dirty="0" smtClean="0">
+              <a:rPr lang="en-US" altLang="ja-JP" sz="2800" b="0" i="1" dirty="0">
                 <a:sym typeface="Symbol" pitchFamily="18" charset="2"/>
               </a:rPr>
               <a:t>a</a:t>
             </a:r>
             <a:r>
-              <a:rPr lang="en-US" altLang="ja-JP" sz="2800" b="0" baseline="-25000" dirty="0" smtClean="0">
+              <a:rPr lang="en-US" altLang="ja-JP" sz="2800" b="0" baseline="-25000" dirty="0">
                 <a:sym typeface="Symbol" pitchFamily="18" charset="2"/>
               </a:rPr>
               <a:t>1</a:t>
             </a:r>
             <a:r>
-              <a:rPr lang="en-US" altLang="ja-JP" sz="2800" b="0" dirty="0" smtClean="0">
+              <a:rPr lang="en-US" altLang="ja-JP" sz="2800" b="0" dirty="0">
                 <a:sym typeface="Symbol" pitchFamily="18" charset="2"/>
               </a:rPr>
               <a:t>, </a:t>
@@ -15042,43 +14294,37 @@
               <a:t> &gt;  </a:t>
             </a:r>
             <a:r>
-              <a:rPr lang="en-US" altLang="ja-JP" sz="2800" b="0" i="1" dirty="0" smtClean="0">
+              <a:rPr lang="en-US" altLang="ja-JP" sz="2800" b="0" i="1" dirty="0">
                 <a:sym typeface="Symbol" pitchFamily="18" charset="2"/>
               </a:rPr>
               <a:t>m</a:t>
             </a:r>
             <a:r>
-              <a:rPr lang="en-US" altLang="ja-JP" sz="2800" b="0" baseline="-25000" dirty="0" smtClean="0">
+              <a:rPr lang="en-US" altLang="ja-JP" sz="2800" b="0" baseline="-25000" dirty="0">
                 <a:sym typeface="Symbol" pitchFamily="18" charset="2"/>
               </a:rPr>
               <a:t>1</a:t>
             </a:r>
             <a:r>
-              <a:rPr lang="en-US" altLang="ja-JP" sz="2800" b="0" dirty="0" smtClean="0">
-                <a:sym typeface="Symbol" pitchFamily="18" charset="2"/>
-              </a:rPr>
-              <a:t>       </a:t>
-            </a:r>
-            <a:r>
               <a:rPr lang="en-US" altLang="ja-JP" sz="2800" b="0" dirty="0">
                 <a:sym typeface="Symbol" pitchFamily="18" charset="2"/>
               </a:rPr>
-              <a:t>&lt; </a:t>
-            </a:r>
-            <a:r>
-              <a:rPr lang="en-US" altLang="ja-JP" sz="2800" b="0" i="1" dirty="0" smtClean="0">
+              <a:t>       &lt; </a:t>
+            </a:r>
+            <a:r>
+              <a:rPr lang="en-US" altLang="ja-JP" sz="2800" b="0" i="1" dirty="0">
                 <a:sym typeface="Symbol" pitchFamily="18" charset="2"/>
               </a:rPr>
               <a:t>a</a:t>
             </a:r>
             <a:r>
-              <a:rPr lang="en-US" altLang="ja-JP" sz="2800" b="0" baseline="-25000" dirty="0" smtClean="0">
+              <a:rPr lang="en-US" altLang="ja-JP" sz="2800" b="0" baseline="-25000" dirty="0">
                 <a:sym typeface="Symbol" pitchFamily="18" charset="2"/>
               </a:rPr>
               <a:t>2</a:t>
             </a:r>
             <a:r>
-              <a:rPr lang="en-US" altLang="ja-JP" sz="2800" b="0" dirty="0" smtClean="0">
+              <a:rPr lang="en-US" altLang="ja-JP" sz="2800" b="0" dirty="0">
                 <a:sym typeface="Symbol" pitchFamily="18" charset="2"/>
               </a:rPr>
               <a:t>, </a:t>
@@ -15096,20 +14342,17 @@
               <a:t> &gt;  </a:t>
             </a:r>
             <a:r>
-              <a:rPr lang="en-US" altLang="ja-JP" sz="2800" b="0" i="1" dirty="0" smtClean="0">
+              <a:rPr lang="en-US" altLang="ja-JP" sz="2800" b="0" i="1" dirty="0">
                 <a:sym typeface="Symbol" pitchFamily="18" charset="2"/>
               </a:rPr>
               <a:t>m</a:t>
             </a:r>
             <a:r>
-              <a:rPr lang="en-US" altLang="ja-JP" sz="2800" b="0" baseline="-25000" dirty="0" smtClean="0">
+              <a:rPr lang="en-US" altLang="ja-JP" sz="2800" b="0" baseline="-25000" dirty="0">
                 <a:sym typeface="Symbol" pitchFamily="18" charset="2"/>
               </a:rPr>
               <a:t>2</a:t>
             </a:r>
-            <a:endParaRPr lang="en-US" altLang="ja-JP" sz="2800" b="0" baseline="-25000" dirty="0">
-              <a:sym typeface="Symbol" pitchFamily="18" charset="2"/>
-            </a:endParaRPr>
           </a:p>
           <a:p>
             <a:r>
@@ -15119,13 +14362,13 @@
               <a:t>              &lt; (</a:t>
             </a:r>
             <a:r>
-              <a:rPr lang="en-US" altLang="ja-JP" sz="2800" b="0" i="1" dirty="0" smtClean="0">
+              <a:rPr lang="en-US" altLang="ja-JP" sz="2800" b="0" i="1" dirty="0">
                 <a:sym typeface="Symbol" pitchFamily="18" charset="2"/>
               </a:rPr>
               <a:t>a</a:t>
             </a:r>
             <a:r>
-              <a:rPr lang="en-US" altLang="ja-JP" sz="2800" b="0" baseline="-25000" dirty="0" smtClean="0">
+              <a:rPr lang="en-US" altLang="ja-JP" sz="2800" b="0" baseline="-25000" dirty="0">
                 <a:sym typeface="Symbol" pitchFamily="18" charset="2"/>
               </a:rPr>
               <a:t>1  </a:t>
@@ -15137,28 +14380,22 @@
               <a:t>* </a:t>
             </a:r>
             <a:r>
-              <a:rPr lang="en-US" altLang="ja-JP" sz="2800" b="0" i="1" dirty="0" smtClean="0">
+              <a:rPr lang="en-US" altLang="ja-JP" sz="2800" b="0" i="1" dirty="0">
                 <a:sym typeface="Symbol" pitchFamily="18" charset="2"/>
               </a:rPr>
               <a:t>a</a:t>
             </a:r>
             <a:r>
-              <a:rPr lang="en-US" altLang="ja-JP" sz="2800" b="0" baseline="-25000" dirty="0" smtClean="0">
+              <a:rPr lang="en-US" altLang="ja-JP" sz="2800" b="0" baseline="-25000" dirty="0">
                 <a:sym typeface="Symbol" pitchFamily="18" charset="2"/>
               </a:rPr>
               <a:t>2</a:t>
             </a:r>
             <a:r>
-              <a:rPr lang="en-US" altLang="ja-JP" sz="2800" b="0" dirty="0" smtClean="0">
-                <a:sym typeface="Symbol" pitchFamily="18" charset="2"/>
-              </a:rPr>
-              <a:t> </a:t>
-            </a:r>
-            <a:r>
               <a:rPr lang="en-US" altLang="ja-JP" sz="2800" b="0" dirty="0">
                 <a:sym typeface="Symbol" pitchFamily="18" charset="2"/>
               </a:rPr>
-              <a:t>), </a:t>
+              <a:t> ), </a:t>
             </a:r>
             <a:r>
               <a:rPr lang="en-US" altLang="ja-JP" sz="2800" b="0" i="1" dirty="0">
@@ -15173,7 +14410,7 @@
               <a:t> &gt;  </a:t>
             </a:r>
             <a:r>
-              <a:rPr lang="en-US" altLang="ja-JP" sz="2800" b="0" i="1" dirty="0" smtClean="0">
+              <a:rPr lang="en-US" altLang="ja-JP" sz="2800" b="0" i="1" dirty="0">
                 <a:sym typeface="Symbol" pitchFamily="18" charset="2"/>
               </a:rPr>
               <a:t>m     </a:t>
@@ -15240,44 +14477,40 @@
           <a:lstStyle/>
           <a:p>
             <a:r>
-              <a:rPr lang="ja-JP" altLang="en-US" sz="2800" b="0" dirty="0" smtClean="0"/>
+              <a:rPr lang="ja-JP" altLang="en-US" sz="2800" b="0" dirty="0"/>
               <a:t>（</a:t>
             </a:r>
             <a:r>
-              <a:rPr lang="en-US" altLang="ja-JP" sz="2800" b="0" i="1" dirty="0" smtClean="0"/>
+              <a:rPr lang="en-US" altLang="ja-JP" sz="2800" b="0" i="1" dirty="0"/>
               <a:t>m</a:t>
             </a:r>
             <a:r>
-              <a:rPr lang="ja-JP" altLang="en-US" sz="2800" b="0" dirty="0" smtClean="0"/>
+              <a:rPr lang="ja-JP" altLang="en-US" sz="2800" b="0" dirty="0"/>
               <a:t>は</a:t>
             </a:r>
             <a:r>
-              <a:rPr lang="en-US" altLang="ja-JP" sz="2800" b="0" i="1" dirty="0" smtClean="0"/>
+              <a:rPr lang="en-US" altLang="ja-JP" sz="2800" b="0" i="1" dirty="0"/>
               <a:t>m</a:t>
             </a:r>
             <a:r>
-              <a:rPr lang="en-US" altLang="ja-JP" sz="2800" b="0" baseline="-25000" dirty="0" smtClean="0"/>
+              <a:rPr lang="en-US" altLang="ja-JP" sz="2800" b="0" baseline="-25000" dirty="0"/>
               <a:t>1</a:t>
             </a:r>
             <a:r>
-              <a:rPr lang="ja-JP" altLang="en-US" sz="2800" b="0" dirty="0" smtClean="0"/>
+              <a:rPr lang="ja-JP" altLang="en-US" sz="2800" b="0" dirty="0"/>
               <a:t>と</a:t>
             </a:r>
             <a:r>
-              <a:rPr lang="en-US" altLang="ja-JP" sz="2800" b="0" i="1" dirty="0" smtClean="0"/>
+              <a:rPr lang="en-US" altLang="ja-JP" sz="2800" b="0" i="1" dirty="0"/>
               <a:t>m</a:t>
             </a:r>
             <a:r>
-              <a:rPr lang="en-US" altLang="ja-JP" sz="2800" b="0" baseline="-25000" dirty="0" smtClean="0"/>
+              <a:rPr lang="en-US" altLang="ja-JP" sz="2800" b="0" baseline="-25000" dirty="0"/>
               <a:t>2</a:t>
             </a:r>
             <a:r>
-              <a:rPr lang="ja-JP" altLang="en-US" sz="2800" b="0" dirty="0" smtClean="0"/>
-              <a:t>の</a:t>
-            </a:r>
-            <a:r>
               <a:rPr lang="ja-JP" altLang="en-US" sz="2800" b="0" dirty="0"/>
-              <a:t>積）</a:t>
+              <a:t>の積）</a:t>
             </a:r>
           </a:p>
         </p:txBody>
@@ -15287,13 +14520,6 @@
   <p:clrMapOvr>
     <a:masterClrMapping/>
   </p:clrMapOvr>
-  <p:timing>
-    <p:tnLst>
-      <p:par>
-        <p:cTn xmlns:p14="http://schemas.microsoft.com/office/powerpoint/2010/main" id="1" dur="indefinite" restart="never" nodeType="tmRoot"/>
-      </p:par>
-    </p:tnLst>
-  </p:timing>
 </p:sld>
 </file>
 
